--- a/fem_stuff.pptx
+++ b/fem_stuff.pptx
@@ -6,8 +6,12 @@
   </p:sldMasterIdLst>
   <p:sldIdLst>
     <p:sldId id="256" r:id="rId2"/>
-    <p:sldId id="257" r:id="rId3"/>
-    <p:sldId id="258" r:id="rId4"/>
+    <p:sldId id="259" r:id="rId3"/>
+    <p:sldId id="260" r:id="rId4"/>
+    <p:sldId id="261" r:id="rId5"/>
+    <p:sldId id="257" r:id="rId6"/>
+    <p:sldId id="258" r:id="rId7"/>
+    <p:sldId id="262" r:id="rId8"/>
   </p:sldIdLst>
   <p:sldSz cx="12192000" cy="6858000"/>
   <p:notesSz cx="6858000" cy="9144000"/>
@@ -106,6 +110,11 @@
       </a:defRPr>
     </a:lvl9pPr>
   </p:defaultTextStyle>
+  <p:extLst>
+    <p:ext uri="{EFAFB233-063F-42B5-8137-9DF3F51BA10A}">
+      <p15:sldGuideLst xmlns:p15="http://schemas.microsoft.com/office/powerpoint/2012/main"/>
+    </p:ext>
+  </p:extLst>
 </p:presentation>
 </file>
 
@@ -256,7 +265,7 @@
           <a:p>
             <a:fld id="{EEA21B2A-F9C6-4572-9839-0A6F25716202}" type="datetimeFigureOut">
               <a:rPr lang="en-US" smtClean="0"/>
-              <a:t>10/13/2026</a:t>
+              <a:t>10/16/2026</a:t>
             </a:fld>
             <a:endParaRPr lang="en-US"/>
           </a:p>
@@ -454,7 +463,7 @@
           <a:p>
             <a:fld id="{EEA21B2A-F9C6-4572-9839-0A6F25716202}" type="datetimeFigureOut">
               <a:rPr lang="en-US" smtClean="0"/>
-              <a:t>10/13/2026</a:t>
+              <a:t>10/16/2026</a:t>
             </a:fld>
             <a:endParaRPr lang="en-US"/>
           </a:p>
@@ -662,7 +671,7 @@
           <a:p>
             <a:fld id="{EEA21B2A-F9C6-4572-9839-0A6F25716202}" type="datetimeFigureOut">
               <a:rPr lang="en-US" smtClean="0"/>
-              <a:t>10/13/2026</a:t>
+              <a:t>10/16/2026</a:t>
             </a:fld>
             <a:endParaRPr lang="en-US"/>
           </a:p>
@@ -860,7 +869,7 @@
           <a:p>
             <a:fld id="{EEA21B2A-F9C6-4572-9839-0A6F25716202}" type="datetimeFigureOut">
               <a:rPr lang="en-US" smtClean="0"/>
-              <a:t>10/13/2026</a:t>
+              <a:t>10/16/2026</a:t>
             </a:fld>
             <a:endParaRPr lang="en-US"/>
           </a:p>
@@ -1135,7 +1144,7 @@
           <a:p>
             <a:fld id="{EEA21B2A-F9C6-4572-9839-0A6F25716202}" type="datetimeFigureOut">
               <a:rPr lang="en-US" smtClean="0"/>
-              <a:t>10/13/2026</a:t>
+              <a:t>10/16/2026</a:t>
             </a:fld>
             <a:endParaRPr lang="en-US"/>
           </a:p>
@@ -1400,7 +1409,7 @@
           <a:p>
             <a:fld id="{EEA21B2A-F9C6-4572-9839-0A6F25716202}" type="datetimeFigureOut">
               <a:rPr lang="en-US" smtClean="0"/>
-              <a:t>10/13/2026</a:t>
+              <a:t>10/16/2026</a:t>
             </a:fld>
             <a:endParaRPr lang="en-US"/>
           </a:p>
@@ -1812,7 +1821,7 @@
           <a:p>
             <a:fld id="{EEA21B2A-F9C6-4572-9839-0A6F25716202}" type="datetimeFigureOut">
               <a:rPr lang="en-US" smtClean="0"/>
-              <a:t>10/13/2026</a:t>
+              <a:t>10/16/2026</a:t>
             </a:fld>
             <a:endParaRPr lang="en-US"/>
           </a:p>
@@ -1953,7 +1962,7 @@
           <a:p>
             <a:fld id="{EEA21B2A-F9C6-4572-9839-0A6F25716202}" type="datetimeFigureOut">
               <a:rPr lang="en-US" smtClean="0"/>
-              <a:t>10/13/2026</a:t>
+              <a:t>10/16/2026</a:t>
             </a:fld>
             <a:endParaRPr lang="en-US"/>
           </a:p>
@@ -2066,7 +2075,7 @@
           <a:p>
             <a:fld id="{EEA21B2A-F9C6-4572-9839-0A6F25716202}" type="datetimeFigureOut">
               <a:rPr lang="en-US" smtClean="0"/>
-              <a:t>10/13/2026</a:t>
+              <a:t>10/16/2026</a:t>
             </a:fld>
             <a:endParaRPr lang="en-US"/>
           </a:p>
@@ -2377,7 +2386,7 @@
           <a:p>
             <a:fld id="{EEA21B2A-F9C6-4572-9839-0A6F25716202}" type="datetimeFigureOut">
               <a:rPr lang="en-US" smtClean="0"/>
-              <a:t>10/13/2026</a:t>
+              <a:t>10/16/2026</a:t>
             </a:fld>
             <a:endParaRPr lang="en-US"/>
           </a:p>
@@ -2665,7 +2674,7 @@
           <a:p>
             <a:fld id="{EEA21B2A-F9C6-4572-9839-0A6F25716202}" type="datetimeFigureOut">
               <a:rPr lang="en-US" smtClean="0"/>
-              <a:t>10/13/2026</a:t>
+              <a:t>10/16/2026</a:t>
             </a:fld>
             <a:endParaRPr lang="en-US"/>
           </a:p>
@@ -2906,7 +2915,7 @@
           <a:p>
             <a:fld id="{EEA21B2A-F9C6-4572-9839-0A6F25716202}" type="datetimeFigureOut">
               <a:rPr lang="en-US" smtClean="0"/>
-              <a:t>10/13/2026</a:t>
+              <a:t>10/16/2026</a:t>
             </a:fld>
             <a:endParaRPr lang="en-US"/>
           </a:p>
@@ -3413,6 +3422,7351 @@
         <mc:Choice xmlns:a14="http://schemas.microsoft.com/office/drawing/2010/main" Requires="a14">
           <p:sp>
             <p:nvSpPr>
+              <p:cNvPr id="4" name="TextBox 3">
+                <a:extLst>
+                  <a:ext uri="{FF2B5EF4-FFF2-40B4-BE49-F238E27FC236}">
+                    <a16:creationId xmlns:a16="http://schemas.microsoft.com/office/drawing/2014/main" id="{7F748C4F-DF61-6D3F-C564-4F381C1906DA}"/>
+                  </a:ext>
+                </a:extLst>
+              </p:cNvPr>
+              <p:cNvSpPr txBox="1"/>
+              <p:nvPr/>
+            </p:nvSpPr>
+            <p:spPr>
+              <a:xfrm>
+                <a:off x="2819400" y="539750"/>
+                <a:ext cx="5999078" cy="354905"/>
+              </a:xfrm>
+              <a:prstGeom prst="rect">
+                <a:avLst/>
+              </a:prstGeom>
+              <a:noFill/>
+            </p:spPr>
+            <p:txBody>
+              <a:bodyPr wrap="none" lIns="0" tIns="0" rIns="0" bIns="0" rtlCol="0">
+                <a:spAutoFit/>
+              </a:bodyPr>
+              <a:lstStyle/>
+              <a:p>
+                <a14:m>
+                  <m:oMathPara xmlns:m="http://schemas.openxmlformats.org/officeDocument/2006/math">
+                    <m:oMathParaPr>
+                      <m:jc m:val="centerGroup"/>
+                    </m:oMathParaPr>
+                    <m:oMath xmlns:m="http://schemas.openxmlformats.org/officeDocument/2006/math">
+                      <m:sSup>
+                        <m:sSupPr>
+                          <m:ctrlPr>
+                            <a:rPr lang="en-US" b="0" i="1" smtClean="0">
+                              <a:latin typeface="Cambria Math" panose="02040503050406030204" pitchFamily="18" charset="0"/>
+                            </a:rPr>
+                          </m:ctrlPr>
+                        </m:sSupPr>
+                        <m:e>
+                          <m:r>
+                            <a:rPr lang="en-US" b="0" i="1" smtClean="0">
+                              <a:latin typeface="Cambria Math" panose="02040503050406030204" pitchFamily="18" charset="0"/>
+                            </a:rPr>
+                            <m:t>𝜙</m:t>
+                          </m:r>
+                        </m:e>
+                        <m:sup>
+                          <m:d>
+                            <m:dPr>
+                              <m:ctrlPr>
+                                <a:rPr lang="en-US" b="0" i="1" smtClean="0">
+                                  <a:latin typeface="Cambria Math" panose="02040503050406030204" pitchFamily="18" charset="0"/>
+                                </a:rPr>
+                              </m:ctrlPr>
+                            </m:dPr>
+                            <m:e>
+                              <m:r>
+                                <a:rPr lang="en-US" b="0" i="1" smtClean="0">
+                                  <a:latin typeface="Cambria Math" panose="02040503050406030204" pitchFamily="18" charset="0"/>
+                                </a:rPr>
+                                <m:t>𝑒</m:t>
+                              </m:r>
+                            </m:e>
+                          </m:d>
+                        </m:sup>
+                      </m:sSup>
+                      <m:d>
+                        <m:dPr>
+                          <m:ctrlPr>
+                            <a:rPr lang="en-US" b="0" i="1" smtClean="0">
+                              <a:latin typeface="Cambria Math" panose="02040503050406030204" pitchFamily="18" charset="0"/>
+                            </a:rPr>
+                          </m:ctrlPr>
+                        </m:dPr>
+                        <m:e>
+                          <m:r>
+                            <a:rPr lang="en-US" b="0" i="1" smtClean="0">
+                              <a:latin typeface="Cambria Math" panose="02040503050406030204" pitchFamily="18" charset="0"/>
+                            </a:rPr>
+                            <m:t>𝑥</m:t>
+                          </m:r>
+                          <m:r>
+                            <a:rPr lang="en-US" b="0" i="1" smtClean="0">
+                              <a:latin typeface="Cambria Math" panose="02040503050406030204" pitchFamily="18" charset="0"/>
+                            </a:rPr>
+                            <m:t>,</m:t>
+                          </m:r>
+                          <m:r>
+                            <a:rPr lang="en-US" b="0" i="1" smtClean="0">
+                              <a:latin typeface="Cambria Math" panose="02040503050406030204" pitchFamily="18" charset="0"/>
+                            </a:rPr>
+                            <m:t>𝑦</m:t>
+                          </m:r>
+                        </m:e>
+                      </m:d>
+                      <m:r>
+                        <a:rPr lang="en-US" b="0" i="1" smtClean="0">
+                          <a:latin typeface="Cambria Math" panose="02040503050406030204" pitchFamily="18" charset="0"/>
+                        </a:rPr>
+                        <m:t>=</m:t>
+                      </m:r>
+                      <m:sSubSup>
+                        <m:sSubSupPr>
+                          <m:ctrlPr>
+                            <a:rPr lang="en-US" b="0" i="1" smtClean="0">
+                              <a:latin typeface="Cambria Math" panose="02040503050406030204" pitchFamily="18" charset="0"/>
+                            </a:rPr>
+                          </m:ctrlPr>
+                        </m:sSubSupPr>
+                        <m:e>
+                          <m:r>
+                            <a:rPr lang="en-US" b="0" i="1" smtClean="0">
+                              <a:latin typeface="Cambria Math" panose="02040503050406030204" pitchFamily="18" charset="0"/>
+                            </a:rPr>
+                            <m:t>𝑁</m:t>
+                          </m:r>
+                        </m:e>
+                        <m:sub>
+                          <m:r>
+                            <a:rPr lang="en-US" b="0" i="1" smtClean="0">
+                              <a:latin typeface="Cambria Math" panose="02040503050406030204" pitchFamily="18" charset="0"/>
+                            </a:rPr>
+                            <m:t>1</m:t>
+                          </m:r>
+                        </m:sub>
+                        <m:sup>
+                          <m:d>
+                            <m:dPr>
+                              <m:ctrlPr>
+                                <a:rPr lang="en-US" b="0" i="1" smtClean="0">
+                                  <a:latin typeface="Cambria Math" panose="02040503050406030204" pitchFamily="18" charset="0"/>
+                                </a:rPr>
+                              </m:ctrlPr>
+                            </m:dPr>
+                            <m:e>
+                              <m:r>
+                                <a:rPr lang="en-US" b="0" i="1" smtClean="0">
+                                  <a:latin typeface="Cambria Math" panose="02040503050406030204" pitchFamily="18" charset="0"/>
+                                </a:rPr>
+                                <m:t>𝑒</m:t>
+                              </m:r>
+                            </m:e>
+                          </m:d>
+                        </m:sup>
+                      </m:sSubSup>
+                      <m:d>
+                        <m:dPr>
+                          <m:ctrlPr>
+                            <a:rPr lang="en-US" b="0" i="1" smtClean="0">
+                              <a:latin typeface="Cambria Math" panose="02040503050406030204" pitchFamily="18" charset="0"/>
+                            </a:rPr>
+                          </m:ctrlPr>
+                        </m:dPr>
+                        <m:e>
+                          <m:r>
+                            <a:rPr lang="en-US" b="0" i="1" smtClean="0">
+                              <a:latin typeface="Cambria Math" panose="02040503050406030204" pitchFamily="18" charset="0"/>
+                            </a:rPr>
+                            <m:t>𝑥</m:t>
+                          </m:r>
+                          <m:r>
+                            <a:rPr lang="en-US" b="0" i="1" smtClean="0">
+                              <a:latin typeface="Cambria Math" panose="02040503050406030204" pitchFamily="18" charset="0"/>
+                            </a:rPr>
+                            <m:t>,</m:t>
+                          </m:r>
+                          <m:r>
+                            <a:rPr lang="en-US" b="0" i="1" smtClean="0">
+                              <a:latin typeface="Cambria Math" panose="02040503050406030204" pitchFamily="18" charset="0"/>
+                            </a:rPr>
+                            <m:t>𝑦</m:t>
+                          </m:r>
+                        </m:e>
+                      </m:d>
+                      <m:sSubSup>
+                        <m:sSubSupPr>
+                          <m:ctrlPr>
+                            <a:rPr lang="en-US" b="0" i="1" smtClean="0">
+                              <a:latin typeface="Cambria Math" panose="02040503050406030204" pitchFamily="18" charset="0"/>
+                            </a:rPr>
+                          </m:ctrlPr>
+                        </m:sSubSupPr>
+                        <m:e>
+                          <m:r>
+                            <a:rPr lang="en-US" b="0" i="1" smtClean="0">
+                              <a:latin typeface="Cambria Math" panose="02040503050406030204" pitchFamily="18" charset="0"/>
+                            </a:rPr>
+                            <m:t>𝜙</m:t>
+                          </m:r>
+                        </m:e>
+                        <m:sub>
+                          <m:r>
+                            <a:rPr lang="en-US" b="0" i="1" smtClean="0">
+                              <a:latin typeface="Cambria Math" panose="02040503050406030204" pitchFamily="18" charset="0"/>
+                            </a:rPr>
+                            <m:t>1</m:t>
+                          </m:r>
+                        </m:sub>
+                        <m:sup>
+                          <m:d>
+                            <m:dPr>
+                              <m:ctrlPr>
+                                <a:rPr lang="en-US" b="0" i="1" smtClean="0">
+                                  <a:latin typeface="Cambria Math" panose="02040503050406030204" pitchFamily="18" charset="0"/>
+                                </a:rPr>
+                              </m:ctrlPr>
+                            </m:dPr>
+                            <m:e>
+                              <m:r>
+                                <a:rPr lang="en-US" b="0" i="1" smtClean="0">
+                                  <a:latin typeface="Cambria Math" panose="02040503050406030204" pitchFamily="18" charset="0"/>
+                                </a:rPr>
+                                <m:t>𝑒</m:t>
+                              </m:r>
+                            </m:e>
+                          </m:d>
+                        </m:sup>
+                      </m:sSubSup>
+                      <m:r>
+                        <a:rPr lang="en-US" b="0" i="1" smtClean="0">
+                          <a:latin typeface="Cambria Math" panose="02040503050406030204" pitchFamily="18" charset="0"/>
+                        </a:rPr>
+                        <m:t>+</m:t>
+                      </m:r>
+                      <m:sSubSup>
+                        <m:sSubSupPr>
+                          <m:ctrlPr>
+                            <a:rPr lang="en-US" i="1">
+                              <a:latin typeface="Cambria Math" panose="02040503050406030204" pitchFamily="18" charset="0"/>
+                            </a:rPr>
+                          </m:ctrlPr>
+                        </m:sSubSupPr>
+                        <m:e>
+                          <m:r>
+                            <a:rPr lang="en-US" i="1">
+                              <a:latin typeface="Cambria Math" panose="02040503050406030204" pitchFamily="18" charset="0"/>
+                            </a:rPr>
+                            <m:t>𝑁</m:t>
+                          </m:r>
+                        </m:e>
+                        <m:sub>
+                          <m:r>
+                            <a:rPr lang="en-US" b="0" i="1" smtClean="0">
+                              <a:latin typeface="Cambria Math" panose="02040503050406030204" pitchFamily="18" charset="0"/>
+                            </a:rPr>
+                            <m:t>2</m:t>
+                          </m:r>
+                        </m:sub>
+                        <m:sup>
+                          <m:d>
+                            <m:dPr>
+                              <m:ctrlPr>
+                                <a:rPr lang="en-US" i="1">
+                                  <a:latin typeface="Cambria Math" panose="02040503050406030204" pitchFamily="18" charset="0"/>
+                                </a:rPr>
+                              </m:ctrlPr>
+                            </m:dPr>
+                            <m:e>
+                              <m:r>
+                                <a:rPr lang="en-US" i="1">
+                                  <a:latin typeface="Cambria Math" panose="02040503050406030204" pitchFamily="18" charset="0"/>
+                                </a:rPr>
+                                <m:t>𝑒</m:t>
+                              </m:r>
+                            </m:e>
+                          </m:d>
+                        </m:sup>
+                      </m:sSubSup>
+                      <m:d>
+                        <m:dPr>
+                          <m:ctrlPr>
+                            <a:rPr lang="en-US" i="1">
+                              <a:latin typeface="Cambria Math" panose="02040503050406030204" pitchFamily="18" charset="0"/>
+                            </a:rPr>
+                          </m:ctrlPr>
+                        </m:dPr>
+                        <m:e>
+                          <m:r>
+                            <a:rPr lang="en-US" i="1">
+                              <a:latin typeface="Cambria Math" panose="02040503050406030204" pitchFamily="18" charset="0"/>
+                            </a:rPr>
+                            <m:t>𝑥</m:t>
+                          </m:r>
+                          <m:r>
+                            <a:rPr lang="en-US" i="1">
+                              <a:latin typeface="Cambria Math" panose="02040503050406030204" pitchFamily="18" charset="0"/>
+                            </a:rPr>
+                            <m:t>,</m:t>
+                          </m:r>
+                          <m:r>
+                            <a:rPr lang="en-US" i="1">
+                              <a:latin typeface="Cambria Math" panose="02040503050406030204" pitchFamily="18" charset="0"/>
+                            </a:rPr>
+                            <m:t>𝑦</m:t>
+                          </m:r>
+                        </m:e>
+                      </m:d>
+                      <m:sSubSup>
+                        <m:sSubSupPr>
+                          <m:ctrlPr>
+                            <a:rPr lang="en-US" i="1">
+                              <a:latin typeface="Cambria Math" panose="02040503050406030204" pitchFamily="18" charset="0"/>
+                            </a:rPr>
+                          </m:ctrlPr>
+                        </m:sSubSupPr>
+                        <m:e>
+                          <m:r>
+                            <a:rPr lang="en-US" i="1">
+                              <a:latin typeface="Cambria Math" panose="02040503050406030204" pitchFamily="18" charset="0"/>
+                            </a:rPr>
+                            <m:t>𝜙</m:t>
+                          </m:r>
+                        </m:e>
+                        <m:sub>
+                          <m:r>
+                            <a:rPr lang="en-US" b="0" i="1" smtClean="0">
+                              <a:latin typeface="Cambria Math" panose="02040503050406030204" pitchFamily="18" charset="0"/>
+                            </a:rPr>
+                            <m:t>2</m:t>
+                          </m:r>
+                        </m:sub>
+                        <m:sup>
+                          <m:d>
+                            <m:dPr>
+                              <m:ctrlPr>
+                                <a:rPr lang="en-US" i="1">
+                                  <a:latin typeface="Cambria Math" panose="02040503050406030204" pitchFamily="18" charset="0"/>
+                                </a:rPr>
+                              </m:ctrlPr>
+                            </m:dPr>
+                            <m:e>
+                              <m:r>
+                                <a:rPr lang="en-US" i="1">
+                                  <a:latin typeface="Cambria Math" panose="02040503050406030204" pitchFamily="18" charset="0"/>
+                                </a:rPr>
+                                <m:t>𝑒</m:t>
+                              </m:r>
+                            </m:e>
+                          </m:d>
+                        </m:sup>
+                      </m:sSubSup>
+                      <m:r>
+                        <a:rPr lang="en-US" b="0" i="1" smtClean="0">
+                          <a:latin typeface="Cambria Math" panose="02040503050406030204" pitchFamily="18" charset="0"/>
+                        </a:rPr>
+                        <m:t>+</m:t>
+                      </m:r>
+                      <m:sSubSup>
+                        <m:sSubSupPr>
+                          <m:ctrlPr>
+                            <a:rPr lang="en-US" i="1">
+                              <a:latin typeface="Cambria Math" panose="02040503050406030204" pitchFamily="18" charset="0"/>
+                            </a:rPr>
+                          </m:ctrlPr>
+                        </m:sSubSupPr>
+                        <m:e>
+                          <m:r>
+                            <a:rPr lang="en-US" i="1">
+                              <a:latin typeface="Cambria Math" panose="02040503050406030204" pitchFamily="18" charset="0"/>
+                            </a:rPr>
+                            <m:t>𝑁</m:t>
+                          </m:r>
+                        </m:e>
+                        <m:sub>
+                          <m:r>
+                            <a:rPr lang="en-US" b="0" i="1" smtClean="0">
+                              <a:latin typeface="Cambria Math" panose="02040503050406030204" pitchFamily="18" charset="0"/>
+                            </a:rPr>
+                            <m:t>3</m:t>
+                          </m:r>
+                        </m:sub>
+                        <m:sup>
+                          <m:d>
+                            <m:dPr>
+                              <m:ctrlPr>
+                                <a:rPr lang="en-US" i="1">
+                                  <a:latin typeface="Cambria Math" panose="02040503050406030204" pitchFamily="18" charset="0"/>
+                                </a:rPr>
+                              </m:ctrlPr>
+                            </m:dPr>
+                            <m:e>
+                              <m:r>
+                                <a:rPr lang="en-US" i="1">
+                                  <a:latin typeface="Cambria Math" panose="02040503050406030204" pitchFamily="18" charset="0"/>
+                                </a:rPr>
+                                <m:t>𝑒</m:t>
+                              </m:r>
+                            </m:e>
+                          </m:d>
+                        </m:sup>
+                      </m:sSubSup>
+                      <m:d>
+                        <m:dPr>
+                          <m:ctrlPr>
+                            <a:rPr lang="en-US" i="1">
+                              <a:latin typeface="Cambria Math" panose="02040503050406030204" pitchFamily="18" charset="0"/>
+                            </a:rPr>
+                          </m:ctrlPr>
+                        </m:dPr>
+                        <m:e>
+                          <m:r>
+                            <a:rPr lang="en-US" i="1">
+                              <a:latin typeface="Cambria Math" panose="02040503050406030204" pitchFamily="18" charset="0"/>
+                            </a:rPr>
+                            <m:t>𝑥</m:t>
+                          </m:r>
+                          <m:r>
+                            <a:rPr lang="en-US" i="1">
+                              <a:latin typeface="Cambria Math" panose="02040503050406030204" pitchFamily="18" charset="0"/>
+                            </a:rPr>
+                            <m:t>,</m:t>
+                          </m:r>
+                          <m:r>
+                            <a:rPr lang="en-US" i="1">
+                              <a:latin typeface="Cambria Math" panose="02040503050406030204" pitchFamily="18" charset="0"/>
+                            </a:rPr>
+                            <m:t>𝑦</m:t>
+                          </m:r>
+                        </m:e>
+                      </m:d>
+                      <m:sSubSup>
+                        <m:sSubSupPr>
+                          <m:ctrlPr>
+                            <a:rPr lang="en-US" i="1">
+                              <a:latin typeface="Cambria Math" panose="02040503050406030204" pitchFamily="18" charset="0"/>
+                            </a:rPr>
+                          </m:ctrlPr>
+                        </m:sSubSupPr>
+                        <m:e>
+                          <m:r>
+                            <a:rPr lang="en-US" i="1">
+                              <a:latin typeface="Cambria Math" panose="02040503050406030204" pitchFamily="18" charset="0"/>
+                            </a:rPr>
+                            <m:t>𝜙</m:t>
+                          </m:r>
+                        </m:e>
+                        <m:sub>
+                          <m:r>
+                            <a:rPr lang="en-US" b="0" i="1" smtClean="0">
+                              <a:latin typeface="Cambria Math" panose="02040503050406030204" pitchFamily="18" charset="0"/>
+                            </a:rPr>
+                            <m:t>3</m:t>
+                          </m:r>
+                        </m:sub>
+                        <m:sup>
+                          <m:d>
+                            <m:dPr>
+                              <m:ctrlPr>
+                                <a:rPr lang="en-US" i="1">
+                                  <a:latin typeface="Cambria Math" panose="02040503050406030204" pitchFamily="18" charset="0"/>
+                                </a:rPr>
+                              </m:ctrlPr>
+                            </m:dPr>
+                            <m:e>
+                              <m:r>
+                                <a:rPr lang="en-US" i="1">
+                                  <a:latin typeface="Cambria Math" panose="02040503050406030204" pitchFamily="18" charset="0"/>
+                                </a:rPr>
+                                <m:t>𝑒</m:t>
+                              </m:r>
+                            </m:e>
+                          </m:d>
+                        </m:sup>
+                      </m:sSubSup>
+                    </m:oMath>
+                  </m:oMathPara>
+                </a14:m>
+                <a:endParaRPr lang="en-US" dirty="0"/>
+              </a:p>
+            </p:txBody>
+          </p:sp>
+        </mc:Choice>
+        <mc:Fallback>
+          <p:sp>
+            <p:nvSpPr>
+              <p:cNvPr id="4" name="TextBox 3">
+                <a:extLst>
+                  <a:ext uri="{FF2B5EF4-FFF2-40B4-BE49-F238E27FC236}">
+                    <a16:creationId xmlns:a16="http://schemas.microsoft.com/office/drawing/2014/main" id="{7F748C4F-DF61-6D3F-C564-4F381C1906DA}"/>
+                  </a:ext>
+                </a:extLst>
+              </p:cNvPr>
+              <p:cNvSpPr txBox="1">
+                <a:spLocks noRot="1" noChangeAspect="1" noMove="1" noResize="1" noEditPoints="1" noAdjustHandles="1" noChangeArrowheads="1" noChangeShapeType="1" noTextEdit="1"/>
+              </p:cNvSpPr>
+              <p:nvPr/>
+            </p:nvSpPr>
+            <p:spPr>
+              <a:xfrm>
+                <a:off x="2819400" y="539750"/>
+                <a:ext cx="5999078" cy="354905"/>
+              </a:xfrm>
+              <a:prstGeom prst="rect">
+                <a:avLst/>
+              </a:prstGeom>
+              <a:blipFill>
+                <a:blip r:embed="rId2"/>
+                <a:stretch>
+                  <a:fillRect l="-1016" b="-20690"/>
+                </a:stretch>
+              </a:blipFill>
+            </p:spPr>
+            <p:txBody>
+              <a:bodyPr/>
+              <a:lstStyle/>
+              <a:p>
+                <a:r>
+                  <a:rPr lang="en-US">
+                    <a:noFill/>
+                  </a:rPr>
+                  <a:t> </a:t>
+                </a:r>
+              </a:p>
+            </p:txBody>
+          </p:sp>
+        </mc:Fallback>
+      </mc:AlternateContent>
+      <p:cxnSp>
+        <p:nvCxnSpPr>
+          <p:cNvPr id="8" name="Straight Connector 7">
+            <a:extLst>
+              <a:ext uri="{FF2B5EF4-FFF2-40B4-BE49-F238E27FC236}">
+                <a16:creationId xmlns:a16="http://schemas.microsoft.com/office/drawing/2014/main" id="{E824FF8A-87FD-DF42-34C3-30BEFBECC8D3}"/>
+              </a:ext>
+            </a:extLst>
+          </p:cNvPr>
+          <p:cNvCxnSpPr>
+            <a:cxnSpLocks/>
+            <a:stCxn id="9" idx="3"/>
+            <a:endCxn id="12" idx="7"/>
+          </p:cNvCxnSpPr>
+          <p:nvPr/>
+        </p:nvCxnSpPr>
+        <p:spPr>
+          <a:xfrm flipH="1">
+            <a:off x="1814691" y="2295432"/>
+            <a:ext cx="783868" cy="1295585"/>
+          </a:xfrm>
+          <a:prstGeom prst="line">
+            <a:avLst/>
+          </a:prstGeom>
+        </p:spPr>
+        <p:style>
+          <a:lnRef idx="2">
+            <a:schemeClr val="dk1"/>
+          </a:lnRef>
+          <a:fillRef idx="0">
+            <a:schemeClr val="dk1"/>
+          </a:fillRef>
+          <a:effectRef idx="1">
+            <a:schemeClr val="dk1"/>
+          </a:effectRef>
+          <a:fontRef idx="minor">
+            <a:schemeClr val="tx1"/>
+          </a:fontRef>
+        </p:style>
+      </p:cxnSp>
+      <p:sp>
+        <p:nvSpPr>
+          <p:cNvPr id="9" name="Oval 8">
+            <a:extLst>
+              <a:ext uri="{FF2B5EF4-FFF2-40B4-BE49-F238E27FC236}">
+                <a16:creationId xmlns:a16="http://schemas.microsoft.com/office/drawing/2014/main" id="{32B35FE0-6D34-4F81-398C-C64D503D29B8}"/>
+              </a:ext>
+            </a:extLst>
+          </p:cNvPr>
+          <p:cNvSpPr/>
+          <p:nvPr/>
+        </p:nvSpPr>
+        <p:spPr>
+          <a:xfrm>
+            <a:off x="2578100" y="2165350"/>
+            <a:ext cx="139700" cy="152400"/>
+          </a:xfrm>
+          <a:prstGeom prst="ellipse">
+            <a:avLst/>
+          </a:prstGeom>
+        </p:spPr>
+        <p:style>
+          <a:lnRef idx="2">
+            <a:schemeClr val="dk1">
+              <a:shade val="15000"/>
+            </a:schemeClr>
+          </a:lnRef>
+          <a:fillRef idx="1">
+            <a:schemeClr val="dk1"/>
+          </a:fillRef>
+          <a:effectRef idx="0">
+            <a:schemeClr val="dk1"/>
+          </a:effectRef>
+          <a:fontRef idx="minor">
+            <a:schemeClr val="lt1"/>
+          </a:fontRef>
+        </p:style>
+        <p:txBody>
+          <a:bodyPr rtlCol="0" anchor="ctr"/>
+          <a:lstStyle/>
+          <a:p>
+            <a:pPr algn="ctr"/>
+            <a:endParaRPr lang="en-US"/>
+          </a:p>
+        </p:txBody>
+      </p:sp>
+      <p:sp>
+        <p:nvSpPr>
+          <p:cNvPr id="12" name="Oval 11">
+            <a:extLst>
+              <a:ext uri="{FF2B5EF4-FFF2-40B4-BE49-F238E27FC236}">
+                <a16:creationId xmlns:a16="http://schemas.microsoft.com/office/drawing/2014/main" id="{37170290-8833-E6D9-AB3B-1FA976B45F21}"/>
+              </a:ext>
+            </a:extLst>
+          </p:cNvPr>
+          <p:cNvSpPr/>
+          <p:nvPr/>
+        </p:nvSpPr>
+        <p:spPr>
+          <a:xfrm>
+            <a:off x="1695450" y="3568699"/>
+            <a:ext cx="139700" cy="152400"/>
+          </a:xfrm>
+          <a:prstGeom prst="ellipse">
+            <a:avLst/>
+          </a:prstGeom>
+        </p:spPr>
+        <p:style>
+          <a:lnRef idx="2">
+            <a:schemeClr val="dk1">
+              <a:shade val="15000"/>
+            </a:schemeClr>
+          </a:lnRef>
+          <a:fillRef idx="1">
+            <a:schemeClr val="dk1"/>
+          </a:fillRef>
+          <a:effectRef idx="0">
+            <a:schemeClr val="dk1"/>
+          </a:effectRef>
+          <a:fontRef idx="minor">
+            <a:schemeClr val="lt1"/>
+          </a:fontRef>
+        </p:style>
+        <p:txBody>
+          <a:bodyPr rtlCol="0" anchor="ctr"/>
+          <a:lstStyle/>
+          <a:p>
+            <a:pPr algn="ctr"/>
+            <a:endParaRPr lang="en-US"/>
+          </a:p>
+        </p:txBody>
+      </p:sp>
+      <p:cxnSp>
+        <p:nvCxnSpPr>
+          <p:cNvPr id="14" name="Straight Connector 13">
+            <a:extLst>
+              <a:ext uri="{FF2B5EF4-FFF2-40B4-BE49-F238E27FC236}">
+                <a16:creationId xmlns:a16="http://schemas.microsoft.com/office/drawing/2014/main" id="{FFC19014-E8EA-4F6A-6E65-8B91FE229E35}"/>
+              </a:ext>
+            </a:extLst>
+          </p:cNvPr>
+          <p:cNvCxnSpPr>
+            <a:cxnSpLocks/>
+            <a:stCxn id="9" idx="5"/>
+            <a:endCxn id="19" idx="1"/>
+          </p:cNvCxnSpPr>
+          <p:nvPr/>
+        </p:nvCxnSpPr>
+        <p:spPr>
+          <a:xfrm>
+            <a:off x="2697341" y="2295432"/>
+            <a:ext cx="880527" cy="1301934"/>
+          </a:xfrm>
+          <a:prstGeom prst="line">
+            <a:avLst/>
+          </a:prstGeom>
+        </p:spPr>
+        <p:style>
+          <a:lnRef idx="2">
+            <a:schemeClr val="dk1"/>
+          </a:lnRef>
+          <a:fillRef idx="0">
+            <a:schemeClr val="dk1"/>
+          </a:fillRef>
+          <a:effectRef idx="1">
+            <a:schemeClr val="dk1"/>
+          </a:effectRef>
+          <a:fontRef idx="minor">
+            <a:schemeClr val="tx1"/>
+          </a:fontRef>
+        </p:style>
+      </p:cxnSp>
+      <p:cxnSp>
+        <p:nvCxnSpPr>
+          <p:cNvPr id="17" name="Straight Connector 16">
+            <a:extLst>
+              <a:ext uri="{FF2B5EF4-FFF2-40B4-BE49-F238E27FC236}">
+                <a16:creationId xmlns:a16="http://schemas.microsoft.com/office/drawing/2014/main" id="{E8F3DF58-C637-9415-E3F0-20531B39C1C2}"/>
+              </a:ext>
+            </a:extLst>
+          </p:cNvPr>
+          <p:cNvCxnSpPr>
+            <a:cxnSpLocks/>
+            <a:stCxn id="19" idx="2"/>
+            <a:endCxn id="12" idx="6"/>
+          </p:cNvCxnSpPr>
+          <p:nvPr/>
+        </p:nvCxnSpPr>
+        <p:spPr>
+          <a:xfrm flipH="1" flipV="1">
+            <a:off x="1835150" y="3644899"/>
+            <a:ext cx="1722259" cy="6349"/>
+          </a:xfrm>
+          <a:prstGeom prst="line">
+            <a:avLst/>
+          </a:prstGeom>
+        </p:spPr>
+        <p:style>
+          <a:lnRef idx="2">
+            <a:schemeClr val="dk1"/>
+          </a:lnRef>
+          <a:fillRef idx="0">
+            <a:schemeClr val="dk1"/>
+          </a:fillRef>
+          <a:effectRef idx="1">
+            <a:schemeClr val="dk1"/>
+          </a:effectRef>
+          <a:fontRef idx="minor">
+            <a:schemeClr val="tx1"/>
+          </a:fontRef>
+        </p:style>
+      </p:cxnSp>
+      <p:sp>
+        <p:nvSpPr>
+          <p:cNvPr id="19" name="Oval 18">
+            <a:extLst>
+              <a:ext uri="{FF2B5EF4-FFF2-40B4-BE49-F238E27FC236}">
+                <a16:creationId xmlns:a16="http://schemas.microsoft.com/office/drawing/2014/main" id="{98B5B611-F1AB-8510-EE6E-5AE6EB06DEE0}"/>
+              </a:ext>
+            </a:extLst>
+          </p:cNvPr>
+          <p:cNvSpPr/>
+          <p:nvPr/>
+        </p:nvSpPr>
+        <p:spPr>
+          <a:xfrm>
+            <a:off x="3557409" y="3575048"/>
+            <a:ext cx="139700" cy="152400"/>
+          </a:xfrm>
+          <a:prstGeom prst="ellipse">
+            <a:avLst/>
+          </a:prstGeom>
+        </p:spPr>
+        <p:style>
+          <a:lnRef idx="2">
+            <a:schemeClr val="dk1">
+              <a:shade val="15000"/>
+            </a:schemeClr>
+          </a:lnRef>
+          <a:fillRef idx="1">
+            <a:schemeClr val="dk1"/>
+          </a:fillRef>
+          <a:effectRef idx="0">
+            <a:schemeClr val="dk1"/>
+          </a:effectRef>
+          <a:fontRef idx="minor">
+            <a:schemeClr val="lt1"/>
+          </a:fontRef>
+        </p:style>
+        <p:txBody>
+          <a:bodyPr rtlCol="0" anchor="ctr"/>
+          <a:lstStyle/>
+          <a:p>
+            <a:pPr algn="ctr"/>
+            <a:endParaRPr lang="en-US"/>
+          </a:p>
+        </p:txBody>
+      </p:sp>
+      <mc:AlternateContent xmlns:mc="http://schemas.openxmlformats.org/markup-compatibility/2006">
+        <mc:Choice xmlns:a14="http://schemas.microsoft.com/office/drawing/2010/main" Requires="a14">
+          <p:sp>
+            <p:nvSpPr>
+              <p:cNvPr id="26" name="TextBox 25">
+                <a:extLst>
+                  <a:ext uri="{FF2B5EF4-FFF2-40B4-BE49-F238E27FC236}">
+                    <a16:creationId xmlns:a16="http://schemas.microsoft.com/office/drawing/2014/main" id="{AA9AFBFE-8DB5-581A-DD79-AAC2802CCD93}"/>
+                  </a:ext>
+                </a:extLst>
+              </p:cNvPr>
+              <p:cNvSpPr txBox="1"/>
+              <p:nvPr/>
+            </p:nvSpPr>
+            <p:spPr>
+              <a:xfrm>
+                <a:off x="1450873" y="3506398"/>
+                <a:ext cx="174727" cy="276999"/>
+              </a:xfrm>
+              <a:prstGeom prst="rect">
+                <a:avLst/>
+              </a:prstGeom>
+              <a:noFill/>
+            </p:spPr>
+            <p:txBody>
+              <a:bodyPr wrap="none" lIns="0" tIns="0" rIns="0" bIns="0" rtlCol="0">
+                <a:spAutoFit/>
+              </a:bodyPr>
+              <a:lstStyle/>
+              <a:p>
+                <a14:m>
+                  <m:oMathPara xmlns:m="http://schemas.openxmlformats.org/officeDocument/2006/math">
+                    <m:oMathParaPr>
+                      <m:jc m:val="centerGroup"/>
+                    </m:oMathParaPr>
+                    <m:oMath xmlns:m="http://schemas.openxmlformats.org/officeDocument/2006/math">
+                      <m:r>
+                        <a:rPr lang="en-US" b="0" i="1" smtClean="0">
+                          <a:latin typeface="Cambria Math" panose="02040503050406030204" pitchFamily="18" charset="0"/>
+                        </a:rPr>
+                        <m:t>1</m:t>
+                      </m:r>
+                    </m:oMath>
+                  </m:oMathPara>
+                </a14:m>
+                <a:endParaRPr lang="en-US" dirty="0"/>
+              </a:p>
+            </p:txBody>
+          </p:sp>
+        </mc:Choice>
+        <mc:Fallback>
+          <p:sp>
+            <p:nvSpPr>
+              <p:cNvPr id="26" name="TextBox 25">
+                <a:extLst>
+                  <a:ext uri="{FF2B5EF4-FFF2-40B4-BE49-F238E27FC236}">
+                    <a16:creationId xmlns:a16="http://schemas.microsoft.com/office/drawing/2014/main" id="{AA9AFBFE-8DB5-581A-DD79-AAC2802CCD93}"/>
+                  </a:ext>
+                </a:extLst>
+              </p:cNvPr>
+              <p:cNvSpPr txBox="1">
+                <a:spLocks noRot="1" noChangeAspect="1" noMove="1" noResize="1" noEditPoints="1" noAdjustHandles="1" noChangeArrowheads="1" noChangeShapeType="1" noTextEdit="1"/>
+              </p:cNvSpPr>
+              <p:nvPr/>
+            </p:nvSpPr>
+            <p:spPr>
+              <a:xfrm>
+                <a:off x="1450873" y="3506398"/>
+                <a:ext cx="174727" cy="276999"/>
+              </a:xfrm>
+              <a:prstGeom prst="rect">
+                <a:avLst/>
+              </a:prstGeom>
+              <a:blipFill>
+                <a:blip r:embed="rId3"/>
+                <a:stretch>
+                  <a:fillRect l="-31034" r="-34483" b="-6522"/>
+                </a:stretch>
+              </a:blipFill>
+            </p:spPr>
+            <p:txBody>
+              <a:bodyPr/>
+              <a:lstStyle/>
+              <a:p>
+                <a:r>
+                  <a:rPr lang="en-US">
+                    <a:noFill/>
+                  </a:rPr>
+                  <a:t> </a:t>
+                </a:r>
+              </a:p>
+            </p:txBody>
+          </p:sp>
+        </mc:Fallback>
+      </mc:AlternateContent>
+      <mc:AlternateContent xmlns:mc="http://schemas.openxmlformats.org/markup-compatibility/2006">
+        <mc:Choice xmlns:a14="http://schemas.microsoft.com/office/drawing/2010/main" Requires="a14">
+          <p:sp>
+            <p:nvSpPr>
+              <p:cNvPr id="27" name="TextBox 26">
+                <a:extLst>
+                  <a:ext uri="{FF2B5EF4-FFF2-40B4-BE49-F238E27FC236}">
+                    <a16:creationId xmlns:a16="http://schemas.microsoft.com/office/drawing/2014/main" id="{6E04381A-7E5F-483B-4650-8417CB846FDA}"/>
+                  </a:ext>
+                </a:extLst>
+              </p:cNvPr>
+              <p:cNvSpPr txBox="1"/>
+              <p:nvPr/>
+            </p:nvSpPr>
+            <p:spPr>
+              <a:xfrm>
+                <a:off x="3762273" y="3506399"/>
+                <a:ext cx="174727" cy="276999"/>
+              </a:xfrm>
+              <a:prstGeom prst="rect">
+                <a:avLst/>
+              </a:prstGeom>
+              <a:noFill/>
+            </p:spPr>
+            <p:txBody>
+              <a:bodyPr wrap="none" lIns="0" tIns="0" rIns="0" bIns="0" rtlCol="0">
+                <a:spAutoFit/>
+              </a:bodyPr>
+              <a:lstStyle/>
+              <a:p>
+                <a14:m>
+                  <m:oMathPara xmlns:m="http://schemas.openxmlformats.org/officeDocument/2006/math">
+                    <m:oMathParaPr>
+                      <m:jc m:val="centerGroup"/>
+                    </m:oMathParaPr>
+                    <m:oMath xmlns:m="http://schemas.openxmlformats.org/officeDocument/2006/math">
+                      <m:r>
+                        <a:rPr lang="en-US" b="0" i="1" smtClean="0">
+                          <a:latin typeface="Cambria Math" panose="02040503050406030204" pitchFamily="18" charset="0"/>
+                        </a:rPr>
+                        <m:t>2</m:t>
+                      </m:r>
+                    </m:oMath>
+                  </m:oMathPara>
+                </a14:m>
+                <a:endParaRPr lang="en-US" dirty="0"/>
+              </a:p>
+            </p:txBody>
+          </p:sp>
+        </mc:Choice>
+        <mc:Fallback>
+          <p:sp>
+            <p:nvSpPr>
+              <p:cNvPr id="27" name="TextBox 26">
+                <a:extLst>
+                  <a:ext uri="{FF2B5EF4-FFF2-40B4-BE49-F238E27FC236}">
+                    <a16:creationId xmlns:a16="http://schemas.microsoft.com/office/drawing/2014/main" id="{6E04381A-7E5F-483B-4650-8417CB846FDA}"/>
+                  </a:ext>
+                </a:extLst>
+              </p:cNvPr>
+              <p:cNvSpPr txBox="1">
+                <a:spLocks noRot="1" noChangeAspect="1" noMove="1" noResize="1" noEditPoints="1" noAdjustHandles="1" noChangeArrowheads="1" noChangeShapeType="1" noTextEdit="1"/>
+              </p:cNvSpPr>
+              <p:nvPr/>
+            </p:nvSpPr>
+            <p:spPr>
+              <a:xfrm>
+                <a:off x="3762273" y="3506399"/>
+                <a:ext cx="174727" cy="276999"/>
+              </a:xfrm>
+              <a:prstGeom prst="rect">
+                <a:avLst/>
+              </a:prstGeom>
+              <a:blipFill>
+                <a:blip r:embed="rId4"/>
+                <a:stretch>
+                  <a:fillRect l="-31034" r="-34483" b="-6522"/>
+                </a:stretch>
+              </a:blipFill>
+            </p:spPr>
+            <p:txBody>
+              <a:bodyPr/>
+              <a:lstStyle/>
+              <a:p>
+                <a:r>
+                  <a:rPr lang="en-US">
+                    <a:noFill/>
+                  </a:rPr>
+                  <a:t> </a:t>
+                </a:r>
+              </a:p>
+            </p:txBody>
+          </p:sp>
+        </mc:Fallback>
+      </mc:AlternateContent>
+      <mc:AlternateContent xmlns:mc="http://schemas.openxmlformats.org/markup-compatibility/2006">
+        <mc:Choice xmlns:a14="http://schemas.microsoft.com/office/drawing/2010/main" Requires="a14">
+          <p:sp>
+            <p:nvSpPr>
+              <p:cNvPr id="28" name="TextBox 27">
+                <a:extLst>
+                  <a:ext uri="{FF2B5EF4-FFF2-40B4-BE49-F238E27FC236}">
+                    <a16:creationId xmlns:a16="http://schemas.microsoft.com/office/drawing/2014/main" id="{49763202-A1AA-1C52-7666-EF7AE6B38CFF}"/>
+                  </a:ext>
+                </a:extLst>
+              </p:cNvPr>
+              <p:cNvSpPr txBox="1"/>
+              <p:nvPr/>
+            </p:nvSpPr>
+            <p:spPr>
+              <a:xfrm>
+                <a:off x="2560586" y="1867113"/>
+                <a:ext cx="174727" cy="276999"/>
+              </a:xfrm>
+              <a:prstGeom prst="rect">
+                <a:avLst/>
+              </a:prstGeom>
+              <a:noFill/>
+            </p:spPr>
+            <p:txBody>
+              <a:bodyPr wrap="none" lIns="0" tIns="0" rIns="0" bIns="0" rtlCol="0">
+                <a:spAutoFit/>
+              </a:bodyPr>
+              <a:lstStyle/>
+              <a:p>
+                <a14:m>
+                  <m:oMathPara xmlns:m="http://schemas.openxmlformats.org/officeDocument/2006/math">
+                    <m:oMathParaPr>
+                      <m:jc m:val="centerGroup"/>
+                    </m:oMathParaPr>
+                    <m:oMath xmlns:m="http://schemas.openxmlformats.org/officeDocument/2006/math">
+                      <m:r>
+                        <a:rPr lang="en-US" b="0" i="1" smtClean="0">
+                          <a:latin typeface="Cambria Math" panose="02040503050406030204" pitchFamily="18" charset="0"/>
+                        </a:rPr>
+                        <m:t>3</m:t>
+                      </m:r>
+                    </m:oMath>
+                  </m:oMathPara>
+                </a14:m>
+                <a:endParaRPr lang="en-US" dirty="0"/>
+              </a:p>
+            </p:txBody>
+          </p:sp>
+        </mc:Choice>
+        <mc:Fallback>
+          <p:sp>
+            <p:nvSpPr>
+              <p:cNvPr id="28" name="TextBox 27">
+                <a:extLst>
+                  <a:ext uri="{FF2B5EF4-FFF2-40B4-BE49-F238E27FC236}">
+                    <a16:creationId xmlns:a16="http://schemas.microsoft.com/office/drawing/2014/main" id="{49763202-A1AA-1C52-7666-EF7AE6B38CFF}"/>
+                  </a:ext>
+                </a:extLst>
+              </p:cNvPr>
+              <p:cNvSpPr txBox="1">
+                <a:spLocks noRot="1" noChangeAspect="1" noMove="1" noResize="1" noEditPoints="1" noAdjustHandles="1" noChangeArrowheads="1" noChangeShapeType="1" noTextEdit="1"/>
+              </p:cNvSpPr>
+              <p:nvPr/>
+            </p:nvSpPr>
+            <p:spPr>
+              <a:xfrm>
+                <a:off x="2560586" y="1867113"/>
+                <a:ext cx="174727" cy="276999"/>
+              </a:xfrm>
+              <a:prstGeom prst="rect">
+                <a:avLst/>
+              </a:prstGeom>
+              <a:blipFill>
+                <a:blip r:embed="rId5"/>
+                <a:stretch>
+                  <a:fillRect l="-31034" r="-34483" b="-6522"/>
+                </a:stretch>
+              </a:blipFill>
+            </p:spPr>
+            <p:txBody>
+              <a:bodyPr/>
+              <a:lstStyle/>
+              <a:p>
+                <a:r>
+                  <a:rPr lang="en-US">
+                    <a:noFill/>
+                  </a:rPr>
+                  <a:t> </a:t>
+                </a:r>
+              </a:p>
+            </p:txBody>
+          </p:sp>
+        </mc:Fallback>
+      </mc:AlternateContent>
+      <mc:AlternateContent xmlns:mc="http://schemas.openxmlformats.org/markup-compatibility/2006">
+        <mc:Choice xmlns:a14="http://schemas.microsoft.com/office/drawing/2010/main" Requires="a14">
+          <p:sp>
+            <p:nvSpPr>
+              <p:cNvPr id="29" name="TextBox 28">
+                <a:extLst>
+                  <a:ext uri="{FF2B5EF4-FFF2-40B4-BE49-F238E27FC236}">
+                    <a16:creationId xmlns:a16="http://schemas.microsoft.com/office/drawing/2014/main" id="{AC8F3C10-E8E4-13AC-14CB-D439A75C478D}"/>
+                  </a:ext>
+                </a:extLst>
+              </p:cNvPr>
+              <p:cNvSpPr txBox="1"/>
+              <p:nvPr/>
+            </p:nvSpPr>
+            <p:spPr>
+              <a:xfrm>
+                <a:off x="2598559" y="3048425"/>
+                <a:ext cx="165366" cy="276999"/>
+              </a:xfrm>
+              <a:prstGeom prst="rect">
+                <a:avLst/>
+              </a:prstGeom>
+              <a:noFill/>
+            </p:spPr>
+            <p:txBody>
+              <a:bodyPr wrap="none" lIns="0" tIns="0" rIns="0" bIns="0" rtlCol="0">
+                <a:spAutoFit/>
+              </a:bodyPr>
+              <a:lstStyle/>
+              <a:p>
+                <a14:m>
+                  <m:oMathPara xmlns:m="http://schemas.openxmlformats.org/officeDocument/2006/math">
+                    <m:oMathParaPr>
+                      <m:jc m:val="centerGroup"/>
+                    </m:oMathParaPr>
+                    <m:oMath xmlns:m="http://schemas.openxmlformats.org/officeDocument/2006/math">
+                      <m:r>
+                        <a:rPr lang="en-US" b="0" i="1" smtClean="0">
+                          <a:latin typeface="Cambria Math" panose="02040503050406030204" pitchFamily="18" charset="0"/>
+                        </a:rPr>
+                        <m:t>𝑒</m:t>
+                      </m:r>
+                    </m:oMath>
+                  </m:oMathPara>
+                </a14:m>
+                <a:endParaRPr lang="en-US" dirty="0"/>
+              </a:p>
+            </p:txBody>
+          </p:sp>
+        </mc:Choice>
+        <mc:Fallback>
+          <p:sp>
+            <p:nvSpPr>
+              <p:cNvPr id="29" name="TextBox 28">
+                <a:extLst>
+                  <a:ext uri="{FF2B5EF4-FFF2-40B4-BE49-F238E27FC236}">
+                    <a16:creationId xmlns:a16="http://schemas.microsoft.com/office/drawing/2014/main" id="{AC8F3C10-E8E4-13AC-14CB-D439A75C478D}"/>
+                  </a:ext>
+                </a:extLst>
+              </p:cNvPr>
+              <p:cNvSpPr txBox="1">
+                <a:spLocks noRot="1" noChangeAspect="1" noMove="1" noResize="1" noEditPoints="1" noAdjustHandles="1" noChangeArrowheads="1" noChangeShapeType="1" noTextEdit="1"/>
+              </p:cNvSpPr>
+              <p:nvPr/>
+            </p:nvSpPr>
+            <p:spPr>
+              <a:xfrm>
+                <a:off x="2598559" y="3048425"/>
+                <a:ext cx="165366" cy="276999"/>
+              </a:xfrm>
+              <a:prstGeom prst="rect">
+                <a:avLst/>
+              </a:prstGeom>
+              <a:blipFill>
+                <a:blip r:embed="rId6"/>
+                <a:stretch>
+                  <a:fillRect l="-22222" r="-22222"/>
+                </a:stretch>
+              </a:blipFill>
+            </p:spPr>
+            <p:txBody>
+              <a:bodyPr/>
+              <a:lstStyle/>
+              <a:p>
+                <a:r>
+                  <a:rPr lang="en-US">
+                    <a:noFill/>
+                  </a:rPr>
+                  <a:t> </a:t>
+                </a:r>
+              </a:p>
+            </p:txBody>
+          </p:sp>
+        </mc:Fallback>
+      </mc:AlternateContent>
+      <p:cxnSp>
+        <p:nvCxnSpPr>
+          <p:cNvPr id="36" name="Straight Connector 35">
+            <a:extLst>
+              <a:ext uri="{FF2B5EF4-FFF2-40B4-BE49-F238E27FC236}">
+                <a16:creationId xmlns:a16="http://schemas.microsoft.com/office/drawing/2014/main" id="{59EEFA7F-1170-BBB9-2B05-A5178E22AD5B}"/>
+              </a:ext>
+            </a:extLst>
+          </p:cNvPr>
+          <p:cNvCxnSpPr>
+            <a:cxnSpLocks/>
+            <a:endCxn id="38" idx="7"/>
+          </p:cNvCxnSpPr>
+          <p:nvPr/>
+        </p:nvCxnSpPr>
+        <p:spPr>
+          <a:xfrm flipH="1">
+            <a:off x="4801754" y="3372957"/>
+            <a:ext cx="783867" cy="218060"/>
+          </a:xfrm>
+          <a:prstGeom prst="line">
+            <a:avLst/>
+          </a:prstGeom>
+          <a:ln>
+            <a:prstDash val="sysDash"/>
+          </a:ln>
+        </p:spPr>
+        <p:style>
+          <a:lnRef idx="2">
+            <a:schemeClr val="dk1"/>
+          </a:lnRef>
+          <a:fillRef idx="0">
+            <a:schemeClr val="dk1"/>
+          </a:fillRef>
+          <a:effectRef idx="1">
+            <a:schemeClr val="dk1"/>
+          </a:effectRef>
+          <a:fontRef idx="minor">
+            <a:schemeClr val="tx1"/>
+          </a:fontRef>
+        </p:style>
+      </p:cxnSp>
+      <p:sp>
+        <p:nvSpPr>
+          <p:cNvPr id="38" name="Oval 37">
+            <a:extLst>
+              <a:ext uri="{FF2B5EF4-FFF2-40B4-BE49-F238E27FC236}">
+                <a16:creationId xmlns:a16="http://schemas.microsoft.com/office/drawing/2014/main" id="{9A154302-6B17-3B92-D438-42DB3CEC8CCC}"/>
+              </a:ext>
+            </a:extLst>
+          </p:cNvPr>
+          <p:cNvSpPr/>
+          <p:nvPr/>
+        </p:nvSpPr>
+        <p:spPr>
+          <a:xfrm>
+            <a:off x="4682513" y="3568699"/>
+            <a:ext cx="139700" cy="152400"/>
+          </a:xfrm>
+          <a:prstGeom prst="ellipse">
+            <a:avLst/>
+          </a:prstGeom>
+        </p:spPr>
+        <p:style>
+          <a:lnRef idx="2">
+            <a:schemeClr val="dk1">
+              <a:shade val="15000"/>
+            </a:schemeClr>
+          </a:lnRef>
+          <a:fillRef idx="1">
+            <a:schemeClr val="dk1"/>
+          </a:fillRef>
+          <a:effectRef idx="0">
+            <a:schemeClr val="dk1"/>
+          </a:effectRef>
+          <a:fontRef idx="minor">
+            <a:schemeClr val="lt1"/>
+          </a:fontRef>
+        </p:style>
+        <p:txBody>
+          <a:bodyPr rtlCol="0" anchor="ctr"/>
+          <a:lstStyle/>
+          <a:p>
+            <a:pPr algn="ctr"/>
+            <a:endParaRPr lang="en-US"/>
+          </a:p>
+        </p:txBody>
+      </p:sp>
+      <p:cxnSp>
+        <p:nvCxnSpPr>
+          <p:cNvPr id="39" name="Straight Connector 38">
+            <a:extLst>
+              <a:ext uri="{FF2B5EF4-FFF2-40B4-BE49-F238E27FC236}">
+                <a16:creationId xmlns:a16="http://schemas.microsoft.com/office/drawing/2014/main" id="{51CC5ABD-E4A9-A5FB-A2BF-356350F66E65}"/>
+              </a:ext>
+            </a:extLst>
+          </p:cNvPr>
+          <p:cNvCxnSpPr>
+            <a:cxnSpLocks/>
+          </p:cNvCxnSpPr>
+          <p:nvPr/>
+        </p:nvCxnSpPr>
+        <p:spPr>
+          <a:xfrm>
+            <a:off x="5585621" y="3372957"/>
+            <a:ext cx="958851" cy="271942"/>
+          </a:xfrm>
+          <a:prstGeom prst="line">
+            <a:avLst/>
+          </a:prstGeom>
+          <a:ln>
+            <a:prstDash val="sysDash"/>
+          </a:ln>
+        </p:spPr>
+        <p:style>
+          <a:lnRef idx="2">
+            <a:schemeClr val="dk1"/>
+          </a:lnRef>
+          <a:fillRef idx="0">
+            <a:schemeClr val="dk1"/>
+          </a:fillRef>
+          <a:effectRef idx="1">
+            <a:schemeClr val="dk1"/>
+          </a:effectRef>
+          <a:fontRef idx="minor">
+            <a:schemeClr val="tx1"/>
+          </a:fontRef>
+        </p:style>
+      </p:cxnSp>
+      <p:cxnSp>
+        <p:nvCxnSpPr>
+          <p:cNvPr id="40" name="Straight Connector 39">
+            <a:extLst>
+              <a:ext uri="{FF2B5EF4-FFF2-40B4-BE49-F238E27FC236}">
+                <a16:creationId xmlns:a16="http://schemas.microsoft.com/office/drawing/2014/main" id="{3107DF29-4EBB-49FF-0D47-485053C2126C}"/>
+              </a:ext>
+            </a:extLst>
+          </p:cNvPr>
+          <p:cNvCxnSpPr>
+            <a:cxnSpLocks/>
+            <a:endCxn id="38" idx="6"/>
+          </p:cNvCxnSpPr>
+          <p:nvPr/>
+        </p:nvCxnSpPr>
+        <p:spPr>
+          <a:xfrm flipH="1" flipV="1">
+            <a:off x="4822213" y="3644899"/>
+            <a:ext cx="1722259" cy="6349"/>
+          </a:xfrm>
+          <a:prstGeom prst="line">
+            <a:avLst/>
+          </a:prstGeom>
+        </p:spPr>
+        <p:style>
+          <a:lnRef idx="2">
+            <a:schemeClr val="dk1"/>
+          </a:lnRef>
+          <a:fillRef idx="0">
+            <a:schemeClr val="dk1"/>
+          </a:fillRef>
+          <a:effectRef idx="1">
+            <a:schemeClr val="dk1"/>
+          </a:effectRef>
+          <a:fontRef idx="minor">
+            <a:schemeClr val="tx1"/>
+          </a:fontRef>
+        </p:style>
+      </p:cxnSp>
+      <mc:AlternateContent xmlns:mc="http://schemas.openxmlformats.org/markup-compatibility/2006">
+        <mc:Choice xmlns:a14="http://schemas.microsoft.com/office/drawing/2010/main" Requires="a14">
+          <p:sp>
+            <p:nvSpPr>
+              <p:cNvPr id="42" name="TextBox 41">
+                <a:extLst>
+                  <a:ext uri="{FF2B5EF4-FFF2-40B4-BE49-F238E27FC236}">
+                    <a16:creationId xmlns:a16="http://schemas.microsoft.com/office/drawing/2014/main" id="{5B86898B-5178-555B-A264-194586A1C4A5}"/>
+                  </a:ext>
+                </a:extLst>
+              </p:cNvPr>
+              <p:cNvSpPr txBox="1"/>
+              <p:nvPr/>
+            </p:nvSpPr>
+            <p:spPr>
+              <a:xfrm>
+                <a:off x="4437936" y="3506398"/>
+                <a:ext cx="174727" cy="276999"/>
+              </a:xfrm>
+              <a:prstGeom prst="rect">
+                <a:avLst/>
+              </a:prstGeom>
+              <a:noFill/>
+            </p:spPr>
+            <p:txBody>
+              <a:bodyPr wrap="none" lIns="0" tIns="0" rIns="0" bIns="0" rtlCol="0">
+                <a:spAutoFit/>
+              </a:bodyPr>
+              <a:lstStyle/>
+              <a:p>
+                <a14:m>
+                  <m:oMathPara xmlns:m="http://schemas.openxmlformats.org/officeDocument/2006/math">
+                    <m:oMathParaPr>
+                      <m:jc m:val="centerGroup"/>
+                    </m:oMathParaPr>
+                    <m:oMath xmlns:m="http://schemas.openxmlformats.org/officeDocument/2006/math">
+                      <m:r>
+                        <a:rPr lang="en-US" b="0" i="1" smtClean="0">
+                          <a:latin typeface="Cambria Math" panose="02040503050406030204" pitchFamily="18" charset="0"/>
+                        </a:rPr>
+                        <m:t>1</m:t>
+                      </m:r>
+                    </m:oMath>
+                  </m:oMathPara>
+                </a14:m>
+                <a:endParaRPr lang="en-US" dirty="0"/>
+              </a:p>
+            </p:txBody>
+          </p:sp>
+        </mc:Choice>
+        <mc:Fallback>
+          <p:sp>
+            <p:nvSpPr>
+              <p:cNvPr id="42" name="TextBox 41">
+                <a:extLst>
+                  <a:ext uri="{FF2B5EF4-FFF2-40B4-BE49-F238E27FC236}">
+                    <a16:creationId xmlns:a16="http://schemas.microsoft.com/office/drawing/2014/main" id="{5B86898B-5178-555B-A264-194586A1C4A5}"/>
+                  </a:ext>
+                </a:extLst>
+              </p:cNvPr>
+              <p:cNvSpPr txBox="1">
+                <a:spLocks noRot="1" noChangeAspect="1" noMove="1" noResize="1" noEditPoints="1" noAdjustHandles="1" noChangeArrowheads="1" noChangeShapeType="1" noTextEdit="1"/>
+              </p:cNvSpPr>
+              <p:nvPr/>
+            </p:nvSpPr>
+            <p:spPr>
+              <a:xfrm>
+                <a:off x="4437936" y="3506398"/>
+                <a:ext cx="174727" cy="276999"/>
+              </a:xfrm>
+              <a:prstGeom prst="rect">
+                <a:avLst/>
+              </a:prstGeom>
+              <a:blipFill>
+                <a:blip r:embed="rId7"/>
+                <a:stretch>
+                  <a:fillRect l="-31034" r="-34483" b="-6522"/>
+                </a:stretch>
+              </a:blipFill>
+            </p:spPr>
+            <p:txBody>
+              <a:bodyPr/>
+              <a:lstStyle/>
+              <a:p>
+                <a:r>
+                  <a:rPr lang="en-US">
+                    <a:noFill/>
+                  </a:rPr>
+                  <a:t> </a:t>
+                </a:r>
+              </a:p>
+            </p:txBody>
+          </p:sp>
+        </mc:Fallback>
+      </mc:AlternateContent>
+      <p:cxnSp>
+        <p:nvCxnSpPr>
+          <p:cNvPr id="48" name="Straight Connector 47">
+            <a:extLst>
+              <a:ext uri="{FF2B5EF4-FFF2-40B4-BE49-F238E27FC236}">
+                <a16:creationId xmlns:a16="http://schemas.microsoft.com/office/drawing/2014/main" id="{98E7C9B9-A9BA-CAAE-FCD1-B29A543BB2DD}"/>
+              </a:ext>
+            </a:extLst>
+          </p:cNvPr>
+          <p:cNvCxnSpPr>
+            <a:cxnSpLocks/>
+            <a:endCxn id="54" idx="5"/>
+          </p:cNvCxnSpPr>
+          <p:nvPr/>
+        </p:nvCxnSpPr>
+        <p:spPr>
+          <a:xfrm flipH="1" flipV="1">
+            <a:off x="4781295" y="2823583"/>
+            <a:ext cx="804326" cy="549374"/>
+          </a:xfrm>
+          <a:prstGeom prst="line">
+            <a:avLst/>
+          </a:prstGeom>
+          <a:ln>
+            <a:prstDash val="sysDash"/>
+          </a:ln>
+        </p:spPr>
+        <p:style>
+          <a:lnRef idx="2">
+            <a:schemeClr val="accent4"/>
+          </a:lnRef>
+          <a:fillRef idx="0">
+            <a:schemeClr val="accent4"/>
+          </a:fillRef>
+          <a:effectRef idx="1">
+            <a:schemeClr val="accent4"/>
+          </a:effectRef>
+          <a:fontRef idx="minor">
+            <a:schemeClr val="tx1"/>
+          </a:fontRef>
+        </p:style>
+      </p:cxnSp>
+      <p:sp>
+        <p:nvSpPr>
+          <p:cNvPr id="54" name="Oval 53">
+            <a:extLst>
+              <a:ext uri="{FF2B5EF4-FFF2-40B4-BE49-F238E27FC236}">
+                <a16:creationId xmlns:a16="http://schemas.microsoft.com/office/drawing/2014/main" id="{FC64205C-AF69-812A-DB9E-1DD4551A8586}"/>
+              </a:ext>
+            </a:extLst>
+          </p:cNvPr>
+          <p:cNvSpPr/>
+          <p:nvPr/>
+        </p:nvSpPr>
+        <p:spPr>
+          <a:xfrm>
+            <a:off x="4662054" y="2693501"/>
+            <a:ext cx="139700" cy="152400"/>
+          </a:xfrm>
+          <a:prstGeom prst="ellipse">
+            <a:avLst/>
+          </a:prstGeom>
+          <a:ln>
+            <a:noFill/>
+          </a:ln>
+        </p:spPr>
+        <p:style>
+          <a:lnRef idx="2">
+            <a:schemeClr val="accent4">
+              <a:shade val="15000"/>
+            </a:schemeClr>
+          </a:lnRef>
+          <a:fillRef idx="1">
+            <a:schemeClr val="accent4"/>
+          </a:fillRef>
+          <a:effectRef idx="0">
+            <a:schemeClr val="accent4"/>
+          </a:effectRef>
+          <a:fontRef idx="minor">
+            <a:schemeClr val="lt1"/>
+          </a:fontRef>
+        </p:style>
+        <p:txBody>
+          <a:bodyPr rtlCol="0" anchor="ctr"/>
+          <a:lstStyle/>
+          <a:p>
+            <a:pPr algn="ctr"/>
+            <a:endParaRPr lang="en-US"/>
+          </a:p>
+        </p:txBody>
+      </p:sp>
+      <p:cxnSp>
+        <p:nvCxnSpPr>
+          <p:cNvPr id="55" name="Straight Connector 54">
+            <a:extLst>
+              <a:ext uri="{FF2B5EF4-FFF2-40B4-BE49-F238E27FC236}">
+                <a16:creationId xmlns:a16="http://schemas.microsoft.com/office/drawing/2014/main" id="{4AB2CD55-C8C6-7F4E-6E81-32976CCB0834}"/>
+              </a:ext>
+            </a:extLst>
+          </p:cNvPr>
+          <p:cNvCxnSpPr>
+            <a:cxnSpLocks/>
+            <a:stCxn id="38" idx="0"/>
+            <a:endCxn id="54" idx="4"/>
+          </p:cNvCxnSpPr>
+          <p:nvPr/>
+        </p:nvCxnSpPr>
+        <p:spPr>
+          <a:xfrm flipH="1" flipV="1">
+            <a:off x="4731904" y="2845901"/>
+            <a:ext cx="20459" cy="722798"/>
+          </a:xfrm>
+          <a:prstGeom prst="line">
+            <a:avLst/>
+          </a:prstGeom>
+        </p:spPr>
+        <p:style>
+          <a:lnRef idx="2">
+            <a:schemeClr val="accent4"/>
+          </a:lnRef>
+          <a:fillRef idx="0">
+            <a:schemeClr val="accent4"/>
+          </a:fillRef>
+          <a:effectRef idx="1">
+            <a:schemeClr val="accent4"/>
+          </a:effectRef>
+          <a:fontRef idx="minor">
+            <a:schemeClr val="tx1"/>
+          </a:fontRef>
+        </p:style>
+      </p:cxnSp>
+      <p:cxnSp>
+        <p:nvCxnSpPr>
+          <p:cNvPr id="62" name="Straight Connector 61">
+            <a:extLst>
+              <a:ext uri="{FF2B5EF4-FFF2-40B4-BE49-F238E27FC236}">
+                <a16:creationId xmlns:a16="http://schemas.microsoft.com/office/drawing/2014/main" id="{676B7C1C-CD11-3BF4-9350-A10819562BB1}"/>
+              </a:ext>
+            </a:extLst>
+          </p:cNvPr>
+          <p:cNvCxnSpPr>
+            <a:cxnSpLocks/>
+            <a:endCxn id="54" idx="6"/>
+          </p:cNvCxnSpPr>
+          <p:nvPr/>
+        </p:nvCxnSpPr>
+        <p:spPr>
+          <a:xfrm flipH="1" flipV="1">
+            <a:off x="4801754" y="2769701"/>
+            <a:ext cx="1742718" cy="875198"/>
+          </a:xfrm>
+          <a:prstGeom prst="line">
+            <a:avLst/>
+          </a:prstGeom>
+        </p:spPr>
+        <p:style>
+          <a:lnRef idx="2">
+            <a:schemeClr val="accent4"/>
+          </a:lnRef>
+          <a:fillRef idx="0">
+            <a:schemeClr val="accent4"/>
+          </a:fillRef>
+          <a:effectRef idx="1">
+            <a:schemeClr val="accent4"/>
+          </a:effectRef>
+          <a:fontRef idx="minor">
+            <a:schemeClr val="tx1"/>
+          </a:fontRef>
+        </p:style>
+      </p:cxnSp>
+      <mc:AlternateContent xmlns:mc="http://schemas.openxmlformats.org/markup-compatibility/2006">
+        <mc:Choice xmlns:a14="http://schemas.microsoft.com/office/drawing/2010/main" Requires="a14">
+          <p:sp>
+            <p:nvSpPr>
+              <p:cNvPr id="71" name="TextBox 70">
+                <a:extLst>
+                  <a:ext uri="{FF2B5EF4-FFF2-40B4-BE49-F238E27FC236}">
+                    <a16:creationId xmlns:a16="http://schemas.microsoft.com/office/drawing/2014/main" id="{E15F232B-1B16-251D-79F7-B0E55C251824}"/>
+                  </a:ext>
+                </a:extLst>
+              </p:cNvPr>
+              <p:cNvSpPr txBox="1"/>
+              <p:nvPr/>
+            </p:nvSpPr>
+            <p:spPr>
+              <a:xfrm>
+                <a:off x="4235890" y="2295432"/>
+                <a:ext cx="139700" cy="342338"/>
+              </a:xfrm>
+              <a:prstGeom prst="rect">
+                <a:avLst/>
+              </a:prstGeom>
+              <a:noFill/>
+            </p:spPr>
+            <p:txBody>
+              <a:bodyPr wrap="square" lIns="0" tIns="0" rIns="0" bIns="0" rtlCol="0">
+                <a:spAutoFit/>
+              </a:bodyPr>
+              <a:lstStyle/>
+              <a:p>
+                <a:pPr/>
+                <a14:m>
+                  <m:oMathPara xmlns:m="http://schemas.openxmlformats.org/officeDocument/2006/math">
+                    <m:oMathParaPr>
+                      <m:jc m:val="centerGroup"/>
+                    </m:oMathParaPr>
+                    <m:oMath xmlns:m="http://schemas.openxmlformats.org/officeDocument/2006/math">
+                      <m:sSubSup>
+                        <m:sSubSupPr>
+                          <m:ctrlPr>
+                            <a:rPr lang="en-US" b="0" i="1" smtClean="0">
+                              <a:latin typeface="Cambria Math" panose="02040503050406030204" pitchFamily="18" charset="0"/>
+                            </a:rPr>
+                          </m:ctrlPr>
+                        </m:sSubSupPr>
+                        <m:e>
+                          <m:r>
+                            <a:rPr lang="en-US" b="0" i="1" smtClean="0">
+                              <a:latin typeface="Cambria Math" panose="02040503050406030204" pitchFamily="18" charset="0"/>
+                            </a:rPr>
+                            <m:t>𝑁</m:t>
+                          </m:r>
+                        </m:e>
+                        <m:sub>
+                          <m:r>
+                            <a:rPr lang="en-US" b="0" i="1" smtClean="0">
+                              <a:latin typeface="Cambria Math" panose="02040503050406030204" pitchFamily="18" charset="0"/>
+                            </a:rPr>
+                            <m:t>1</m:t>
+                          </m:r>
+                        </m:sub>
+                        <m:sup>
+                          <m:d>
+                            <m:dPr>
+                              <m:ctrlPr>
+                                <a:rPr lang="en-US" b="0" i="1" smtClean="0">
+                                  <a:latin typeface="Cambria Math" panose="02040503050406030204" pitchFamily="18" charset="0"/>
+                                </a:rPr>
+                              </m:ctrlPr>
+                            </m:dPr>
+                            <m:e>
+                              <m:r>
+                                <a:rPr lang="en-US" b="0" i="1" smtClean="0">
+                                  <a:latin typeface="Cambria Math" panose="02040503050406030204" pitchFamily="18" charset="0"/>
+                                </a:rPr>
+                                <m:t>𝑒</m:t>
+                              </m:r>
+                            </m:e>
+                          </m:d>
+                        </m:sup>
+                      </m:sSubSup>
+                      <m:d>
+                        <m:dPr>
+                          <m:ctrlPr>
+                            <a:rPr lang="en-US" b="0" i="1" smtClean="0">
+                              <a:latin typeface="Cambria Math" panose="02040503050406030204" pitchFamily="18" charset="0"/>
+                            </a:rPr>
+                          </m:ctrlPr>
+                        </m:dPr>
+                        <m:e>
+                          <m:r>
+                            <a:rPr lang="en-US" b="0" i="1" smtClean="0">
+                              <a:latin typeface="Cambria Math" panose="02040503050406030204" pitchFamily="18" charset="0"/>
+                            </a:rPr>
+                            <m:t>𝑥</m:t>
+                          </m:r>
+                          <m:r>
+                            <a:rPr lang="en-US" b="0" i="1" smtClean="0">
+                              <a:latin typeface="Cambria Math" panose="02040503050406030204" pitchFamily="18" charset="0"/>
+                            </a:rPr>
+                            <m:t>,</m:t>
+                          </m:r>
+                          <m:r>
+                            <a:rPr lang="en-US" b="0" i="1" smtClean="0">
+                              <a:latin typeface="Cambria Math" panose="02040503050406030204" pitchFamily="18" charset="0"/>
+                            </a:rPr>
+                            <m:t>𝑦</m:t>
+                          </m:r>
+                        </m:e>
+                      </m:d>
+                    </m:oMath>
+                  </m:oMathPara>
+                </a14:m>
+                <a:endParaRPr lang="en-US" dirty="0"/>
+              </a:p>
+            </p:txBody>
+          </p:sp>
+        </mc:Choice>
+        <mc:Fallback>
+          <p:sp>
+            <p:nvSpPr>
+              <p:cNvPr id="71" name="TextBox 70">
+                <a:extLst>
+                  <a:ext uri="{FF2B5EF4-FFF2-40B4-BE49-F238E27FC236}">
+                    <a16:creationId xmlns:a16="http://schemas.microsoft.com/office/drawing/2014/main" id="{E15F232B-1B16-251D-79F7-B0E55C251824}"/>
+                  </a:ext>
+                </a:extLst>
+              </p:cNvPr>
+              <p:cNvSpPr txBox="1">
+                <a:spLocks noRot="1" noChangeAspect="1" noMove="1" noResize="1" noEditPoints="1" noAdjustHandles="1" noChangeArrowheads="1" noChangeShapeType="1" noTextEdit="1"/>
+              </p:cNvSpPr>
+              <p:nvPr/>
+            </p:nvSpPr>
+            <p:spPr>
+              <a:xfrm>
+                <a:off x="4235890" y="2295432"/>
+                <a:ext cx="139700" cy="342338"/>
+              </a:xfrm>
+              <a:prstGeom prst="rect">
+                <a:avLst/>
+              </a:prstGeom>
+              <a:blipFill>
+                <a:blip r:embed="rId8"/>
+                <a:stretch>
+                  <a:fillRect l="-60870" r="-573913" b="-19643"/>
+                </a:stretch>
+              </a:blipFill>
+            </p:spPr>
+            <p:txBody>
+              <a:bodyPr/>
+              <a:lstStyle/>
+              <a:p>
+                <a:r>
+                  <a:rPr lang="en-US">
+                    <a:noFill/>
+                  </a:rPr>
+                  <a:t> </a:t>
+                </a:r>
+              </a:p>
+            </p:txBody>
+          </p:sp>
+        </mc:Fallback>
+      </mc:AlternateContent>
+    </p:spTree>
+    <p:extLst>
+      <p:ext uri="{BB962C8B-B14F-4D97-AF65-F5344CB8AC3E}">
+        <p14:creationId xmlns:p14="http://schemas.microsoft.com/office/powerpoint/2010/main" val="1903246378"/>
+      </p:ext>
+    </p:extLst>
+  </p:cSld>
+  <p:clrMapOvr>
+    <a:masterClrMapping/>
+  </p:clrMapOvr>
+</p:sld>
+</file>
+
+<file path=ppt/slides/slide3.xml><?xml version="1.0" encoding="utf-8"?>
+<p:sld xmlns:a="http://schemas.openxmlformats.org/drawingml/2006/main" xmlns:r="http://schemas.openxmlformats.org/officeDocument/2006/relationships" xmlns:p="http://schemas.openxmlformats.org/presentationml/2006/main">
+  <p:cSld>
+    <p:spTree>
+      <p:nvGrpSpPr>
+        <p:cNvPr id="1" name=""/>
+        <p:cNvGrpSpPr/>
+        <p:nvPr/>
+      </p:nvGrpSpPr>
+      <p:grpSpPr>
+        <a:xfrm>
+          <a:off x="0" y="0"/>
+          <a:ext cx="0" cy="0"/>
+          <a:chOff x="0" y="0"/>
+          <a:chExt cx="0" cy="0"/>
+        </a:xfrm>
+      </p:grpSpPr>
+      <p:sp>
+        <p:nvSpPr>
+          <p:cNvPr id="13" name="Rectangle: Rounded Corners 12">
+            <a:extLst>
+              <a:ext uri="{FF2B5EF4-FFF2-40B4-BE49-F238E27FC236}">
+                <a16:creationId xmlns:a16="http://schemas.microsoft.com/office/drawing/2014/main" id="{1679361C-8A05-77E9-60BE-D87C2EBB6939}"/>
+              </a:ext>
+            </a:extLst>
+          </p:cNvPr>
+          <p:cNvSpPr/>
+          <p:nvPr/>
+        </p:nvSpPr>
+        <p:spPr>
+          <a:xfrm>
+            <a:off x="2332078" y="149086"/>
+            <a:ext cx="2394254" cy="1286014"/>
+          </a:xfrm>
+          <a:prstGeom prst="roundRect">
+            <a:avLst>
+              <a:gd name="adj" fmla="val 10524"/>
+            </a:avLst>
+          </a:prstGeom>
+          <a:solidFill>
+            <a:schemeClr val="bg1"/>
+          </a:solidFill>
+        </p:spPr>
+        <p:style>
+          <a:lnRef idx="2">
+            <a:schemeClr val="accent1">
+              <a:shade val="15000"/>
+            </a:schemeClr>
+          </a:lnRef>
+          <a:fillRef idx="1">
+            <a:schemeClr val="accent1"/>
+          </a:fillRef>
+          <a:effectRef idx="0">
+            <a:schemeClr val="accent1"/>
+          </a:effectRef>
+          <a:fontRef idx="minor">
+            <a:schemeClr val="lt1"/>
+          </a:fontRef>
+        </p:style>
+        <p:txBody>
+          <a:bodyPr rtlCol="0" anchor="ctr"/>
+          <a:lstStyle/>
+          <a:p>
+            <a:pPr algn="ctr"/>
+            <a:endParaRPr lang="en-US" dirty="0"/>
+          </a:p>
+        </p:txBody>
+      </p:sp>
+      <p:sp>
+        <p:nvSpPr>
+          <p:cNvPr id="10" name="Rectangle: Rounded Corners 9">
+            <a:extLst>
+              <a:ext uri="{FF2B5EF4-FFF2-40B4-BE49-F238E27FC236}">
+                <a16:creationId xmlns:a16="http://schemas.microsoft.com/office/drawing/2014/main" id="{1F616234-EB45-DAD3-EDB1-A57B61BDAD35}"/>
+              </a:ext>
+            </a:extLst>
+          </p:cNvPr>
+          <p:cNvSpPr/>
+          <p:nvPr/>
+        </p:nvSpPr>
+        <p:spPr>
+          <a:xfrm>
+            <a:off x="168829" y="149087"/>
+            <a:ext cx="1860550" cy="746264"/>
+          </a:xfrm>
+          <a:prstGeom prst="roundRect">
+            <a:avLst>
+              <a:gd name="adj" fmla="val 10524"/>
+            </a:avLst>
+          </a:prstGeom>
+          <a:solidFill>
+            <a:schemeClr val="bg1"/>
+          </a:solidFill>
+        </p:spPr>
+        <p:style>
+          <a:lnRef idx="2">
+            <a:schemeClr val="accent1">
+              <a:shade val="15000"/>
+            </a:schemeClr>
+          </a:lnRef>
+          <a:fillRef idx="1">
+            <a:schemeClr val="accent1"/>
+          </a:fillRef>
+          <a:effectRef idx="0">
+            <a:schemeClr val="accent1"/>
+          </a:effectRef>
+          <a:fontRef idx="minor">
+            <a:schemeClr val="lt1"/>
+          </a:fontRef>
+        </p:style>
+        <p:txBody>
+          <a:bodyPr rtlCol="0" anchor="ctr"/>
+          <a:lstStyle/>
+          <a:p>
+            <a:pPr algn="ctr"/>
+            <a:endParaRPr lang="en-US" dirty="0"/>
+          </a:p>
+        </p:txBody>
+      </p:sp>
+      <mc:AlternateContent xmlns:mc="http://schemas.openxmlformats.org/markup-compatibility/2006">
+        <mc:Choice xmlns:a14="http://schemas.microsoft.com/office/drawing/2010/main" Requires="a14">
+          <p:sp>
+            <p:nvSpPr>
+              <p:cNvPr id="4" name="TextBox 3">
+                <a:extLst>
+                  <a:ext uri="{FF2B5EF4-FFF2-40B4-BE49-F238E27FC236}">
+                    <a16:creationId xmlns:a16="http://schemas.microsoft.com/office/drawing/2014/main" id="{E9029349-AE9E-FFFB-B1B0-82FA607E43E2}"/>
+                  </a:ext>
+                </a:extLst>
+              </p:cNvPr>
+              <p:cNvSpPr txBox="1"/>
+              <p:nvPr/>
+            </p:nvSpPr>
+            <p:spPr>
+              <a:xfrm>
+                <a:off x="355600" y="273050"/>
+                <a:ext cx="1487009" cy="276999"/>
+              </a:xfrm>
+              <a:prstGeom prst="rect">
+                <a:avLst/>
+              </a:prstGeom>
+              <a:noFill/>
+            </p:spPr>
+            <p:txBody>
+              <a:bodyPr wrap="none" lIns="0" tIns="0" rIns="0" bIns="0" rtlCol="0">
+                <a:spAutoFit/>
+              </a:bodyPr>
+              <a:lstStyle/>
+              <a:p>
+                <a14:m>
+                  <m:oMathPara xmlns:m="http://schemas.openxmlformats.org/officeDocument/2006/math">
+                    <m:oMathParaPr>
+                      <m:jc m:val="centerGroup"/>
+                    </m:oMathParaPr>
+                    <m:oMath xmlns:m="http://schemas.openxmlformats.org/officeDocument/2006/math">
+                      <m:r>
+                        <m:rPr>
+                          <m:sty m:val="p"/>
+                        </m:rPr>
+                        <a:rPr lang="en-US" b="0" i="0" smtClean="0">
+                          <a:latin typeface="Cambria Math" panose="02040503050406030204" pitchFamily="18" charset="0"/>
+                        </a:rPr>
+                        <m:t>∇</m:t>
+                      </m:r>
+                      <m:r>
+                        <a:rPr lang="en-US" b="0" i="1" smtClean="0">
+                          <a:latin typeface="Cambria Math" panose="02040503050406030204" pitchFamily="18" charset="0"/>
+                        </a:rPr>
+                        <m:t>⋅</m:t>
+                      </m:r>
+                      <m:d>
+                        <m:dPr>
+                          <m:ctrlPr>
+                            <a:rPr lang="en-US" b="0" i="1" smtClean="0">
+                              <a:latin typeface="Cambria Math" panose="02040503050406030204" pitchFamily="18" charset="0"/>
+                            </a:rPr>
+                          </m:ctrlPr>
+                        </m:dPr>
+                        <m:e>
+                          <m:r>
+                            <a:rPr lang="en-US" b="0" i="1" smtClean="0">
+                              <a:latin typeface="Cambria Math" panose="02040503050406030204" pitchFamily="18" charset="0"/>
+                            </a:rPr>
+                            <m:t>𝜖</m:t>
+                          </m:r>
+                          <m:r>
+                            <m:rPr>
+                              <m:sty m:val="p"/>
+                            </m:rPr>
+                            <a:rPr lang="en-US" b="0" i="0" smtClean="0">
+                              <a:latin typeface="Cambria Math" panose="02040503050406030204" pitchFamily="18" charset="0"/>
+                            </a:rPr>
+                            <m:t>∇</m:t>
+                          </m:r>
+                          <m:r>
+                            <a:rPr lang="en-US" b="0" i="1" smtClean="0">
+                              <a:latin typeface="Cambria Math" panose="02040503050406030204" pitchFamily="18" charset="0"/>
+                            </a:rPr>
+                            <m:t>𝜙</m:t>
+                          </m:r>
+                        </m:e>
+                      </m:d>
+                      <m:r>
+                        <a:rPr lang="en-US" b="0" i="1" smtClean="0">
+                          <a:latin typeface="Cambria Math" panose="02040503050406030204" pitchFamily="18" charset="0"/>
+                        </a:rPr>
+                        <m:t>=</m:t>
+                      </m:r>
+                      <m:sSub>
+                        <m:sSubPr>
+                          <m:ctrlPr>
+                            <a:rPr lang="en-US" b="0" i="1" smtClean="0">
+                              <a:latin typeface="Cambria Math" panose="02040503050406030204" pitchFamily="18" charset="0"/>
+                            </a:rPr>
+                          </m:ctrlPr>
+                        </m:sSubPr>
+                        <m:e>
+                          <m:r>
+                            <a:rPr lang="en-US" b="0" i="1" smtClean="0">
+                              <a:latin typeface="Cambria Math" panose="02040503050406030204" pitchFamily="18" charset="0"/>
+                            </a:rPr>
+                            <m:t>𝜌</m:t>
+                          </m:r>
+                        </m:e>
+                        <m:sub>
+                          <m:r>
+                            <a:rPr lang="en-US" b="0" i="1" smtClean="0">
+                              <a:latin typeface="Cambria Math" panose="02040503050406030204" pitchFamily="18" charset="0"/>
+                            </a:rPr>
+                            <m:t>𝑒</m:t>
+                          </m:r>
+                        </m:sub>
+                      </m:sSub>
+                    </m:oMath>
+                  </m:oMathPara>
+                </a14:m>
+                <a:endParaRPr lang="en-US" dirty="0"/>
+              </a:p>
+            </p:txBody>
+          </p:sp>
+        </mc:Choice>
+        <mc:Fallback>
+          <p:sp>
+            <p:nvSpPr>
+              <p:cNvPr id="4" name="TextBox 3">
+                <a:extLst>
+                  <a:ext uri="{FF2B5EF4-FFF2-40B4-BE49-F238E27FC236}">
+                    <a16:creationId xmlns:a16="http://schemas.microsoft.com/office/drawing/2014/main" id="{E9029349-AE9E-FFFB-B1B0-82FA607E43E2}"/>
+                  </a:ext>
+                </a:extLst>
+              </p:cNvPr>
+              <p:cNvSpPr txBox="1">
+                <a:spLocks noRot="1" noChangeAspect="1" noMove="1" noResize="1" noEditPoints="1" noAdjustHandles="1" noChangeArrowheads="1" noChangeShapeType="1" noTextEdit="1"/>
+              </p:cNvSpPr>
+              <p:nvPr/>
+            </p:nvSpPr>
+            <p:spPr>
+              <a:xfrm>
+                <a:off x="355600" y="273050"/>
+                <a:ext cx="1487009" cy="276999"/>
+              </a:xfrm>
+              <a:prstGeom prst="rect">
+                <a:avLst/>
+              </a:prstGeom>
+              <a:blipFill>
+                <a:blip r:embed="rId2"/>
+                <a:stretch>
+                  <a:fillRect l="-3279" b="-33333"/>
+                </a:stretch>
+              </a:blipFill>
+            </p:spPr>
+            <p:txBody>
+              <a:bodyPr/>
+              <a:lstStyle/>
+              <a:p>
+                <a:r>
+                  <a:rPr lang="en-US">
+                    <a:noFill/>
+                  </a:rPr>
+                  <a:t> </a:t>
+                </a:r>
+              </a:p>
+            </p:txBody>
+          </p:sp>
+        </mc:Fallback>
+      </mc:AlternateContent>
+      <mc:AlternateContent xmlns:mc="http://schemas.openxmlformats.org/markup-compatibility/2006">
+        <mc:Choice xmlns:a14="http://schemas.microsoft.com/office/drawing/2010/main" Requires="a14">
+          <p:sp>
+            <p:nvSpPr>
+              <p:cNvPr id="5" name="TextBox 4">
+                <a:extLst>
+                  <a:ext uri="{FF2B5EF4-FFF2-40B4-BE49-F238E27FC236}">
+                    <a16:creationId xmlns:a16="http://schemas.microsoft.com/office/drawing/2014/main" id="{3A2F92EA-D741-388F-3D8C-462C67037A76}"/>
+                  </a:ext>
+                </a:extLst>
+              </p:cNvPr>
+              <p:cNvSpPr txBox="1"/>
+              <p:nvPr/>
+            </p:nvSpPr>
+            <p:spPr>
+              <a:xfrm>
+                <a:off x="2432050" y="273049"/>
+                <a:ext cx="1488163" cy="276999"/>
+              </a:xfrm>
+              <a:prstGeom prst="rect">
+                <a:avLst/>
+              </a:prstGeom>
+              <a:noFill/>
+            </p:spPr>
+            <p:txBody>
+              <a:bodyPr wrap="none" lIns="0" tIns="0" rIns="0" bIns="0" rtlCol="0">
+                <a:spAutoFit/>
+              </a:bodyPr>
+              <a:lstStyle/>
+              <a:p>
+                <a14:m>
+                  <m:oMathPara xmlns:m="http://schemas.openxmlformats.org/officeDocument/2006/math">
+                    <m:oMathParaPr>
+                      <m:jc m:val="centerGroup"/>
+                    </m:oMathParaPr>
+                    <m:oMath xmlns:m="http://schemas.openxmlformats.org/officeDocument/2006/math">
+                      <m:r>
+                        <a:rPr lang="en-US" b="0" i="1" smtClean="0">
+                          <a:latin typeface="Cambria Math" panose="02040503050406030204" pitchFamily="18" charset="0"/>
+                        </a:rPr>
+                        <m:t>𝜙</m:t>
+                      </m:r>
+                      <m:r>
+                        <a:rPr lang="en-US" b="0" i="1" smtClean="0">
+                          <a:latin typeface="Cambria Math" panose="02040503050406030204" pitchFamily="18" charset="0"/>
+                        </a:rPr>
+                        <m:t>=</m:t>
+                      </m:r>
+                      <m:sSub>
+                        <m:sSubPr>
+                          <m:ctrlPr>
+                            <a:rPr lang="en-US" b="0" i="1" smtClean="0">
+                              <a:latin typeface="Cambria Math" panose="02040503050406030204" pitchFamily="18" charset="0"/>
+                            </a:rPr>
+                          </m:ctrlPr>
+                        </m:sSubPr>
+                        <m:e>
+                          <m:r>
+                            <a:rPr lang="en-US" b="0" i="1" smtClean="0">
+                              <a:latin typeface="Cambria Math" panose="02040503050406030204" pitchFamily="18" charset="0"/>
+                            </a:rPr>
+                            <m:t>𝜙</m:t>
+                          </m:r>
+                        </m:e>
+                        <m:sub>
+                          <m:r>
+                            <a:rPr lang="en-US" b="0" i="1" smtClean="0">
+                              <a:latin typeface="Cambria Math" panose="02040503050406030204" pitchFamily="18" charset="0"/>
+                            </a:rPr>
+                            <m:t>𝐷</m:t>
+                          </m:r>
+                        </m:sub>
+                      </m:sSub>
+                      <m:r>
+                        <a:rPr lang="en-US" b="0" i="1" smtClean="0">
+                          <a:latin typeface="Cambria Math" panose="02040503050406030204" pitchFamily="18" charset="0"/>
+                        </a:rPr>
+                        <m:t>   </m:t>
+                      </m:r>
+                      <m:r>
+                        <m:rPr>
+                          <m:nor/>
+                        </m:rPr>
+                        <a:rPr lang="en-US" b="0" i="0" smtClean="0">
+                          <a:latin typeface="Cambria Math" panose="02040503050406030204" pitchFamily="18" charset="0"/>
+                        </a:rPr>
+                        <m:t>on</m:t>
+                      </m:r>
+                      <m:r>
+                        <m:rPr>
+                          <m:nor/>
+                        </m:rPr>
+                        <a:rPr lang="en-US" b="0" i="0" smtClean="0">
+                          <a:latin typeface="Cambria Math" panose="02040503050406030204" pitchFamily="18" charset="0"/>
+                        </a:rPr>
+                        <m:t> </m:t>
+                      </m:r>
+                      <m:sSub>
+                        <m:sSubPr>
+                          <m:ctrlPr>
+                            <a:rPr lang="en-US" b="0" i="1" smtClean="0">
+                              <a:latin typeface="Cambria Math" panose="02040503050406030204" pitchFamily="18" charset="0"/>
+                            </a:rPr>
+                          </m:ctrlPr>
+                        </m:sSubPr>
+                        <m:e>
+                          <m:r>
+                            <m:rPr>
+                              <m:sty m:val="p"/>
+                            </m:rPr>
+                            <a:rPr lang="en-US" b="0" i="0" smtClean="0">
+                              <a:latin typeface="Cambria Math" panose="02040503050406030204" pitchFamily="18" charset="0"/>
+                            </a:rPr>
+                            <m:t>Γ</m:t>
+                          </m:r>
+                        </m:e>
+                        <m:sub>
+                          <m:r>
+                            <a:rPr lang="en-US" b="0" i="1" smtClean="0">
+                              <a:latin typeface="Cambria Math" panose="02040503050406030204" pitchFamily="18" charset="0"/>
+                            </a:rPr>
+                            <m:t>𝐷</m:t>
+                          </m:r>
+                        </m:sub>
+                      </m:sSub>
+                    </m:oMath>
+                  </m:oMathPara>
+                </a14:m>
+                <a:endParaRPr lang="en-US" dirty="0"/>
+              </a:p>
+            </p:txBody>
+          </p:sp>
+        </mc:Choice>
+        <mc:Fallback>
+          <p:sp>
+            <p:nvSpPr>
+              <p:cNvPr id="5" name="TextBox 4">
+                <a:extLst>
+                  <a:ext uri="{FF2B5EF4-FFF2-40B4-BE49-F238E27FC236}">
+                    <a16:creationId xmlns:a16="http://schemas.microsoft.com/office/drawing/2014/main" id="{3A2F92EA-D741-388F-3D8C-462C67037A76}"/>
+                  </a:ext>
+                </a:extLst>
+              </p:cNvPr>
+              <p:cNvSpPr txBox="1">
+                <a:spLocks noRot="1" noChangeAspect="1" noMove="1" noResize="1" noEditPoints="1" noAdjustHandles="1" noChangeArrowheads="1" noChangeShapeType="1" noTextEdit="1"/>
+              </p:cNvSpPr>
+              <p:nvPr/>
+            </p:nvSpPr>
+            <p:spPr>
+              <a:xfrm>
+                <a:off x="2432050" y="273049"/>
+                <a:ext cx="1488163" cy="276999"/>
+              </a:xfrm>
+              <a:prstGeom prst="rect">
+                <a:avLst/>
+              </a:prstGeom>
+              <a:blipFill>
+                <a:blip r:embed="rId3"/>
+                <a:stretch>
+                  <a:fillRect l="-5328" r="-410" b="-33333"/>
+                </a:stretch>
+              </a:blipFill>
+            </p:spPr>
+            <p:txBody>
+              <a:bodyPr/>
+              <a:lstStyle/>
+              <a:p>
+                <a:r>
+                  <a:rPr lang="en-US">
+                    <a:noFill/>
+                  </a:rPr>
+                  <a:t> </a:t>
+                </a:r>
+              </a:p>
+            </p:txBody>
+          </p:sp>
+        </mc:Fallback>
+      </mc:AlternateContent>
+      <mc:AlternateContent xmlns:mc="http://schemas.openxmlformats.org/markup-compatibility/2006">
+        <mc:Choice xmlns:a14="http://schemas.microsoft.com/office/drawing/2010/main" Requires="a14">
+          <p:sp>
+            <p:nvSpPr>
+              <p:cNvPr id="6" name="TextBox 5">
+                <a:extLst>
+                  <a:ext uri="{FF2B5EF4-FFF2-40B4-BE49-F238E27FC236}">
+                    <a16:creationId xmlns:a16="http://schemas.microsoft.com/office/drawing/2014/main" id="{05E92BF9-3A3B-6E71-FCAB-0783BD0AFF54}"/>
+                  </a:ext>
+                </a:extLst>
+              </p:cNvPr>
+              <p:cNvSpPr txBox="1"/>
+              <p:nvPr/>
+            </p:nvSpPr>
+            <p:spPr>
+              <a:xfrm>
+                <a:off x="2432050" y="749300"/>
+                <a:ext cx="2294282" cy="276999"/>
+              </a:xfrm>
+              <a:prstGeom prst="rect">
+                <a:avLst/>
+              </a:prstGeom>
+              <a:noFill/>
+            </p:spPr>
+            <p:txBody>
+              <a:bodyPr wrap="none" lIns="0" tIns="0" rIns="0" bIns="0" rtlCol="0">
+                <a:spAutoFit/>
+              </a:bodyPr>
+              <a:lstStyle/>
+              <a:p>
+                <a14:m>
+                  <m:oMathPara xmlns:m="http://schemas.openxmlformats.org/officeDocument/2006/math">
+                    <m:oMathParaPr>
+                      <m:jc m:val="centerGroup"/>
+                    </m:oMathParaPr>
+                    <m:oMath xmlns:m="http://schemas.openxmlformats.org/officeDocument/2006/math">
+                      <m:acc>
+                        <m:accPr>
+                          <m:chr m:val="̂"/>
+                          <m:ctrlPr>
+                            <a:rPr lang="en-US" b="0" i="1" smtClean="0">
+                              <a:latin typeface="Cambria Math" panose="02040503050406030204" pitchFamily="18" charset="0"/>
+                            </a:rPr>
+                          </m:ctrlPr>
+                        </m:accPr>
+                        <m:e>
+                          <m:r>
+                            <a:rPr lang="en-US" b="0" i="1" smtClean="0">
+                              <a:latin typeface="Cambria Math" panose="02040503050406030204" pitchFamily="18" charset="0"/>
+                            </a:rPr>
+                            <m:t>𝑛</m:t>
+                          </m:r>
+                        </m:e>
+                      </m:acc>
+                      <m:r>
+                        <a:rPr lang="en-US" b="0" i="1" smtClean="0">
+                          <a:latin typeface="Cambria Math" panose="02040503050406030204" pitchFamily="18" charset="0"/>
+                        </a:rPr>
+                        <m:t>⋅</m:t>
+                      </m:r>
+                      <m:d>
+                        <m:dPr>
+                          <m:ctrlPr>
+                            <a:rPr lang="en-US" b="0" i="1" smtClean="0">
+                              <a:latin typeface="Cambria Math" panose="02040503050406030204" pitchFamily="18" charset="0"/>
+                            </a:rPr>
+                          </m:ctrlPr>
+                        </m:dPr>
+                        <m:e>
+                          <m:r>
+                            <a:rPr lang="en-US" b="0" i="1" smtClean="0">
+                              <a:latin typeface="Cambria Math" panose="02040503050406030204" pitchFamily="18" charset="0"/>
+                            </a:rPr>
+                            <m:t>𝜖</m:t>
+                          </m:r>
+                          <m:r>
+                            <m:rPr>
+                              <m:sty m:val="p"/>
+                            </m:rPr>
+                            <a:rPr lang="en-US" b="0" i="0" smtClean="0">
+                              <a:latin typeface="Cambria Math" panose="02040503050406030204" pitchFamily="18" charset="0"/>
+                            </a:rPr>
+                            <m:t>∇</m:t>
+                          </m:r>
+                          <m:r>
+                            <a:rPr lang="en-US" b="0" i="1" smtClean="0">
+                              <a:latin typeface="Cambria Math" panose="02040503050406030204" pitchFamily="18" charset="0"/>
+                            </a:rPr>
+                            <m:t>𝜙</m:t>
+                          </m:r>
+                        </m:e>
+                      </m:d>
+                      <m:r>
+                        <a:rPr lang="en-US" b="0" i="1" smtClean="0">
+                          <a:latin typeface="Cambria Math" panose="02040503050406030204" pitchFamily="18" charset="0"/>
+                        </a:rPr>
+                        <m:t>=</m:t>
+                      </m:r>
+                      <m:sSub>
+                        <m:sSubPr>
+                          <m:ctrlPr>
+                            <a:rPr lang="en-US" b="0" i="1" smtClean="0">
+                              <a:latin typeface="Cambria Math" panose="02040503050406030204" pitchFamily="18" charset="0"/>
+                            </a:rPr>
+                          </m:ctrlPr>
+                        </m:sSubPr>
+                        <m:e>
+                          <m:r>
+                            <a:rPr lang="en-US" b="0" i="1" smtClean="0">
+                              <a:latin typeface="Cambria Math" panose="02040503050406030204" pitchFamily="18" charset="0"/>
+                            </a:rPr>
+                            <m:t>𝜅</m:t>
+                          </m:r>
+                        </m:e>
+                        <m:sub>
+                          <m:r>
+                            <a:rPr lang="en-US" b="0" i="1" smtClean="0">
+                              <a:latin typeface="Cambria Math" panose="02040503050406030204" pitchFamily="18" charset="0"/>
+                            </a:rPr>
+                            <m:t>𝑁</m:t>
+                          </m:r>
+                        </m:sub>
+                      </m:sSub>
+                      <m:r>
+                        <a:rPr lang="en-US" b="0" i="1" smtClean="0">
+                          <a:latin typeface="Cambria Math" panose="02040503050406030204" pitchFamily="18" charset="0"/>
+                        </a:rPr>
+                        <m:t>    </m:t>
+                      </m:r>
+                      <m:r>
+                        <m:rPr>
+                          <m:nor/>
+                        </m:rPr>
+                        <a:rPr lang="en-US" b="0" i="0" smtClean="0">
+                          <a:latin typeface="Cambria Math" panose="02040503050406030204" pitchFamily="18" charset="0"/>
+                        </a:rPr>
+                        <m:t>on</m:t>
+                      </m:r>
+                      <m:r>
+                        <m:rPr>
+                          <m:nor/>
+                        </m:rPr>
+                        <a:rPr lang="en-US" b="0" i="0" smtClean="0">
+                          <a:latin typeface="Cambria Math" panose="02040503050406030204" pitchFamily="18" charset="0"/>
+                        </a:rPr>
+                        <m:t> </m:t>
+                      </m:r>
+                      <m:sSub>
+                        <m:sSubPr>
+                          <m:ctrlPr>
+                            <a:rPr lang="en-US" b="0" i="1" smtClean="0">
+                              <a:latin typeface="Cambria Math" panose="02040503050406030204" pitchFamily="18" charset="0"/>
+                            </a:rPr>
+                          </m:ctrlPr>
+                        </m:sSubPr>
+                        <m:e>
+                          <m:r>
+                            <m:rPr>
+                              <m:sty m:val="p"/>
+                            </m:rPr>
+                            <a:rPr lang="en-US" b="0" i="0" smtClean="0">
+                              <a:latin typeface="Cambria Math" panose="02040503050406030204" pitchFamily="18" charset="0"/>
+                            </a:rPr>
+                            <m:t>Γ</m:t>
+                          </m:r>
+                        </m:e>
+                        <m:sub>
+                          <m:r>
+                            <a:rPr lang="en-US" b="0" i="1" smtClean="0">
+                              <a:latin typeface="Cambria Math" panose="02040503050406030204" pitchFamily="18" charset="0"/>
+                            </a:rPr>
+                            <m:t>𝑁</m:t>
+                          </m:r>
+                        </m:sub>
+                      </m:sSub>
+                    </m:oMath>
+                  </m:oMathPara>
+                </a14:m>
+                <a:endParaRPr lang="en-US" dirty="0"/>
+              </a:p>
+            </p:txBody>
+          </p:sp>
+        </mc:Choice>
+        <mc:Fallback>
+          <p:sp>
+            <p:nvSpPr>
+              <p:cNvPr id="6" name="TextBox 5">
+                <a:extLst>
+                  <a:ext uri="{FF2B5EF4-FFF2-40B4-BE49-F238E27FC236}">
+                    <a16:creationId xmlns:a16="http://schemas.microsoft.com/office/drawing/2014/main" id="{05E92BF9-3A3B-6E71-FCAB-0783BD0AFF54}"/>
+                  </a:ext>
+                </a:extLst>
+              </p:cNvPr>
+              <p:cNvSpPr txBox="1">
+                <a:spLocks noRot="1" noChangeAspect="1" noMove="1" noResize="1" noEditPoints="1" noAdjustHandles="1" noChangeArrowheads="1" noChangeShapeType="1" noTextEdit="1"/>
+              </p:cNvSpPr>
+              <p:nvPr/>
+            </p:nvSpPr>
+            <p:spPr>
+              <a:xfrm>
+                <a:off x="2432050" y="749300"/>
+                <a:ext cx="2294282" cy="276999"/>
+              </a:xfrm>
+              <a:prstGeom prst="rect">
+                <a:avLst/>
+              </a:prstGeom>
+              <a:blipFill>
+                <a:blip r:embed="rId4"/>
+                <a:stretch>
+                  <a:fillRect l="-532" t="-26667" b="-33333"/>
+                </a:stretch>
+              </a:blipFill>
+            </p:spPr>
+            <p:txBody>
+              <a:bodyPr/>
+              <a:lstStyle/>
+              <a:p>
+                <a:r>
+                  <a:rPr lang="en-US">
+                    <a:noFill/>
+                  </a:rPr>
+                  <a:t> </a:t>
+                </a:r>
+              </a:p>
+            </p:txBody>
+          </p:sp>
+        </mc:Fallback>
+      </mc:AlternateContent>
+      <p:pic>
+        <p:nvPicPr>
+          <p:cNvPr id="8" name="Picture 7">
+            <a:extLst>
+              <a:ext uri="{FF2B5EF4-FFF2-40B4-BE49-F238E27FC236}">
+                <a16:creationId xmlns:a16="http://schemas.microsoft.com/office/drawing/2014/main" id="{C61CE0A6-F477-3577-0ED4-FBD2786F4669}"/>
+              </a:ext>
+            </a:extLst>
+          </p:cNvPr>
+          <p:cNvPicPr>
+            <a:picLocks noChangeAspect="1"/>
+          </p:cNvPicPr>
+          <p:nvPr/>
+        </p:nvPicPr>
+        <p:blipFill>
+          <a:blip r:embed="rId5"/>
+          <a:srcRect l="5785" t="10100" r="1766" b="1780"/>
+          <a:stretch>
+            <a:fillRect/>
+          </a:stretch>
+        </p:blipFill>
+        <p:spPr>
+          <a:xfrm>
+            <a:off x="6870700" y="1298436"/>
+            <a:ext cx="4762500" cy="3216414"/>
+          </a:xfrm>
+          <a:prstGeom prst="rect">
+            <a:avLst/>
+          </a:prstGeom>
+        </p:spPr>
+      </p:pic>
+      <mc:AlternateContent xmlns:mc="http://schemas.openxmlformats.org/markup-compatibility/2006">
+        <mc:Choice xmlns:a14="http://schemas.microsoft.com/office/drawing/2010/main" Requires="a14">
+          <p:sp>
+            <p:nvSpPr>
+              <p:cNvPr id="9" name="TextBox 8">
+                <a:extLst>
+                  <a:ext uri="{FF2B5EF4-FFF2-40B4-BE49-F238E27FC236}">
+                    <a16:creationId xmlns:a16="http://schemas.microsoft.com/office/drawing/2014/main" id="{D721AA42-1A1A-BC4A-1657-66795E814E7D}"/>
+                  </a:ext>
+                </a:extLst>
+              </p:cNvPr>
+              <p:cNvSpPr txBox="1"/>
+              <p:nvPr/>
+            </p:nvSpPr>
+            <p:spPr>
+              <a:xfrm>
+                <a:off x="8043666" y="4800600"/>
+                <a:ext cx="2608343" cy="276999"/>
+              </a:xfrm>
+              <a:prstGeom prst="rect">
+                <a:avLst/>
+              </a:prstGeom>
+              <a:noFill/>
+            </p:spPr>
+            <p:txBody>
+              <a:bodyPr wrap="none" lIns="0" tIns="0" rIns="0" bIns="0" rtlCol="0">
+                <a:spAutoFit/>
+              </a:bodyPr>
+              <a:lstStyle/>
+              <a:p>
+                <a:r>
+                  <a:rPr lang="en-US" b="0" dirty="0"/>
+                  <a:t>Basis function </a:t>
+                </a:r>
+                <a14:m>
+                  <m:oMath xmlns:m="http://schemas.openxmlformats.org/officeDocument/2006/math">
+                    <m:sSub>
+                      <m:sSubPr>
+                        <m:ctrlPr>
+                          <a:rPr lang="en-US" b="0" i="1" smtClean="0">
+                            <a:latin typeface="Cambria Math" panose="02040503050406030204" pitchFamily="18" charset="0"/>
+                          </a:rPr>
+                        </m:ctrlPr>
+                      </m:sSubPr>
+                      <m:e>
+                        <m:r>
+                          <a:rPr lang="en-US" b="0" i="1" smtClean="0">
+                            <a:latin typeface="Cambria Math" panose="02040503050406030204" pitchFamily="18" charset="0"/>
+                          </a:rPr>
+                          <m:t>𝑁</m:t>
+                        </m:r>
+                      </m:e>
+                      <m:sub>
+                        <m:r>
+                          <a:rPr lang="en-US" b="0" i="1" smtClean="0">
+                            <a:latin typeface="Cambria Math" panose="02040503050406030204" pitchFamily="18" charset="0"/>
+                          </a:rPr>
+                          <m:t>𝑖</m:t>
+                        </m:r>
+                      </m:sub>
+                    </m:sSub>
+                  </m:oMath>
+                </a14:m>
+                <a:r>
+                  <a:rPr lang="en-US" dirty="0"/>
+                  <a:t> at node </a:t>
+                </a:r>
+                <a14:m>
+                  <m:oMath xmlns:m="http://schemas.openxmlformats.org/officeDocument/2006/math">
+                    <m:r>
+                      <a:rPr lang="en-US" b="0" i="1" smtClean="0">
+                        <a:latin typeface="Cambria Math" panose="02040503050406030204" pitchFamily="18" charset="0"/>
+                      </a:rPr>
+                      <m:t>𝑖</m:t>
+                    </m:r>
+                  </m:oMath>
+                </a14:m>
+                <a:endParaRPr lang="en-US" dirty="0"/>
+              </a:p>
+            </p:txBody>
+          </p:sp>
+        </mc:Choice>
+        <mc:Fallback>
+          <p:sp>
+            <p:nvSpPr>
+              <p:cNvPr id="9" name="TextBox 8">
+                <a:extLst>
+                  <a:ext uri="{FF2B5EF4-FFF2-40B4-BE49-F238E27FC236}">
+                    <a16:creationId xmlns:a16="http://schemas.microsoft.com/office/drawing/2014/main" id="{D721AA42-1A1A-BC4A-1657-66795E814E7D}"/>
+                  </a:ext>
+                </a:extLst>
+              </p:cNvPr>
+              <p:cNvSpPr txBox="1">
+                <a:spLocks noRot="1" noChangeAspect="1" noMove="1" noResize="1" noEditPoints="1" noAdjustHandles="1" noChangeArrowheads="1" noChangeShapeType="1" noTextEdit="1"/>
+              </p:cNvSpPr>
+              <p:nvPr/>
+            </p:nvSpPr>
+            <p:spPr>
+              <a:xfrm>
+                <a:off x="8043666" y="4800600"/>
+                <a:ext cx="2608343" cy="276999"/>
+              </a:xfrm>
+              <a:prstGeom prst="rect">
+                <a:avLst/>
+              </a:prstGeom>
+              <a:blipFill>
+                <a:blip r:embed="rId6"/>
+                <a:stretch>
+                  <a:fillRect l="-5374" t="-26667" r="-1869" b="-53333"/>
+                </a:stretch>
+              </a:blipFill>
+            </p:spPr>
+            <p:txBody>
+              <a:bodyPr/>
+              <a:lstStyle/>
+              <a:p>
+                <a:r>
+                  <a:rPr lang="en-US">
+                    <a:noFill/>
+                  </a:rPr>
+                  <a:t> </a:t>
+                </a:r>
+              </a:p>
+            </p:txBody>
+          </p:sp>
+        </mc:Fallback>
+      </mc:AlternateContent>
+      <p:sp>
+        <p:nvSpPr>
+          <p:cNvPr id="11" name="TextBox 10">
+            <a:extLst>
+              <a:ext uri="{FF2B5EF4-FFF2-40B4-BE49-F238E27FC236}">
+                <a16:creationId xmlns:a16="http://schemas.microsoft.com/office/drawing/2014/main" id="{BCC155A1-A628-1E04-DF87-9EBA8444D602}"/>
+              </a:ext>
+            </a:extLst>
+          </p:cNvPr>
+          <p:cNvSpPr txBox="1"/>
+          <p:nvPr/>
+        </p:nvSpPr>
+        <p:spPr>
+          <a:xfrm>
+            <a:off x="471528" y="674013"/>
+            <a:ext cx="1255152" cy="169277"/>
+          </a:xfrm>
+          <a:prstGeom prst="rect">
+            <a:avLst/>
+          </a:prstGeom>
+          <a:noFill/>
+        </p:spPr>
+        <p:txBody>
+          <a:bodyPr wrap="none" lIns="0" tIns="0" rIns="0" bIns="0" rtlCol="0">
+            <a:spAutoFit/>
+          </a:bodyPr>
+          <a:lstStyle/>
+          <a:p>
+            <a:r>
+              <a:rPr lang="en-US" sz="1100" dirty="0"/>
+              <a:t>Differential Equation</a:t>
+            </a:r>
+          </a:p>
+        </p:txBody>
+      </p:sp>
+      <p:sp>
+        <p:nvSpPr>
+          <p:cNvPr id="15" name="TextBox 14">
+            <a:extLst>
+              <a:ext uri="{FF2B5EF4-FFF2-40B4-BE49-F238E27FC236}">
+                <a16:creationId xmlns:a16="http://schemas.microsoft.com/office/drawing/2014/main" id="{7A9D105A-E025-D0B8-8F88-90F8B38402A8}"/>
+              </a:ext>
+            </a:extLst>
+          </p:cNvPr>
+          <p:cNvSpPr txBox="1"/>
+          <p:nvPr/>
+        </p:nvSpPr>
+        <p:spPr>
+          <a:xfrm>
+            <a:off x="2901629" y="1129159"/>
+            <a:ext cx="1285608" cy="169277"/>
+          </a:xfrm>
+          <a:prstGeom prst="rect">
+            <a:avLst/>
+          </a:prstGeom>
+          <a:noFill/>
+        </p:spPr>
+        <p:txBody>
+          <a:bodyPr wrap="none" lIns="0" tIns="0" rIns="0" bIns="0" rtlCol="0">
+            <a:spAutoFit/>
+          </a:bodyPr>
+          <a:lstStyle/>
+          <a:p>
+            <a:r>
+              <a:rPr lang="en-US" sz="1100" dirty="0"/>
+              <a:t>Boundary Conditions</a:t>
+            </a:r>
+          </a:p>
+        </p:txBody>
+      </p:sp>
+      <mc:AlternateContent xmlns:mc="http://schemas.openxmlformats.org/markup-compatibility/2006">
+        <mc:Choice xmlns:a14="http://schemas.microsoft.com/office/drawing/2010/main" Requires="a14">
+          <p:sp>
+            <p:nvSpPr>
+              <p:cNvPr id="16" name="TextBox 15">
+                <a:extLst>
+                  <a:ext uri="{FF2B5EF4-FFF2-40B4-BE49-F238E27FC236}">
+                    <a16:creationId xmlns:a16="http://schemas.microsoft.com/office/drawing/2014/main" id="{6AD37873-79B2-B051-CE5C-1EE6A9CDE05B}"/>
+                  </a:ext>
+                </a:extLst>
+              </p:cNvPr>
+              <p:cNvSpPr txBox="1"/>
+              <p:nvPr/>
+            </p:nvSpPr>
+            <p:spPr>
+              <a:xfrm>
+                <a:off x="2260600" y="1896814"/>
+                <a:ext cx="2554161" cy="810222"/>
+              </a:xfrm>
+              <a:prstGeom prst="rect">
+                <a:avLst/>
+              </a:prstGeom>
+              <a:noFill/>
+            </p:spPr>
+            <p:txBody>
+              <a:bodyPr wrap="none" lIns="0" tIns="0" rIns="0" bIns="0" rtlCol="0">
+                <a:spAutoFit/>
+              </a:bodyPr>
+              <a:lstStyle/>
+              <a:p>
+                <a14:m>
+                  <m:oMathPara xmlns:m="http://schemas.openxmlformats.org/officeDocument/2006/math">
+                    <m:oMathParaPr>
+                      <m:jc m:val="centerGroup"/>
+                    </m:oMathParaPr>
+                    <m:oMath xmlns:m="http://schemas.openxmlformats.org/officeDocument/2006/math">
+                      <m:r>
+                        <a:rPr lang="en-US" b="0" i="1" smtClean="0">
+                          <a:latin typeface="Cambria Math" panose="02040503050406030204" pitchFamily="18" charset="0"/>
+                        </a:rPr>
+                        <m:t>𝜙</m:t>
+                      </m:r>
+                      <m:r>
+                        <a:rPr lang="en-US" b="0" i="1" smtClean="0">
+                          <a:latin typeface="Cambria Math" panose="02040503050406030204" pitchFamily="18" charset="0"/>
+                        </a:rPr>
+                        <m:t>=</m:t>
+                      </m:r>
+                      <m:nary>
+                        <m:naryPr>
+                          <m:chr m:val="∑"/>
+                          <m:ctrlPr>
+                            <a:rPr lang="en-US" b="0" i="1" smtClean="0">
+                              <a:latin typeface="Cambria Math" panose="02040503050406030204" pitchFamily="18" charset="0"/>
+                            </a:rPr>
+                          </m:ctrlPr>
+                        </m:naryPr>
+                        <m:sub>
+                          <m:r>
+                            <a:rPr lang="en-US" b="0" i="1" smtClean="0">
+                              <a:latin typeface="Cambria Math" panose="02040503050406030204" pitchFamily="18" charset="0"/>
+                            </a:rPr>
+                            <m:t>𝑗</m:t>
+                          </m:r>
+                        </m:sub>
+                        <m:sup>
+                          <m:r>
+                            <a:rPr lang="en-US" b="0" i="1" smtClean="0">
+                              <a:latin typeface="Cambria Math" panose="02040503050406030204" pitchFamily="18" charset="0"/>
+                            </a:rPr>
+                            <m:t>𝑁</m:t>
+                          </m:r>
+                        </m:sup>
+                        <m:e>
+                          <m:sSub>
+                            <m:sSubPr>
+                              <m:ctrlPr>
+                                <a:rPr lang="en-US" b="0" i="1" smtClean="0">
+                                  <a:latin typeface="Cambria Math" panose="02040503050406030204" pitchFamily="18" charset="0"/>
+                                </a:rPr>
+                              </m:ctrlPr>
+                            </m:sSubPr>
+                            <m:e>
+                              <m:r>
+                                <a:rPr lang="en-US" b="0" i="1" smtClean="0">
+                                  <a:latin typeface="Cambria Math" panose="02040503050406030204" pitchFamily="18" charset="0"/>
+                                </a:rPr>
+                                <m:t>𝑁</m:t>
+                              </m:r>
+                            </m:e>
+                            <m:sub>
+                              <m:r>
+                                <a:rPr lang="en-US" b="0" i="1" smtClean="0">
+                                  <a:latin typeface="Cambria Math" panose="02040503050406030204" pitchFamily="18" charset="0"/>
+                                </a:rPr>
+                                <m:t>𝑗</m:t>
+                              </m:r>
+                            </m:sub>
+                          </m:sSub>
+                          <m:sSub>
+                            <m:sSubPr>
+                              <m:ctrlPr>
+                                <a:rPr lang="en-US" b="0" i="1" smtClean="0">
+                                  <a:latin typeface="Cambria Math" panose="02040503050406030204" pitchFamily="18" charset="0"/>
+                                </a:rPr>
+                              </m:ctrlPr>
+                            </m:sSubPr>
+                            <m:e>
+                              <m:r>
+                                <a:rPr lang="en-US" b="0" i="1" smtClean="0">
+                                  <a:latin typeface="Cambria Math" panose="02040503050406030204" pitchFamily="18" charset="0"/>
+                                </a:rPr>
+                                <m:t>𝜙</m:t>
+                              </m:r>
+                            </m:e>
+                            <m:sub>
+                              <m:r>
+                                <a:rPr lang="en-US" b="0" i="1" smtClean="0">
+                                  <a:latin typeface="Cambria Math" panose="02040503050406030204" pitchFamily="18" charset="0"/>
+                                </a:rPr>
+                                <m:t>𝑗</m:t>
+                              </m:r>
+                            </m:sub>
+                          </m:sSub>
+                        </m:e>
+                      </m:nary>
+                      <m:r>
+                        <a:rPr lang="en-US" b="0" i="1" smtClean="0">
+                          <a:latin typeface="Cambria Math" panose="02040503050406030204" pitchFamily="18" charset="0"/>
+                        </a:rPr>
+                        <m:t>+</m:t>
+                      </m:r>
+                      <m:nary>
+                        <m:naryPr>
+                          <m:chr m:val="∑"/>
+                          <m:ctrlPr>
+                            <a:rPr lang="en-US" i="1">
+                              <a:latin typeface="Cambria Math" panose="02040503050406030204" pitchFamily="18" charset="0"/>
+                            </a:rPr>
+                          </m:ctrlPr>
+                        </m:naryPr>
+                        <m:sub>
+                          <m:r>
+                            <a:rPr lang="en-US" i="1">
+                              <a:latin typeface="Cambria Math" panose="02040503050406030204" pitchFamily="18" charset="0"/>
+                            </a:rPr>
+                            <m:t>𝑗</m:t>
+                          </m:r>
+                        </m:sub>
+                        <m:sup>
+                          <m:sSub>
+                            <m:sSubPr>
+                              <m:ctrlPr>
+                                <a:rPr lang="en-US" b="0" i="1" smtClean="0">
+                                  <a:latin typeface="Cambria Math" panose="02040503050406030204" pitchFamily="18" charset="0"/>
+                                </a:rPr>
+                              </m:ctrlPr>
+                            </m:sSubPr>
+                            <m:e>
+                              <m:r>
+                                <a:rPr lang="en-US" i="1">
+                                  <a:latin typeface="Cambria Math" panose="02040503050406030204" pitchFamily="18" charset="0"/>
+                                </a:rPr>
+                                <m:t>𝑁</m:t>
+                              </m:r>
+                            </m:e>
+                            <m:sub>
+                              <m:r>
+                                <a:rPr lang="en-US" b="0" i="1" smtClean="0">
+                                  <a:latin typeface="Cambria Math" panose="02040503050406030204" pitchFamily="18" charset="0"/>
+                                </a:rPr>
+                                <m:t>𝐷</m:t>
+                              </m:r>
+                            </m:sub>
+                          </m:sSub>
+                        </m:sup>
+                        <m:e>
+                          <m:sSubSup>
+                            <m:sSubSupPr>
+                              <m:ctrlPr>
+                                <a:rPr lang="en-US" b="0" i="1" smtClean="0">
+                                  <a:latin typeface="Cambria Math" panose="02040503050406030204" pitchFamily="18" charset="0"/>
+                                </a:rPr>
+                              </m:ctrlPr>
+                            </m:sSubSupPr>
+                            <m:e>
+                              <m:r>
+                                <a:rPr lang="en-US" i="1">
+                                  <a:latin typeface="Cambria Math" panose="02040503050406030204" pitchFamily="18" charset="0"/>
+                                </a:rPr>
+                                <m:t>𝑁</m:t>
+                              </m:r>
+                            </m:e>
+                            <m:sub>
+                              <m:r>
+                                <a:rPr lang="en-US" i="1">
+                                  <a:latin typeface="Cambria Math" panose="02040503050406030204" pitchFamily="18" charset="0"/>
+                                </a:rPr>
+                                <m:t>𝑗</m:t>
+                              </m:r>
+                            </m:sub>
+                            <m:sup>
+                              <m:r>
+                                <a:rPr lang="en-US" b="0" i="1" smtClean="0">
+                                  <a:latin typeface="Cambria Math" panose="02040503050406030204" pitchFamily="18" charset="0"/>
+                                </a:rPr>
+                                <m:t>𝐷</m:t>
+                              </m:r>
+                            </m:sup>
+                          </m:sSubSup>
+                          <m:sSubSup>
+                            <m:sSubSupPr>
+                              <m:ctrlPr>
+                                <a:rPr lang="en-US" b="0" i="1" smtClean="0">
+                                  <a:latin typeface="Cambria Math" panose="02040503050406030204" pitchFamily="18" charset="0"/>
+                                </a:rPr>
+                              </m:ctrlPr>
+                            </m:sSubSupPr>
+                            <m:e>
+                              <m:r>
+                                <a:rPr lang="en-US" i="1">
+                                  <a:latin typeface="Cambria Math" panose="02040503050406030204" pitchFamily="18" charset="0"/>
+                                </a:rPr>
+                                <m:t>𝜙</m:t>
+                              </m:r>
+                            </m:e>
+                            <m:sub>
+                              <m:r>
+                                <a:rPr lang="en-US" i="1">
+                                  <a:latin typeface="Cambria Math" panose="02040503050406030204" pitchFamily="18" charset="0"/>
+                                </a:rPr>
+                                <m:t>𝑗</m:t>
+                              </m:r>
+                            </m:sub>
+                            <m:sup>
+                              <m:r>
+                                <a:rPr lang="en-US" b="0" i="1" smtClean="0">
+                                  <a:latin typeface="Cambria Math" panose="02040503050406030204" pitchFamily="18" charset="0"/>
+                                </a:rPr>
+                                <m:t>𝐷</m:t>
+                              </m:r>
+                            </m:sup>
+                          </m:sSubSup>
+                        </m:e>
+                      </m:nary>
+                    </m:oMath>
+                  </m:oMathPara>
+                </a14:m>
+                <a:endParaRPr lang="en-US" dirty="0"/>
+              </a:p>
+            </p:txBody>
+          </p:sp>
+        </mc:Choice>
+        <mc:Fallback>
+          <p:sp>
+            <p:nvSpPr>
+              <p:cNvPr id="16" name="TextBox 15">
+                <a:extLst>
+                  <a:ext uri="{FF2B5EF4-FFF2-40B4-BE49-F238E27FC236}">
+                    <a16:creationId xmlns:a16="http://schemas.microsoft.com/office/drawing/2014/main" id="{6AD37873-79B2-B051-CE5C-1EE6A9CDE05B}"/>
+                  </a:ext>
+                </a:extLst>
+              </p:cNvPr>
+              <p:cNvSpPr txBox="1">
+                <a:spLocks noRot="1" noChangeAspect="1" noMove="1" noResize="1" noEditPoints="1" noAdjustHandles="1" noChangeArrowheads="1" noChangeShapeType="1" noTextEdit="1"/>
+              </p:cNvSpPr>
+              <p:nvPr/>
+            </p:nvSpPr>
+            <p:spPr>
+              <a:xfrm>
+                <a:off x="2260600" y="1896814"/>
+                <a:ext cx="2554161" cy="810222"/>
+              </a:xfrm>
+              <a:prstGeom prst="rect">
+                <a:avLst/>
+              </a:prstGeom>
+              <a:blipFill>
+                <a:blip r:embed="rId7"/>
+                <a:stretch>
+                  <a:fillRect/>
+                </a:stretch>
+              </a:blipFill>
+            </p:spPr>
+            <p:txBody>
+              <a:bodyPr/>
+              <a:lstStyle/>
+              <a:p>
+                <a:r>
+                  <a:rPr lang="en-US">
+                    <a:noFill/>
+                  </a:rPr>
+                  <a:t> </a:t>
+                </a:r>
+              </a:p>
+            </p:txBody>
+          </p:sp>
+        </mc:Fallback>
+      </mc:AlternateContent>
+      <p:pic>
+        <p:nvPicPr>
+          <p:cNvPr id="18" name="Picture 17">
+            <a:extLst>
+              <a:ext uri="{FF2B5EF4-FFF2-40B4-BE49-F238E27FC236}">
+                <a16:creationId xmlns:a16="http://schemas.microsoft.com/office/drawing/2014/main" id="{FE7CD02D-4164-D0AA-7C71-2D5973EAF4D9}"/>
+              </a:ext>
+            </a:extLst>
+          </p:cNvPr>
+          <p:cNvPicPr>
+            <a:picLocks noChangeAspect="1"/>
+          </p:cNvPicPr>
+          <p:nvPr/>
+        </p:nvPicPr>
+        <p:blipFill>
+          <a:blip r:embed="rId8"/>
+          <a:srcRect t="69091"/>
+          <a:stretch>
+            <a:fillRect/>
+          </a:stretch>
+        </p:blipFill>
+        <p:spPr>
+          <a:xfrm>
+            <a:off x="1422400" y="2806932"/>
+            <a:ext cx="4495800" cy="313722"/>
+          </a:xfrm>
+          <a:prstGeom prst="rect">
+            <a:avLst/>
+          </a:prstGeom>
+        </p:spPr>
+      </p:pic>
+    </p:spTree>
+    <p:extLst>
+      <p:ext uri="{BB962C8B-B14F-4D97-AF65-F5344CB8AC3E}">
+        <p14:creationId xmlns:p14="http://schemas.microsoft.com/office/powerpoint/2010/main" val="3489759176"/>
+      </p:ext>
+    </p:extLst>
+  </p:cSld>
+  <p:clrMapOvr>
+    <a:masterClrMapping/>
+  </p:clrMapOvr>
+</p:sld>
+</file>
+
+<file path=ppt/slides/slide4.xml><?xml version="1.0" encoding="utf-8"?>
+<p:sld xmlns:a="http://schemas.openxmlformats.org/drawingml/2006/main" xmlns:r="http://schemas.openxmlformats.org/officeDocument/2006/relationships" xmlns:p="http://schemas.openxmlformats.org/presentationml/2006/main">
+  <p:cSld>
+    <p:spTree>
+      <p:nvGrpSpPr>
+        <p:cNvPr id="1" name=""/>
+        <p:cNvGrpSpPr/>
+        <p:nvPr/>
+      </p:nvGrpSpPr>
+      <p:grpSpPr>
+        <a:xfrm>
+          <a:off x="0" y="0"/>
+          <a:ext cx="0" cy="0"/>
+          <a:chOff x="0" y="0"/>
+          <a:chExt cx="0" cy="0"/>
+        </a:xfrm>
+      </p:grpSpPr>
+      <p:sp>
+        <p:nvSpPr>
+          <p:cNvPr id="21" name="Isosceles Triangle 20">
+            <a:extLst>
+              <a:ext uri="{FF2B5EF4-FFF2-40B4-BE49-F238E27FC236}">
+                <a16:creationId xmlns:a16="http://schemas.microsoft.com/office/drawing/2014/main" id="{6AC36975-60A4-7F15-FF80-EF44218B5ABB}"/>
+              </a:ext>
+            </a:extLst>
+          </p:cNvPr>
+          <p:cNvSpPr/>
+          <p:nvPr/>
+        </p:nvSpPr>
+        <p:spPr>
+          <a:xfrm>
+            <a:off x="1898650" y="425450"/>
+            <a:ext cx="673100" cy="596900"/>
+          </a:xfrm>
+          <a:prstGeom prst="triangle">
+            <a:avLst/>
+          </a:prstGeom>
+          <a:solidFill>
+            <a:srgbClr val="FF0000">
+              <a:alpha val="49804"/>
+            </a:srgbClr>
+          </a:solidFill>
+        </p:spPr>
+        <p:style>
+          <a:lnRef idx="2">
+            <a:schemeClr val="accent1">
+              <a:shade val="15000"/>
+            </a:schemeClr>
+          </a:lnRef>
+          <a:fillRef idx="1">
+            <a:schemeClr val="accent1"/>
+          </a:fillRef>
+          <a:effectRef idx="0">
+            <a:schemeClr val="accent1"/>
+          </a:effectRef>
+          <a:fontRef idx="minor">
+            <a:schemeClr val="lt1"/>
+          </a:fontRef>
+        </p:style>
+        <p:txBody>
+          <a:bodyPr rtlCol="0" anchor="ctr"/>
+          <a:lstStyle/>
+          <a:p>
+            <a:pPr algn="ctr"/>
+            <a:endParaRPr lang="en-US"/>
+          </a:p>
+        </p:txBody>
+      </p:sp>
+      <p:sp>
+        <p:nvSpPr>
+          <p:cNvPr id="22" name="Isosceles Triangle 21">
+            <a:extLst>
+              <a:ext uri="{FF2B5EF4-FFF2-40B4-BE49-F238E27FC236}">
+                <a16:creationId xmlns:a16="http://schemas.microsoft.com/office/drawing/2014/main" id="{E4388FF3-D6A4-D786-519F-931FBF35FC17}"/>
+              </a:ext>
+            </a:extLst>
+          </p:cNvPr>
+          <p:cNvSpPr/>
+          <p:nvPr/>
+        </p:nvSpPr>
+        <p:spPr>
+          <a:xfrm flipV="1">
+            <a:off x="2235200" y="425450"/>
+            <a:ext cx="673100" cy="596900"/>
+          </a:xfrm>
+          <a:prstGeom prst="triangle">
+            <a:avLst/>
+          </a:prstGeom>
+          <a:solidFill>
+            <a:srgbClr val="FF0000">
+              <a:alpha val="49804"/>
+            </a:srgbClr>
+          </a:solidFill>
+        </p:spPr>
+        <p:style>
+          <a:lnRef idx="2">
+            <a:schemeClr val="accent1">
+              <a:shade val="15000"/>
+            </a:schemeClr>
+          </a:lnRef>
+          <a:fillRef idx="1">
+            <a:schemeClr val="accent1"/>
+          </a:fillRef>
+          <a:effectRef idx="0">
+            <a:schemeClr val="accent1"/>
+          </a:effectRef>
+          <a:fontRef idx="minor">
+            <a:schemeClr val="lt1"/>
+          </a:fontRef>
+        </p:style>
+        <p:txBody>
+          <a:bodyPr rtlCol="0" anchor="ctr"/>
+          <a:lstStyle/>
+          <a:p>
+            <a:pPr algn="ctr"/>
+            <a:endParaRPr lang="en-US"/>
+          </a:p>
+        </p:txBody>
+      </p:sp>
+      <p:sp>
+        <p:nvSpPr>
+          <p:cNvPr id="23" name="Isosceles Triangle 22">
+            <a:extLst>
+              <a:ext uri="{FF2B5EF4-FFF2-40B4-BE49-F238E27FC236}">
+                <a16:creationId xmlns:a16="http://schemas.microsoft.com/office/drawing/2014/main" id="{F4D0F480-FAA8-C301-6873-2818517C399A}"/>
+              </a:ext>
+            </a:extLst>
+          </p:cNvPr>
+          <p:cNvSpPr/>
+          <p:nvPr/>
+        </p:nvSpPr>
+        <p:spPr>
+          <a:xfrm>
+            <a:off x="2571750" y="425450"/>
+            <a:ext cx="673100" cy="596900"/>
+          </a:xfrm>
+          <a:prstGeom prst="triangle">
+            <a:avLst/>
+          </a:prstGeom>
+          <a:solidFill>
+            <a:srgbClr val="FF0000">
+              <a:alpha val="49804"/>
+            </a:srgbClr>
+          </a:solidFill>
+        </p:spPr>
+        <p:style>
+          <a:lnRef idx="2">
+            <a:schemeClr val="accent1">
+              <a:shade val="15000"/>
+            </a:schemeClr>
+          </a:lnRef>
+          <a:fillRef idx="1">
+            <a:schemeClr val="accent1"/>
+          </a:fillRef>
+          <a:effectRef idx="0">
+            <a:schemeClr val="accent1"/>
+          </a:effectRef>
+          <a:fontRef idx="minor">
+            <a:schemeClr val="lt1"/>
+          </a:fontRef>
+        </p:style>
+        <p:txBody>
+          <a:bodyPr rtlCol="0" anchor="ctr"/>
+          <a:lstStyle/>
+          <a:p>
+            <a:pPr algn="ctr"/>
+            <a:endParaRPr lang="en-US"/>
+          </a:p>
+        </p:txBody>
+      </p:sp>
+      <p:sp>
+        <p:nvSpPr>
+          <p:cNvPr id="24" name="Isosceles Triangle 23">
+            <a:extLst>
+              <a:ext uri="{FF2B5EF4-FFF2-40B4-BE49-F238E27FC236}">
+                <a16:creationId xmlns:a16="http://schemas.microsoft.com/office/drawing/2014/main" id="{262CD7E1-6434-2374-9240-D6D196DDE7C9}"/>
+              </a:ext>
+            </a:extLst>
+          </p:cNvPr>
+          <p:cNvSpPr/>
+          <p:nvPr/>
+        </p:nvSpPr>
+        <p:spPr>
+          <a:xfrm>
+            <a:off x="2235200" y="1022350"/>
+            <a:ext cx="673100" cy="596900"/>
+          </a:xfrm>
+          <a:prstGeom prst="triangle">
+            <a:avLst/>
+          </a:prstGeom>
+          <a:solidFill>
+            <a:srgbClr val="FF0000">
+              <a:alpha val="49804"/>
+            </a:srgbClr>
+          </a:solidFill>
+        </p:spPr>
+        <p:style>
+          <a:lnRef idx="2">
+            <a:schemeClr val="accent1">
+              <a:shade val="15000"/>
+            </a:schemeClr>
+          </a:lnRef>
+          <a:fillRef idx="1">
+            <a:schemeClr val="accent1"/>
+          </a:fillRef>
+          <a:effectRef idx="0">
+            <a:schemeClr val="accent1"/>
+          </a:effectRef>
+          <a:fontRef idx="minor">
+            <a:schemeClr val="lt1"/>
+          </a:fontRef>
+        </p:style>
+        <p:txBody>
+          <a:bodyPr rtlCol="0" anchor="ctr"/>
+          <a:lstStyle/>
+          <a:p>
+            <a:pPr algn="ctr"/>
+            <a:endParaRPr lang="en-US"/>
+          </a:p>
+        </p:txBody>
+      </p:sp>
+      <p:sp>
+        <p:nvSpPr>
+          <p:cNvPr id="25" name="Isosceles Triangle 24">
+            <a:extLst>
+              <a:ext uri="{FF2B5EF4-FFF2-40B4-BE49-F238E27FC236}">
+                <a16:creationId xmlns:a16="http://schemas.microsoft.com/office/drawing/2014/main" id="{DB558221-F264-868C-C3A9-414A01B456A2}"/>
+              </a:ext>
+            </a:extLst>
+          </p:cNvPr>
+          <p:cNvSpPr/>
+          <p:nvPr/>
+        </p:nvSpPr>
+        <p:spPr>
+          <a:xfrm flipV="1">
+            <a:off x="2571750" y="1022350"/>
+            <a:ext cx="673100" cy="596900"/>
+          </a:xfrm>
+          <a:prstGeom prst="triangle">
+            <a:avLst/>
+          </a:prstGeom>
+          <a:solidFill>
+            <a:srgbClr val="FF0000">
+              <a:alpha val="49804"/>
+            </a:srgbClr>
+          </a:solidFill>
+        </p:spPr>
+        <p:style>
+          <a:lnRef idx="2">
+            <a:schemeClr val="accent1">
+              <a:shade val="15000"/>
+            </a:schemeClr>
+          </a:lnRef>
+          <a:fillRef idx="1">
+            <a:schemeClr val="accent1"/>
+          </a:fillRef>
+          <a:effectRef idx="0">
+            <a:schemeClr val="accent1"/>
+          </a:effectRef>
+          <a:fontRef idx="minor">
+            <a:schemeClr val="lt1"/>
+          </a:fontRef>
+        </p:style>
+        <p:txBody>
+          <a:bodyPr rtlCol="0" anchor="ctr"/>
+          <a:lstStyle/>
+          <a:p>
+            <a:pPr algn="ctr"/>
+            <a:endParaRPr lang="en-US"/>
+          </a:p>
+        </p:txBody>
+      </p:sp>
+      <p:sp>
+        <p:nvSpPr>
+          <p:cNvPr id="26" name="Isosceles Triangle 25">
+            <a:extLst>
+              <a:ext uri="{FF2B5EF4-FFF2-40B4-BE49-F238E27FC236}">
+                <a16:creationId xmlns:a16="http://schemas.microsoft.com/office/drawing/2014/main" id="{45F3AC0C-C74E-BECE-5D9A-C78DFB4107BB}"/>
+              </a:ext>
+            </a:extLst>
+          </p:cNvPr>
+          <p:cNvSpPr/>
+          <p:nvPr/>
+        </p:nvSpPr>
+        <p:spPr>
+          <a:xfrm flipV="1">
+            <a:off x="1898650" y="1022350"/>
+            <a:ext cx="673100" cy="596900"/>
+          </a:xfrm>
+          <a:prstGeom prst="triangle">
+            <a:avLst/>
+          </a:prstGeom>
+          <a:solidFill>
+            <a:srgbClr val="FF0000">
+              <a:alpha val="49804"/>
+            </a:srgbClr>
+          </a:solidFill>
+        </p:spPr>
+        <p:style>
+          <a:lnRef idx="2">
+            <a:schemeClr val="accent1">
+              <a:shade val="15000"/>
+            </a:schemeClr>
+          </a:lnRef>
+          <a:fillRef idx="1">
+            <a:schemeClr val="accent1"/>
+          </a:fillRef>
+          <a:effectRef idx="0">
+            <a:schemeClr val="accent1"/>
+          </a:effectRef>
+          <a:fontRef idx="minor">
+            <a:schemeClr val="lt1"/>
+          </a:fontRef>
+        </p:style>
+        <p:txBody>
+          <a:bodyPr rtlCol="0" anchor="ctr"/>
+          <a:lstStyle/>
+          <a:p>
+            <a:pPr algn="ctr"/>
+            <a:endParaRPr lang="en-US"/>
+          </a:p>
+        </p:txBody>
+      </p:sp>
+      <p:sp>
+        <p:nvSpPr>
+          <p:cNvPr id="27" name="Oval 26">
+            <a:extLst>
+              <a:ext uri="{FF2B5EF4-FFF2-40B4-BE49-F238E27FC236}">
+                <a16:creationId xmlns:a16="http://schemas.microsoft.com/office/drawing/2014/main" id="{3BDF090F-5443-1847-A4C2-DA92272C3217}"/>
+              </a:ext>
+            </a:extLst>
+          </p:cNvPr>
+          <p:cNvSpPr/>
+          <p:nvPr/>
+        </p:nvSpPr>
+        <p:spPr>
+          <a:xfrm>
+            <a:off x="2495550" y="946150"/>
+            <a:ext cx="158750" cy="171450"/>
+          </a:xfrm>
+          <a:prstGeom prst="ellipse">
+            <a:avLst/>
+          </a:prstGeom>
+          <a:solidFill>
+            <a:schemeClr val="tx1"/>
+          </a:solidFill>
+        </p:spPr>
+        <p:style>
+          <a:lnRef idx="2">
+            <a:schemeClr val="accent1">
+              <a:shade val="15000"/>
+            </a:schemeClr>
+          </a:lnRef>
+          <a:fillRef idx="1">
+            <a:schemeClr val="accent1"/>
+          </a:fillRef>
+          <a:effectRef idx="0">
+            <a:schemeClr val="accent1"/>
+          </a:effectRef>
+          <a:fontRef idx="minor">
+            <a:schemeClr val="lt1"/>
+          </a:fontRef>
+        </p:style>
+        <p:txBody>
+          <a:bodyPr rtlCol="0" anchor="ctr"/>
+          <a:lstStyle/>
+          <a:p>
+            <a:pPr algn="ctr"/>
+            <a:endParaRPr lang="en-US"/>
+          </a:p>
+        </p:txBody>
+      </p:sp>
+      <mc:AlternateContent xmlns:mc="http://schemas.openxmlformats.org/markup-compatibility/2006">
+        <mc:Choice xmlns:a14="http://schemas.microsoft.com/office/drawing/2010/main" Requires="a14">
+          <p:sp>
+            <p:nvSpPr>
+              <p:cNvPr id="28" name="TextBox 27">
+                <a:extLst>
+                  <a:ext uri="{FF2B5EF4-FFF2-40B4-BE49-F238E27FC236}">
+                    <a16:creationId xmlns:a16="http://schemas.microsoft.com/office/drawing/2014/main" id="{C294CA15-101C-3E93-7D41-71EF85B39EBE}"/>
+                  </a:ext>
+                </a:extLst>
+              </p:cNvPr>
+              <p:cNvSpPr txBox="1"/>
+              <p:nvPr/>
+            </p:nvSpPr>
+            <p:spPr>
+              <a:xfrm>
+                <a:off x="2768600" y="1031875"/>
+                <a:ext cx="133818" cy="276999"/>
+              </a:xfrm>
+              <a:prstGeom prst="rect">
+                <a:avLst/>
+              </a:prstGeom>
+              <a:noFill/>
+            </p:spPr>
+            <p:txBody>
+              <a:bodyPr wrap="none" lIns="0" tIns="0" rIns="0" bIns="0" rtlCol="0">
+                <a:spAutoFit/>
+              </a:bodyPr>
+              <a:lstStyle/>
+              <a:p>
+                <a14:m>
+                  <m:oMathPara xmlns:m="http://schemas.openxmlformats.org/officeDocument/2006/math">
+                    <m:oMathParaPr>
+                      <m:jc m:val="centerGroup"/>
+                    </m:oMathParaPr>
+                    <m:oMath xmlns:m="http://schemas.openxmlformats.org/officeDocument/2006/math">
+                      <m:r>
+                        <a:rPr lang="en-US" b="0" i="1" smtClean="0">
+                          <a:latin typeface="Cambria Math" panose="02040503050406030204" pitchFamily="18" charset="0"/>
+                        </a:rPr>
+                        <m:t>𝑗</m:t>
+                      </m:r>
+                    </m:oMath>
+                  </m:oMathPara>
+                </a14:m>
+                <a:endParaRPr lang="en-US" dirty="0"/>
+              </a:p>
+            </p:txBody>
+          </p:sp>
+        </mc:Choice>
+        <mc:Fallback>
+          <p:sp>
+            <p:nvSpPr>
+              <p:cNvPr id="28" name="TextBox 27">
+                <a:extLst>
+                  <a:ext uri="{FF2B5EF4-FFF2-40B4-BE49-F238E27FC236}">
+                    <a16:creationId xmlns:a16="http://schemas.microsoft.com/office/drawing/2014/main" id="{C294CA15-101C-3E93-7D41-71EF85B39EBE}"/>
+                  </a:ext>
+                </a:extLst>
+              </p:cNvPr>
+              <p:cNvSpPr txBox="1">
+                <a:spLocks noRot="1" noChangeAspect="1" noMove="1" noResize="1" noEditPoints="1" noAdjustHandles="1" noChangeArrowheads="1" noChangeShapeType="1" noTextEdit="1"/>
+              </p:cNvSpPr>
+              <p:nvPr/>
+            </p:nvSpPr>
+            <p:spPr>
+              <a:xfrm>
+                <a:off x="2768600" y="1031875"/>
+                <a:ext cx="133818" cy="276999"/>
+              </a:xfrm>
+              <a:prstGeom prst="rect">
+                <a:avLst/>
+              </a:prstGeom>
+              <a:blipFill>
+                <a:blip r:embed="rId2"/>
+                <a:stretch>
+                  <a:fillRect l="-63636" t="-2174" r="-63636" b="-32609"/>
+                </a:stretch>
+              </a:blipFill>
+            </p:spPr>
+            <p:txBody>
+              <a:bodyPr/>
+              <a:lstStyle/>
+              <a:p>
+                <a:r>
+                  <a:rPr lang="en-US">
+                    <a:noFill/>
+                  </a:rPr>
+                  <a:t> </a:t>
+                </a:r>
+              </a:p>
+            </p:txBody>
+          </p:sp>
+        </mc:Fallback>
+      </mc:AlternateContent>
+      <p:sp>
+        <p:nvSpPr>
+          <p:cNvPr id="6" name="Isosceles Triangle 5">
+            <a:extLst>
+              <a:ext uri="{FF2B5EF4-FFF2-40B4-BE49-F238E27FC236}">
+                <a16:creationId xmlns:a16="http://schemas.microsoft.com/office/drawing/2014/main" id="{0EBE7A02-293B-3673-4122-A07157B48CD3}"/>
+              </a:ext>
+            </a:extLst>
+          </p:cNvPr>
+          <p:cNvSpPr/>
+          <p:nvPr/>
+        </p:nvSpPr>
+        <p:spPr>
+          <a:xfrm>
+            <a:off x="1225550" y="425450"/>
+            <a:ext cx="673100" cy="596900"/>
+          </a:xfrm>
+          <a:prstGeom prst="triangle">
+            <a:avLst/>
+          </a:prstGeom>
+          <a:solidFill>
+            <a:srgbClr val="0000FF">
+              <a:alpha val="49804"/>
+            </a:srgbClr>
+          </a:solidFill>
+        </p:spPr>
+        <p:style>
+          <a:lnRef idx="2">
+            <a:schemeClr val="accent1">
+              <a:shade val="15000"/>
+            </a:schemeClr>
+          </a:lnRef>
+          <a:fillRef idx="1">
+            <a:schemeClr val="accent1"/>
+          </a:fillRef>
+          <a:effectRef idx="0">
+            <a:schemeClr val="accent1"/>
+          </a:effectRef>
+          <a:fontRef idx="minor">
+            <a:schemeClr val="lt1"/>
+          </a:fontRef>
+        </p:style>
+        <p:txBody>
+          <a:bodyPr rtlCol="0" anchor="ctr"/>
+          <a:lstStyle/>
+          <a:p>
+            <a:pPr algn="ctr"/>
+            <a:endParaRPr lang="en-US"/>
+          </a:p>
+        </p:txBody>
+      </p:sp>
+      <p:sp>
+        <p:nvSpPr>
+          <p:cNvPr id="8" name="Isosceles Triangle 7">
+            <a:extLst>
+              <a:ext uri="{FF2B5EF4-FFF2-40B4-BE49-F238E27FC236}">
+                <a16:creationId xmlns:a16="http://schemas.microsoft.com/office/drawing/2014/main" id="{56548B84-A8A1-769C-CF66-13968C557A38}"/>
+              </a:ext>
+            </a:extLst>
+          </p:cNvPr>
+          <p:cNvSpPr/>
+          <p:nvPr/>
+        </p:nvSpPr>
+        <p:spPr>
+          <a:xfrm flipV="1">
+            <a:off x="1562100" y="425450"/>
+            <a:ext cx="673100" cy="596900"/>
+          </a:xfrm>
+          <a:prstGeom prst="triangle">
+            <a:avLst/>
+          </a:prstGeom>
+          <a:solidFill>
+            <a:srgbClr val="0000FF">
+              <a:alpha val="49804"/>
+            </a:srgbClr>
+          </a:solidFill>
+        </p:spPr>
+        <p:style>
+          <a:lnRef idx="2">
+            <a:schemeClr val="accent1">
+              <a:shade val="15000"/>
+            </a:schemeClr>
+          </a:lnRef>
+          <a:fillRef idx="1">
+            <a:schemeClr val="accent1"/>
+          </a:fillRef>
+          <a:effectRef idx="0">
+            <a:schemeClr val="accent1"/>
+          </a:effectRef>
+          <a:fontRef idx="minor">
+            <a:schemeClr val="lt1"/>
+          </a:fontRef>
+        </p:style>
+        <p:txBody>
+          <a:bodyPr rtlCol="0" anchor="ctr"/>
+          <a:lstStyle/>
+          <a:p>
+            <a:pPr algn="ctr"/>
+            <a:endParaRPr lang="en-US"/>
+          </a:p>
+        </p:txBody>
+      </p:sp>
+      <p:sp>
+        <p:nvSpPr>
+          <p:cNvPr id="10" name="Isosceles Triangle 9">
+            <a:extLst>
+              <a:ext uri="{FF2B5EF4-FFF2-40B4-BE49-F238E27FC236}">
+                <a16:creationId xmlns:a16="http://schemas.microsoft.com/office/drawing/2014/main" id="{70896451-A608-763B-0A56-EF664235F3A3}"/>
+              </a:ext>
+            </a:extLst>
+          </p:cNvPr>
+          <p:cNvSpPr/>
+          <p:nvPr/>
+        </p:nvSpPr>
+        <p:spPr>
+          <a:xfrm>
+            <a:off x="1898650" y="425450"/>
+            <a:ext cx="673100" cy="596900"/>
+          </a:xfrm>
+          <a:prstGeom prst="triangle">
+            <a:avLst/>
+          </a:prstGeom>
+          <a:solidFill>
+            <a:srgbClr val="0000FF">
+              <a:alpha val="49804"/>
+            </a:srgbClr>
+          </a:solidFill>
+        </p:spPr>
+        <p:style>
+          <a:lnRef idx="2">
+            <a:schemeClr val="accent1">
+              <a:shade val="15000"/>
+            </a:schemeClr>
+          </a:lnRef>
+          <a:fillRef idx="1">
+            <a:schemeClr val="accent1"/>
+          </a:fillRef>
+          <a:effectRef idx="0">
+            <a:schemeClr val="accent1"/>
+          </a:effectRef>
+          <a:fontRef idx="minor">
+            <a:schemeClr val="lt1"/>
+          </a:fontRef>
+        </p:style>
+        <p:txBody>
+          <a:bodyPr rtlCol="0" anchor="ctr"/>
+          <a:lstStyle/>
+          <a:p>
+            <a:pPr algn="ctr"/>
+            <a:endParaRPr lang="en-US"/>
+          </a:p>
+        </p:txBody>
+      </p:sp>
+      <p:sp>
+        <p:nvSpPr>
+          <p:cNvPr id="12" name="Isosceles Triangle 11">
+            <a:extLst>
+              <a:ext uri="{FF2B5EF4-FFF2-40B4-BE49-F238E27FC236}">
+                <a16:creationId xmlns:a16="http://schemas.microsoft.com/office/drawing/2014/main" id="{D7DD6100-8170-98D4-9781-ED3F6B598B01}"/>
+              </a:ext>
+            </a:extLst>
+          </p:cNvPr>
+          <p:cNvSpPr/>
+          <p:nvPr/>
+        </p:nvSpPr>
+        <p:spPr>
+          <a:xfrm>
+            <a:off x="1562100" y="1022350"/>
+            <a:ext cx="673100" cy="596900"/>
+          </a:xfrm>
+          <a:prstGeom prst="triangle">
+            <a:avLst/>
+          </a:prstGeom>
+          <a:solidFill>
+            <a:srgbClr val="0000FF">
+              <a:alpha val="49804"/>
+            </a:srgbClr>
+          </a:solidFill>
+        </p:spPr>
+        <p:style>
+          <a:lnRef idx="2">
+            <a:schemeClr val="accent1">
+              <a:shade val="15000"/>
+            </a:schemeClr>
+          </a:lnRef>
+          <a:fillRef idx="1">
+            <a:schemeClr val="accent1"/>
+          </a:fillRef>
+          <a:effectRef idx="0">
+            <a:schemeClr val="accent1"/>
+          </a:effectRef>
+          <a:fontRef idx="minor">
+            <a:schemeClr val="lt1"/>
+          </a:fontRef>
+        </p:style>
+        <p:txBody>
+          <a:bodyPr rtlCol="0" anchor="ctr"/>
+          <a:lstStyle/>
+          <a:p>
+            <a:pPr algn="ctr"/>
+            <a:endParaRPr lang="en-US"/>
+          </a:p>
+        </p:txBody>
+      </p:sp>
+      <p:sp>
+        <p:nvSpPr>
+          <p:cNvPr id="14" name="Isosceles Triangle 13">
+            <a:extLst>
+              <a:ext uri="{FF2B5EF4-FFF2-40B4-BE49-F238E27FC236}">
+                <a16:creationId xmlns:a16="http://schemas.microsoft.com/office/drawing/2014/main" id="{C70EFE45-6B20-99D5-4D24-38D4C38E4892}"/>
+              </a:ext>
+            </a:extLst>
+          </p:cNvPr>
+          <p:cNvSpPr/>
+          <p:nvPr/>
+        </p:nvSpPr>
+        <p:spPr>
+          <a:xfrm flipV="1">
+            <a:off x="1898650" y="1022350"/>
+            <a:ext cx="673100" cy="596900"/>
+          </a:xfrm>
+          <a:prstGeom prst="triangle">
+            <a:avLst/>
+          </a:prstGeom>
+          <a:solidFill>
+            <a:srgbClr val="0000FF">
+              <a:alpha val="49804"/>
+            </a:srgbClr>
+          </a:solidFill>
+        </p:spPr>
+        <p:style>
+          <a:lnRef idx="2">
+            <a:schemeClr val="accent1">
+              <a:shade val="15000"/>
+            </a:schemeClr>
+          </a:lnRef>
+          <a:fillRef idx="1">
+            <a:schemeClr val="accent1"/>
+          </a:fillRef>
+          <a:effectRef idx="0">
+            <a:schemeClr val="accent1"/>
+          </a:effectRef>
+          <a:fontRef idx="minor">
+            <a:schemeClr val="lt1"/>
+          </a:fontRef>
+        </p:style>
+        <p:txBody>
+          <a:bodyPr rtlCol="0" anchor="ctr"/>
+          <a:lstStyle/>
+          <a:p>
+            <a:pPr algn="ctr"/>
+            <a:endParaRPr lang="en-US"/>
+          </a:p>
+        </p:txBody>
+      </p:sp>
+      <p:sp>
+        <p:nvSpPr>
+          <p:cNvPr id="16" name="Isosceles Triangle 15">
+            <a:extLst>
+              <a:ext uri="{FF2B5EF4-FFF2-40B4-BE49-F238E27FC236}">
+                <a16:creationId xmlns:a16="http://schemas.microsoft.com/office/drawing/2014/main" id="{FFDF1E52-25CB-CC2D-F37F-C23CF41A5E61}"/>
+              </a:ext>
+            </a:extLst>
+          </p:cNvPr>
+          <p:cNvSpPr/>
+          <p:nvPr/>
+        </p:nvSpPr>
+        <p:spPr>
+          <a:xfrm flipV="1">
+            <a:off x="1225550" y="1022350"/>
+            <a:ext cx="673100" cy="596900"/>
+          </a:xfrm>
+          <a:prstGeom prst="triangle">
+            <a:avLst/>
+          </a:prstGeom>
+          <a:solidFill>
+            <a:srgbClr val="0000FF">
+              <a:alpha val="49804"/>
+            </a:srgbClr>
+          </a:solidFill>
+        </p:spPr>
+        <p:style>
+          <a:lnRef idx="2">
+            <a:schemeClr val="accent1">
+              <a:shade val="15000"/>
+            </a:schemeClr>
+          </a:lnRef>
+          <a:fillRef idx="1">
+            <a:schemeClr val="accent1"/>
+          </a:fillRef>
+          <a:effectRef idx="0">
+            <a:schemeClr val="accent1"/>
+          </a:effectRef>
+          <a:fontRef idx="minor">
+            <a:schemeClr val="lt1"/>
+          </a:fontRef>
+        </p:style>
+        <p:txBody>
+          <a:bodyPr rtlCol="0" anchor="ctr"/>
+          <a:lstStyle/>
+          <a:p>
+            <a:pPr algn="ctr"/>
+            <a:endParaRPr lang="en-US"/>
+          </a:p>
+        </p:txBody>
+      </p:sp>
+      <p:sp>
+        <p:nvSpPr>
+          <p:cNvPr id="17" name="Oval 16">
+            <a:extLst>
+              <a:ext uri="{FF2B5EF4-FFF2-40B4-BE49-F238E27FC236}">
+                <a16:creationId xmlns:a16="http://schemas.microsoft.com/office/drawing/2014/main" id="{1775E68E-82A0-E900-ECE3-6B7745E6D169}"/>
+              </a:ext>
+            </a:extLst>
+          </p:cNvPr>
+          <p:cNvSpPr/>
+          <p:nvPr/>
+        </p:nvSpPr>
+        <p:spPr>
+          <a:xfrm>
+            <a:off x="1822450" y="946150"/>
+            <a:ext cx="158750" cy="171450"/>
+          </a:xfrm>
+          <a:prstGeom prst="ellipse">
+            <a:avLst/>
+          </a:prstGeom>
+          <a:solidFill>
+            <a:schemeClr val="tx1"/>
+          </a:solidFill>
+        </p:spPr>
+        <p:style>
+          <a:lnRef idx="2">
+            <a:schemeClr val="accent1">
+              <a:shade val="15000"/>
+            </a:schemeClr>
+          </a:lnRef>
+          <a:fillRef idx="1">
+            <a:schemeClr val="accent1"/>
+          </a:fillRef>
+          <a:effectRef idx="0">
+            <a:schemeClr val="accent1"/>
+          </a:effectRef>
+          <a:fontRef idx="minor">
+            <a:schemeClr val="lt1"/>
+          </a:fontRef>
+        </p:style>
+        <p:txBody>
+          <a:bodyPr rtlCol="0" anchor="ctr"/>
+          <a:lstStyle/>
+          <a:p>
+            <a:pPr algn="ctr"/>
+            <a:endParaRPr lang="en-US"/>
+          </a:p>
+        </p:txBody>
+      </p:sp>
+      <mc:AlternateContent xmlns:mc="http://schemas.openxmlformats.org/markup-compatibility/2006">
+        <mc:Choice xmlns:a14="http://schemas.microsoft.com/office/drawing/2010/main" Requires="a14">
+          <p:sp>
+            <p:nvSpPr>
+              <p:cNvPr id="18" name="TextBox 17">
+                <a:extLst>
+                  <a:ext uri="{FF2B5EF4-FFF2-40B4-BE49-F238E27FC236}">
+                    <a16:creationId xmlns:a16="http://schemas.microsoft.com/office/drawing/2014/main" id="{CB8ADF94-394C-ACE0-1022-1431753DCA70}"/>
+                  </a:ext>
+                </a:extLst>
+              </p:cNvPr>
+              <p:cNvSpPr txBox="1"/>
+              <p:nvPr/>
+            </p:nvSpPr>
+            <p:spPr>
+              <a:xfrm>
+                <a:off x="1656816" y="979100"/>
+                <a:ext cx="127534" cy="276999"/>
+              </a:xfrm>
+              <a:prstGeom prst="rect">
+                <a:avLst/>
+              </a:prstGeom>
+              <a:noFill/>
+            </p:spPr>
+            <p:txBody>
+              <a:bodyPr wrap="none" lIns="0" tIns="0" rIns="0" bIns="0" rtlCol="0">
+                <a:spAutoFit/>
+              </a:bodyPr>
+              <a:lstStyle/>
+              <a:p>
+                <a14:m>
+                  <m:oMathPara xmlns:m="http://schemas.openxmlformats.org/officeDocument/2006/math">
+                    <m:oMathParaPr>
+                      <m:jc m:val="centerGroup"/>
+                    </m:oMathParaPr>
+                    <m:oMath xmlns:m="http://schemas.openxmlformats.org/officeDocument/2006/math">
+                      <m:r>
+                        <a:rPr lang="en-US" b="0" i="1" smtClean="0">
+                          <a:latin typeface="Cambria Math" panose="02040503050406030204" pitchFamily="18" charset="0"/>
+                        </a:rPr>
+                        <m:t>𝑖</m:t>
+                      </m:r>
+                    </m:oMath>
+                  </m:oMathPara>
+                </a14:m>
+                <a:endParaRPr lang="en-US" dirty="0"/>
+              </a:p>
+            </p:txBody>
+          </p:sp>
+        </mc:Choice>
+        <mc:Fallback>
+          <p:sp>
+            <p:nvSpPr>
+              <p:cNvPr id="18" name="TextBox 17">
+                <a:extLst>
+                  <a:ext uri="{FF2B5EF4-FFF2-40B4-BE49-F238E27FC236}">
+                    <a16:creationId xmlns:a16="http://schemas.microsoft.com/office/drawing/2014/main" id="{CB8ADF94-394C-ACE0-1022-1431753DCA70}"/>
+                  </a:ext>
+                </a:extLst>
+              </p:cNvPr>
+              <p:cNvSpPr txBox="1">
+                <a:spLocks noRot="1" noChangeAspect="1" noMove="1" noResize="1" noEditPoints="1" noAdjustHandles="1" noChangeArrowheads="1" noChangeShapeType="1" noTextEdit="1"/>
+              </p:cNvSpPr>
+              <p:nvPr/>
+            </p:nvSpPr>
+            <p:spPr>
+              <a:xfrm>
+                <a:off x="1656816" y="979100"/>
+                <a:ext cx="127534" cy="276999"/>
+              </a:xfrm>
+              <a:prstGeom prst="rect">
+                <a:avLst/>
+              </a:prstGeom>
+              <a:blipFill>
+                <a:blip r:embed="rId3"/>
+                <a:stretch>
+                  <a:fillRect l="-47619" r="-42857" b="-8889"/>
+                </a:stretch>
+              </a:blipFill>
+            </p:spPr>
+            <p:txBody>
+              <a:bodyPr/>
+              <a:lstStyle/>
+              <a:p>
+                <a:r>
+                  <a:rPr lang="en-US">
+                    <a:noFill/>
+                  </a:rPr>
+                  <a:t> </a:t>
+                </a:r>
+              </a:p>
+            </p:txBody>
+          </p:sp>
+        </mc:Fallback>
+      </mc:AlternateContent>
+      <mc:AlternateContent xmlns:mc="http://schemas.openxmlformats.org/markup-compatibility/2006">
+        <mc:Choice xmlns:a14="http://schemas.microsoft.com/office/drawing/2010/main" Requires="a14">
+          <p:sp>
+            <p:nvSpPr>
+              <p:cNvPr id="31" name="TextBox 30">
+                <a:extLst>
+                  <a:ext uri="{FF2B5EF4-FFF2-40B4-BE49-F238E27FC236}">
+                    <a16:creationId xmlns:a16="http://schemas.microsoft.com/office/drawing/2014/main" id="{E096575C-55D4-725A-CC6A-5A67100E9658}"/>
+                  </a:ext>
+                </a:extLst>
+              </p:cNvPr>
+              <p:cNvSpPr txBox="1"/>
+              <p:nvPr/>
+            </p:nvSpPr>
+            <p:spPr>
+              <a:xfrm>
+                <a:off x="3511550" y="743719"/>
+                <a:ext cx="3117849" cy="576312"/>
+              </a:xfrm>
+              <a:prstGeom prst="rect">
+                <a:avLst/>
+              </a:prstGeom>
+              <a:noFill/>
+            </p:spPr>
+            <p:txBody>
+              <a:bodyPr wrap="square" lIns="0" tIns="0" rIns="0" bIns="0" rtlCol="0">
+                <a:spAutoFit/>
+              </a:bodyPr>
+              <a:lstStyle/>
+              <a:p>
+                <a14:m>
+                  <m:oMath xmlns:m="http://schemas.openxmlformats.org/officeDocument/2006/math">
+                    <m:sSub>
+                      <m:sSubPr>
+                        <m:ctrlPr>
+                          <a:rPr lang="en-US" b="0" i="1" smtClean="0">
+                            <a:latin typeface="Cambria Math" panose="02040503050406030204" pitchFamily="18" charset="0"/>
+                          </a:rPr>
+                        </m:ctrlPr>
+                      </m:sSubPr>
+                      <m:e>
+                        <m:r>
+                          <a:rPr lang="en-US" b="0" i="1" smtClean="0">
+                            <a:latin typeface="Cambria Math" panose="02040503050406030204" pitchFamily="18" charset="0"/>
+                          </a:rPr>
+                          <m:t>𝑁</m:t>
+                        </m:r>
+                      </m:e>
+                      <m:sub>
+                        <m:r>
+                          <a:rPr lang="en-US" b="0" i="1" smtClean="0">
+                            <a:latin typeface="Cambria Math" panose="02040503050406030204" pitchFamily="18" charset="0"/>
+                          </a:rPr>
+                          <m:t>𝑖</m:t>
+                        </m:r>
+                      </m:sub>
+                    </m:sSub>
+                  </m:oMath>
+                </a14:m>
+                <a:r>
+                  <a:rPr lang="en-US" dirty="0"/>
+                  <a:t> and </a:t>
+                </a:r>
+                <a14:m>
+                  <m:oMath xmlns:m="http://schemas.openxmlformats.org/officeDocument/2006/math">
+                    <m:sSub>
+                      <m:sSubPr>
+                        <m:ctrlPr>
+                          <a:rPr lang="en-US" b="0" i="1" smtClean="0">
+                            <a:latin typeface="Cambria Math" panose="02040503050406030204" pitchFamily="18" charset="0"/>
+                          </a:rPr>
+                        </m:ctrlPr>
+                      </m:sSubPr>
+                      <m:e>
+                        <m:r>
+                          <a:rPr lang="en-US" b="0" i="1" smtClean="0">
+                            <a:latin typeface="Cambria Math" panose="02040503050406030204" pitchFamily="18" charset="0"/>
+                          </a:rPr>
+                          <m:t>𝑁</m:t>
+                        </m:r>
+                      </m:e>
+                      <m:sub>
+                        <m:r>
+                          <a:rPr lang="en-US" b="0" i="1" smtClean="0">
+                            <a:latin typeface="Cambria Math" panose="02040503050406030204" pitchFamily="18" charset="0"/>
+                          </a:rPr>
+                          <m:t>𝑗</m:t>
+                        </m:r>
+                      </m:sub>
+                    </m:sSub>
+                  </m:oMath>
+                </a14:m>
+                <a:r>
+                  <a:rPr lang="en-US" dirty="0"/>
+                  <a:t> only overlap on the elements in </a:t>
+                </a:r>
+                <a:r>
+                  <a:rPr lang="en-US" dirty="0">
+                    <a:solidFill>
+                      <a:schemeClr val="accent5"/>
+                    </a:solidFill>
+                  </a:rPr>
+                  <a:t>purple</a:t>
+                </a:r>
+              </a:p>
+            </p:txBody>
+          </p:sp>
+        </mc:Choice>
+        <mc:Fallback>
+          <p:sp>
+            <p:nvSpPr>
+              <p:cNvPr id="31" name="TextBox 30">
+                <a:extLst>
+                  <a:ext uri="{FF2B5EF4-FFF2-40B4-BE49-F238E27FC236}">
+                    <a16:creationId xmlns:a16="http://schemas.microsoft.com/office/drawing/2014/main" id="{E096575C-55D4-725A-CC6A-5A67100E9658}"/>
+                  </a:ext>
+                </a:extLst>
+              </p:cNvPr>
+              <p:cNvSpPr txBox="1">
+                <a:spLocks noRot="1" noChangeAspect="1" noMove="1" noResize="1" noEditPoints="1" noAdjustHandles="1" noChangeArrowheads="1" noChangeShapeType="1" noTextEdit="1"/>
+              </p:cNvSpPr>
+              <p:nvPr/>
+            </p:nvSpPr>
+            <p:spPr>
+              <a:xfrm>
+                <a:off x="3511550" y="743719"/>
+                <a:ext cx="3117849" cy="576312"/>
+              </a:xfrm>
+              <a:prstGeom prst="rect">
+                <a:avLst/>
+              </a:prstGeom>
+              <a:blipFill>
+                <a:blip r:embed="rId4"/>
+                <a:stretch>
+                  <a:fillRect l="-4501" t="-11579" b="-24211"/>
+                </a:stretch>
+              </a:blipFill>
+            </p:spPr>
+            <p:txBody>
+              <a:bodyPr/>
+              <a:lstStyle/>
+              <a:p>
+                <a:r>
+                  <a:rPr lang="en-US">
+                    <a:noFill/>
+                  </a:rPr>
+                  <a:t> </a:t>
+                </a:r>
+              </a:p>
+            </p:txBody>
+          </p:sp>
+        </mc:Fallback>
+      </mc:AlternateContent>
+      <mc:AlternateContent xmlns:mc="http://schemas.openxmlformats.org/markup-compatibility/2006">
+        <mc:Choice xmlns:a14="http://schemas.microsoft.com/office/drawing/2010/main" Requires="a14">
+          <p:sp>
+            <p:nvSpPr>
+              <p:cNvPr id="35" name="TextBox 34">
+                <a:extLst>
+                  <a:ext uri="{FF2B5EF4-FFF2-40B4-BE49-F238E27FC236}">
+                    <a16:creationId xmlns:a16="http://schemas.microsoft.com/office/drawing/2014/main" id="{10DA0B22-EB77-0B5E-B7E9-DF41D1FB1FFE}"/>
+                  </a:ext>
+                </a:extLst>
+              </p:cNvPr>
+              <p:cNvSpPr txBox="1"/>
+              <p:nvPr/>
+            </p:nvSpPr>
+            <p:spPr>
+              <a:xfrm>
+                <a:off x="1225550" y="2216150"/>
+                <a:ext cx="4030591" cy="530402"/>
+              </a:xfrm>
+              <a:prstGeom prst="rect">
+                <a:avLst/>
+              </a:prstGeom>
+              <a:noFill/>
+            </p:spPr>
+            <p:txBody>
+              <a:bodyPr wrap="none" lIns="0" tIns="0" rIns="0" bIns="0" rtlCol="0">
+                <a:spAutoFit/>
+              </a:bodyPr>
+              <a:lstStyle/>
+              <a:p>
+                <a14:m>
+                  <m:oMathPara xmlns:m="http://schemas.openxmlformats.org/officeDocument/2006/math">
+                    <m:oMathParaPr>
+                      <m:jc m:val="centerGroup"/>
+                    </m:oMathParaPr>
+                    <m:oMath xmlns:m="http://schemas.openxmlformats.org/officeDocument/2006/math">
+                      <m:sSubSup>
+                        <m:sSubSupPr>
+                          <m:ctrlPr>
+                            <a:rPr lang="en-US" b="0" i="1" smtClean="0">
+                              <a:latin typeface="Cambria Math" panose="02040503050406030204" pitchFamily="18" charset="0"/>
+                            </a:rPr>
+                          </m:ctrlPr>
+                        </m:sSubSupPr>
+                        <m:e>
+                          <m:r>
+                            <a:rPr lang="en-US" b="0" i="1" smtClean="0">
+                              <a:latin typeface="Cambria Math" panose="02040503050406030204" pitchFamily="18" charset="0"/>
+                            </a:rPr>
+                            <m:t>𝑁</m:t>
+                          </m:r>
+                        </m:e>
+                        <m:sub>
+                          <m:r>
+                            <a:rPr lang="en-US" b="0" i="1" smtClean="0">
+                              <a:latin typeface="Cambria Math" panose="02040503050406030204" pitchFamily="18" charset="0"/>
+                            </a:rPr>
+                            <m:t>𝑙</m:t>
+                          </m:r>
+                        </m:sub>
+                        <m:sup>
+                          <m:d>
+                            <m:dPr>
+                              <m:ctrlPr>
+                                <a:rPr lang="en-US" b="0" i="1" smtClean="0">
+                                  <a:latin typeface="Cambria Math" panose="02040503050406030204" pitchFamily="18" charset="0"/>
+                                </a:rPr>
+                              </m:ctrlPr>
+                            </m:dPr>
+                            <m:e>
+                              <m:r>
+                                <a:rPr lang="en-US" b="0" i="1" smtClean="0">
+                                  <a:latin typeface="Cambria Math" panose="02040503050406030204" pitchFamily="18" charset="0"/>
+                                </a:rPr>
+                                <m:t>𝑒</m:t>
+                              </m:r>
+                            </m:e>
+                          </m:d>
+                        </m:sup>
+                      </m:sSubSup>
+                      <m:d>
+                        <m:dPr>
+                          <m:ctrlPr>
+                            <a:rPr lang="en-US" b="0" i="1" smtClean="0">
+                              <a:latin typeface="Cambria Math" panose="02040503050406030204" pitchFamily="18" charset="0"/>
+                            </a:rPr>
+                          </m:ctrlPr>
+                        </m:dPr>
+                        <m:e>
+                          <m:r>
+                            <a:rPr lang="en-US" b="0" i="1" smtClean="0">
+                              <a:latin typeface="Cambria Math" panose="02040503050406030204" pitchFamily="18" charset="0"/>
+                            </a:rPr>
+                            <m:t>𝑥</m:t>
+                          </m:r>
+                          <m:r>
+                            <a:rPr lang="en-US" b="0" i="1" smtClean="0">
+                              <a:latin typeface="Cambria Math" panose="02040503050406030204" pitchFamily="18" charset="0"/>
+                            </a:rPr>
+                            <m:t>,</m:t>
+                          </m:r>
+                          <m:r>
+                            <a:rPr lang="en-US" b="0" i="1" smtClean="0">
+                              <a:latin typeface="Cambria Math" panose="02040503050406030204" pitchFamily="18" charset="0"/>
+                            </a:rPr>
+                            <m:t>𝑦</m:t>
+                          </m:r>
+                        </m:e>
+                      </m:d>
+                      <m:r>
+                        <a:rPr lang="en-US" b="0" i="1" smtClean="0">
+                          <a:latin typeface="Cambria Math" panose="02040503050406030204" pitchFamily="18" charset="0"/>
+                        </a:rPr>
+                        <m:t>=</m:t>
+                      </m:r>
+                      <m:f>
+                        <m:fPr>
+                          <m:ctrlPr>
+                            <a:rPr lang="en-US" b="0" i="1" smtClean="0">
+                              <a:latin typeface="Cambria Math" panose="02040503050406030204" pitchFamily="18" charset="0"/>
+                            </a:rPr>
+                          </m:ctrlPr>
+                        </m:fPr>
+                        <m:num>
+                          <m:r>
+                            <a:rPr lang="en-US" b="0" i="1" smtClean="0">
+                              <a:latin typeface="Cambria Math" panose="02040503050406030204" pitchFamily="18" charset="0"/>
+                            </a:rPr>
+                            <m:t>1</m:t>
+                          </m:r>
+                        </m:num>
+                        <m:den>
+                          <m:r>
+                            <a:rPr lang="en-US" b="0" i="1" smtClean="0">
+                              <a:latin typeface="Cambria Math" panose="02040503050406030204" pitchFamily="18" charset="0"/>
+                            </a:rPr>
+                            <m:t>2</m:t>
+                          </m:r>
+                          <m:sSup>
+                            <m:sSupPr>
+                              <m:ctrlPr>
+                                <a:rPr lang="en-US" b="0" i="1" smtClean="0">
+                                  <a:latin typeface="Cambria Math" panose="02040503050406030204" pitchFamily="18" charset="0"/>
+                                </a:rPr>
+                              </m:ctrlPr>
+                            </m:sSupPr>
+                            <m:e>
+                              <m:r>
+                                <m:rPr>
+                                  <m:sty m:val="p"/>
+                                </m:rPr>
+                                <a:rPr lang="en-US" b="0" i="0" smtClean="0">
+                                  <a:latin typeface="Cambria Math" panose="02040503050406030204" pitchFamily="18" charset="0"/>
+                                </a:rPr>
+                                <m:t>Δ</m:t>
+                              </m:r>
+                            </m:e>
+                            <m:sup>
+                              <m:d>
+                                <m:dPr>
+                                  <m:ctrlPr>
+                                    <a:rPr lang="en-US" b="0" i="1" smtClean="0">
+                                      <a:latin typeface="Cambria Math" panose="02040503050406030204" pitchFamily="18" charset="0"/>
+                                    </a:rPr>
+                                  </m:ctrlPr>
+                                </m:dPr>
+                                <m:e>
+                                  <m:r>
+                                    <a:rPr lang="en-US" b="0" i="1" smtClean="0">
+                                      <a:latin typeface="Cambria Math" panose="02040503050406030204" pitchFamily="18" charset="0"/>
+                                    </a:rPr>
+                                    <m:t>𝑒</m:t>
+                                  </m:r>
+                                </m:e>
+                              </m:d>
+                            </m:sup>
+                          </m:sSup>
+                        </m:den>
+                      </m:f>
+                      <m:d>
+                        <m:dPr>
+                          <m:ctrlPr>
+                            <a:rPr lang="en-US" b="0" i="1" smtClean="0">
+                              <a:latin typeface="Cambria Math" panose="02040503050406030204" pitchFamily="18" charset="0"/>
+                            </a:rPr>
+                          </m:ctrlPr>
+                        </m:dPr>
+                        <m:e>
+                          <m:sSubSup>
+                            <m:sSubSupPr>
+                              <m:ctrlPr>
+                                <a:rPr lang="en-US" b="0" i="1" smtClean="0">
+                                  <a:latin typeface="Cambria Math" panose="02040503050406030204" pitchFamily="18" charset="0"/>
+                                </a:rPr>
+                              </m:ctrlPr>
+                            </m:sSubSupPr>
+                            <m:e>
+                              <m:r>
+                                <a:rPr lang="en-US" b="0" i="1" smtClean="0">
+                                  <a:latin typeface="Cambria Math" panose="02040503050406030204" pitchFamily="18" charset="0"/>
+                                </a:rPr>
+                                <m:t>𝑎</m:t>
+                              </m:r>
+                            </m:e>
+                            <m:sub>
+                              <m:r>
+                                <a:rPr lang="en-US" b="0" i="1" smtClean="0">
+                                  <a:latin typeface="Cambria Math" panose="02040503050406030204" pitchFamily="18" charset="0"/>
+                                </a:rPr>
+                                <m:t>𝑙</m:t>
+                              </m:r>
+                            </m:sub>
+                            <m:sup>
+                              <m:d>
+                                <m:dPr>
+                                  <m:ctrlPr>
+                                    <a:rPr lang="en-US" b="0" i="1" smtClean="0">
+                                      <a:latin typeface="Cambria Math" panose="02040503050406030204" pitchFamily="18" charset="0"/>
+                                    </a:rPr>
+                                  </m:ctrlPr>
+                                </m:dPr>
+                                <m:e>
+                                  <m:r>
+                                    <a:rPr lang="en-US" b="0" i="1" smtClean="0">
+                                      <a:latin typeface="Cambria Math" panose="02040503050406030204" pitchFamily="18" charset="0"/>
+                                    </a:rPr>
+                                    <m:t>𝑒</m:t>
+                                  </m:r>
+                                </m:e>
+                              </m:d>
+                            </m:sup>
+                          </m:sSubSup>
+                          <m:r>
+                            <a:rPr lang="en-US" b="0" i="1" smtClean="0">
+                              <a:latin typeface="Cambria Math" panose="02040503050406030204" pitchFamily="18" charset="0"/>
+                            </a:rPr>
+                            <m:t>+</m:t>
+                          </m:r>
+                          <m:sSubSup>
+                            <m:sSubSupPr>
+                              <m:ctrlPr>
+                                <a:rPr lang="en-US" b="0" i="1" smtClean="0">
+                                  <a:latin typeface="Cambria Math" panose="02040503050406030204" pitchFamily="18" charset="0"/>
+                                </a:rPr>
+                              </m:ctrlPr>
+                            </m:sSubSupPr>
+                            <m:e>
+                              <m:r>
+                                <a:rPr lang="en-US" b="0" i="1" smtClean="0">
+                                  <a:latin typeface="Cambria Math" panose="02040503050406030204" pitchFamily="18" charset="0"/>
+                                </a:rPr>
+                                <m:t>𝑏</m:t>
+                              </m:r>
+                            </m:e>
+                            <m:sub>
+                              <m:r>
+                                <a:rPr lang="en-US" b="0" i="1" smtClean="0">
+                                  <a:latin typeface="Cambria Math" panose="02040503050406030204" pitchFamily="18" charset="0"/>
+                                </a:rPr>
+                                <m:t>𝑙</m:t>
+                              </m:r>
+                            </m:sub>
+                            <m:sup>
+                              <m:d>
+                                <m:dPr>
+                                  <m:ctrlPr>
+                                    <a:rPr lang="en-US" b="0" i="1" smtClean="0">
+                                      <a:latin typeface="Cambria Math" panose="02040503050406030204" pitchFamily="18" charset="0"/>
+                                    </a:rPr>
+                                  </m:ctrlPr>
+                                </m:dPr>
+                                <m:e>
+                                  <m:r>
+                                    <a:rPr lang="en-US" b="0" i="1" smtClean="0">
+                                      <a:latin typeface="Cambria Math" panose="02040503050406030204" pitchFamily="18" charset="0"/>
+                                    </a:rPr>
+                                    <m:t>𝑒</m:t>
+                                  </m:r>
+                                </m:e>
+                              </m:d>
+                            </m:sup>
+                          </m:sSubSup>
+                          <m:r>
+                            <a:rPr lang="en-US" b="0" i="1" smtClean="0">
+                              <a:latin typeface="Cambria Math" panose="02040503050406030204" pitchFamily="18" charset="0"/>
+                            </a:rPr>
+                            <m:t>𝑥</m:t>
+                          </m:r>
+                          <m:r>
+                            <a:rPr lang="en-US" b="0" i="1" smtClean="0">
+                              <a:latin typeface="Cambria Math" panose="02040503050406030204" pitchFamily="18" charset="0"/>
+                            </a:rPr>
+                            <m:t>+</m:t>
+                          </m:r>
+                          <m:sSubSup>
+                            <m:sSubSupPr>
+                              <m:ctrlPr>
+                                <a:rPr lang="en-US" b="0" i="1" smtClean="0">
+                                  <a:latin typeface="Cambria Math" panose="02040503050406030204" pitchFamily="18" charset="0"/>
+                                </a:rPr>
+                              </m:ctrlPr>
+                            </m:sSubSupPr>
+                            <m:e>
+                              <m:r>
+                                <a:rPr lang="en-US" b="0" i="1" smtClean="0">
+                                  <a:latin typeface="Cambria Math" panose="02040503050406030204" pitchFamily="18" charset="0"/>
+                                </a:rPr>
+                                <m:t>𝑐</m:t>
+                              </m:r>
+                            </m:e>
+                            <m:sub>
+                              <m:r>
+                                <a:rPr lang="en-US" b="0" i="1" smtClean="0">
+                                  <a:latin typeface="Cambria Math" panose="02040503050406030204" pitchFamily="18" charset="0"/>
+                                </a:rPr>
+                                <m:t>𝑙</m:t>
+                              </m:r>
+                            </m:sub>
+                            <m:sup>
+                              <m:d>
+                                <m:dPr>
+                                  <m:ctrlPr>
+                                    <a:rPr lang="en-US" b="0" i="1" smtClean="0">
+                                      <a:latin typeface="Cambria Math" panose="02040503050406030204" pitchFamily="18" charset="0"/>
+                                    </a:rPr>
+                                  </m:ctrlPr>
+                                </m:dPr>
+                                <m:e>
+                                  <m:r>
+                                    <a:rPr lang="en-US" b="0" i="1" smtClean="0">
+                                      <a:latin typeface="Cambria Math" panose="02040503050406030204" pitchFamily="18" charset="0"/>
+                                    </a:rPr>
+                                    <m:t>𝑒</m:t>
+                                  </m:r>
+                                </m:e>
+                              </m:d>
+                            </m:sup>
+                          </m:sSubSup>
+                          <m:r>
+                            <a:rPr lang="en-US" b="0" i="1" smtClean="0">
+                              <a:latin typeface="Cambria Math" panose="02040503050406030204" pitchFamily="18" charset="0"/>
+                            </a:rPr>
+                            <m:t>𝑦</m:t>
+                          </m:r>
+                        </m:e>
+                      </m:d>
+                    </m:oMath>
+                  </m:oMathPara>
+                </a14:m>
+                <a:endParaRPr lang="en-US" dirty="0"/>
+              </a:p>
+            </p:txBody>
+          </p:sp>
+        </mc:Choice>
+        <mc:Fallback>
+          <p:sp>
+            <p:nvSpPr>
+              <p:cNvPr id="35" name="TextBox 34">
+                <a:extLst>
+                  <a:ext uri="{FF2B5EF4-FFF2-40B4-BE49-F238E27FC236}">
+                    <a16:creationId xmlns:a16="http://schemas.microsoft.com/office/drawing/2014/main" id="{10DA0B22-EB77-0B5E-B7E9-DF41D1FB1FFE}"/>
+                  </a:ext>
+                </a:extLst>
+              </p:cNvPr>
+              <p:cNvSpPr txBox="1">
+                <a:spLocks noRot="1" noChangeAspect="1" noMove="1" noResize="1" noEditPoints="1" noAdjustHandles="1" noChangeArrowheads="1" noChangeShapeType="1" noTextEdit="1"/>
+              </p:cNvSpPr>
+              <p:nvPr/>
+            </p:nvSpPr>
+            <p:spPr>
+              <a:xfrm>
+                <a:off x="1225550" y="2216150"/>
+                <a:ext cx="4030591" cy="530402"/>
+              </a:xfrm>
+              <a:prstGeom prst="rect">
+                <a:avLst/>
+              </a:prstGeom>
+              <a:blipFill>
+                <a:blip r:embed="rId5"/>
+                <a:stretch>
+                  <a:fillRect/>
+                </a:stretch>
+              </a:blipFill>
+            </p:spPr>
+            <p:txBody>
+              <a:bodyPr/>
+              <a:lstStyle/>
+              <a:p>
+                <a:r>
+                  <a:rPr lang="en-US">
+                    <a:noFill/>
+                  </a:rPr>
+                  <a:t> </a:t>
+                </a:r>
+              </a:p>
+            </p:txBody>
+          </p:sp>
+        </mc:Fallback>
+      </mc:AlternateContent>
+      <p:pic>
+        <p:nvPicPr>
+          <p:cNvPr id="38" name="Picture 37">
+            <a:extLst>
+              <a:ext uri="{FF2B5EF4-FFF2-40B4-BE49-F238E27FC236}">
+                <a16:creationId xmlns:a16="http://schemas.microsoft.com/office/drawing/2014/main" id="{7274BF5E-A4C4-A48D-4304-84D8ACBEF886}"/>
+              </a:ext>
+            </a:extLst>
+          </p:cNvPr>
+          <p:cNvPicPr>
+            <a:picLocks noChangeAspect="1"/>
+          </p:cNvPicPr>
+          <p:nvPr/>
+        </p:nvPicPr>
+        <p:blipFill>
+          <a:blip r:embed="rId6"/>
+          <a:stretch>
+            <a:fillRect/>
+          </a:stretch>
+        </p:blipFill>
+        <p:spPr>
+          <a:xfrm>
+            <a:off x="6096000" y="2151186"/>
+            <a:ext cx="5454650" cy="1325632"/>
+          </a:xfrm>
+          <a:prstGeom prst="rect">
+            <a:avLst/>
+          </a:prstGeom>
+        </p:spPr>
+      </p:pic>
+      <p:pic>
+        <p:nvPicPr>
+          <p:cNvPr id="40" name="Picture 39">
+            <a:extLst>
+              <a:ext uri="{FF2B5EF4-FFF2-40B4-BE49-F238E27FC236}">
+                <a16:creationId xmlns:a16="http://schemas.microsoft.com/office/drawing/2014/main" id="{4543B3AA-7F0D-0420-B2BA-62A8A2A1F38C}"/>
+              </a:ext>
+            </a:extLst>
+          </p:cNvPr>
+          <p:cNvPicPr>
+            <a:picLocks noChangeAspect="1"/>
+          </p:cNvPicPr>
+          <p:nvPr/>
+        </p:nvPicPr>
+        <p:blipFill>
+          <a:blip r:embed="rId7"/>
+          <a:srcRect t="19041"/>
+          <a:stretch>
+            <a:fillRect/>
+          </a:stretch>
+        </p:blipFill>
+        <p:spPr>
+          <a:xfrm>
+            <a:off x="1720583" y="2901950"/>
+            <a:ext cx="2643732" cy="652800"/>
+          </a:xfrm>
+          <a:prstGeom prst="rect">
+            <a:avLst/>
+          </a:prstGeom>
+        </p:spPr>
+      </p:pic>
+      <p:cxnSp>
+        <p:nvCxnSpPr>
+          <p:cNvPr id="41" name="Straight Connector 40">
+            <a:extLst>
+              <a:ext uri="{FF2B5EF4-FFF2-40B4-BE49-F238E27FC236}">
+                <a16:creationId xmlns:a16="http://schemas.microsoft.com/office/drawing/2014/main" id="{874BE244-2975-EFE9-4253-2B41C57A9633}"/>
+              </a:ext>
+            </a:extLst>
+          </p:cNvPr>
+          <p:cNvCxnSpPr>
+            <a:cxnSpLocks/>
+            <a:stCxn id="42" idx="3"/>
+            <a:endCxn id="43" idx="7"/>
+          </p:cNvCxnSpPr>
+          <p:nvPr/>
+        </p:nvCxnSpPr>
+        <p:spPr>
+          <a:xfrm flipH="1">
+            <a:off x="892688" y="4383193"/>
+            <a:ext cx="829993" cy="1303326"/>
+          </a:xfrm>
+          <a:prstGeom prst="line">
+            <a:avLst/>
+          </a:prstGeom>
+        </p:spPr>
+        <p:style>
+          <a:lnRef idx="2">
+            <a:schemeClr val="dk1"/>
+          </a:lnRef>
+          <a:fillRef idx="0">
+            <a:schemeClr val="dk1"/>
+          </a:fillRef>
+          <a:effectRef idx="1">
+            <a:schemeClr val="dk1"/>
+          </a:effectRef>
+          <a:fontRef idx="minor">
+            <a:schemeClr val="tx1"/>
+          </a:fontRef>
+        </p:style>
+      </p:cxnSp>
+      <p:sp>
+        <p:nvSpPr>
+          <p:cNvPr id="42" name="Oval 41">
+            <a:extLst>
+              <a:ext uri="{FF2B5EF4-FFF2-40B4-BE49-F238E27FC236}">
+                <a16:creationId xmlns:a16="http://schemas.microsoft.com/office/drawing/2014/main" id="{BECDFC40-09FE-7A8D-6FE0-B3060BCE39D1}"/>
+              </a:ext>
+            </a:extLst>
+          </p:cNvPr>
+          <p:cNvSpPr/>
+          <p:nvPr/>
+        </p:nvSpPr>
+        <p:spPr>
+          <a:xfrm>
+            <a:off x="1702222" y="4253111"/>
+            <a:ext cx="139700" cy="152400"/>
+          </a:xfrm>
+          <a:prstGeom prst="ellipse">
+            <a:avLst/>
+          </a:prstGeom>
+        </p:spPr>
+        <p:style>
+          <a:lnRef idx="2">
+            <a:schemeClr val="dk1">
+              <a:shade val="15000"/>
+            </a:schemeClr>
+          </a:lnRef>
+          <a:fillRef idx="1">
+            <a:schemeClr val="dk1"/>
+          </a:fillRef>
+          <a:effectRef idx="0">
+            <a:schemeClr val="dk1"/>
+          </a:effectRef>
+          <a:fontRef idx="minor">
+            <a:schemeClr val="lt1"/>
+          </a:fontRef>
+        </p:style>
+        <p:txBody>
+          <a:bodyPr rtlCol="0" anchor="ctr"/>
+          <a:lstStyle/>
+          <a:p>
+            <a:pPr algn="ctr"/>
+            <a:endParaRPr lang="en-US"/>
+          </a:p>
+        </p:txBody>
+      </p:sp>
+      <p:sp>
+        <p:nvSpPr>
+          <p:cNvPr id="43" name="Oval 42">
+            <a:extLst>
+              <a:ext uri="{FF2B5EF4-FFF2-40B4-BE49-F238E27FC236}">
+                <a16:creationId xmlns:a16="http://schemas.microsoft.com/office/drawing/2014/main" id="{DFECE8F6-E70F-FC7C-A9BE-9A0B7FA122D1}"/>
+              </a:ext>
+            </a:extLst>
+          </p:cNvPr>
+          <p:cNvSpPr/>
+          <p:nvPr/>
+        </p:nvSpPr>
+        <p:spPr>
+          <a:xfrm>
+            <a:off x="773447" y="5664201"/>
+            <a:ext cx="139700" cy="152400"/>
+          </a:xfrm>
+          <a:prstGeom prst="ellipse">
+            <a:avLst/>
+          </a:prstGeom>
+        </p:spPr>
+        <p:style>
+          <a:lnRef idx="2">
+            <a:schemeClr val="dk1">
+              <a:shade val="15000"/>
+            </a:schemeClr>
+          </a:lnRef>
+          <a:fillRef idx="1">
+            <a:schemeClr val="dk1"/>
+          </a:fillRef>
+          <a:effectRef idx="0">
+            <a:schemeClr val="dk1"/>
+          </a:effectRef>
+          <a:fontRef idx="minor">
+            <a:schemeClr val="lt1"/>
+          </a:fontRef>
+        </p:style>
+        <p:txBody>
+          <a:bodyPr rtlCol="0" anchor="ctr"/>
+          <a:lstStyle/>
+          <a:p>
+            <a:pPr algn="ctr"/>
+            <a:endParaRPr lang="en-US"/>
+          </a:p>
+        </p:txBody>
+      </p:sp>
+      <p:cxnSp>
+        <p:nvCxnSpPr>
+          <p:cNvPr id="44" name="Straight Connector 43">
+            <a:extLst>
+              <a:ext uri="{FF2B5EF4-FFF2-40B4-BE49-F238E27FC236}">
+                <a16:creationId xmlns:a16="http://schemas.microsoft.com/office/drawing/2014/main" id="{C63A4F76-0803-7C66-5ABC-53F38A6E2027}"/>
+              </a:ext>
+            </a:extLst>
+          </p:cNvPr>
+          <p:cNvCxnSpPr>
+            <a:cxnSpLocks/>
+            <a:stCxn id="42" idx="5"/>
+            <a:endCxn id="46" idx="1"/>
+          </p:cNvCxnSpPr>
+          <p:nvPr/>
+        </p:nvCxnSpPr>
+        <p:spPr>
+          <a:xfrm>
+            <a:off x="1821463" y="4383193"/>
+            <a:ext cx="834402" cy="1309675"/>
+          </a:xfrm>
+          <a:prstGeom prst="line">
+            <a:avLst/>
+          </a:prstGeom>
+        </p:spPr>
+        <p:style>
+          <a:lnRef idx="2">
+            <a:schemeClr val="dk1"/>
+          </a:lnRef>
+          <a:fillRef idx="0">
+            <a:schemeClr val="dk1"/>
+          </a:fillRef>
+          <a:effectRef idx="1">
+            <a:schemeClr val="dk1"/>
+          </a:effectRef>
+          <a:fontRef idx="minor">
+            <a:schemeClr val="tx1"/>
+          </a:fontRef>
+        </p:style>
+      </p:cxnSp>
+      <p:cxnSp>
+        <p:nvCxnSpPr>
+          <p:cNvPr id="45" name="Straight Connector 44">
+            <a:extLst>
+              <a:ext uri="{FF2B5EF4-FFF2-40B4-BE49-F238E27FC236}">
+                <a16:creationId xmlns:a16="http://schemas.microsoft.com/office/drawing/2014/main" id="{069461D9-7823-FA2A-D5DF-7C3FCDFFCCDC}"/>
+              </a:ext>
+            </a:extLst>
+          </p:cNvPr>
+          <p:cNvCxnSpPr>
+            <a:cxnSpLocks/>
+            <a:stCxn id="46" idx="2"/>
+            <a:endCxn id="43" idx="6"/>
+          </p:cNvCxnSpPr>
+          <p:nvPr/>
+        </p:nvCxnSpPr>
+        <p:spPr>
+          <a:xfrm flipH="1" flipV="1">
+            <a:off x="913147" y="5740401"/>
+            <a:ext cx="1722259" cy="6349"/>
+          </a:xfrm>
+          <a:prstGeom prst="line">
+            <a:avLst/>
+          </a:prstGeom>
+        </p:spPr>
+        <p:style>
+          <a:lnRef idx="2">
+            <a:schemeClr val="dk1"/>
+          </a:lnRef>
+          <a:fillRef idx="0">
+            <a:schemeClr val="dk1"/>
+          </a:fillRef>
+          <a:effectRef idx="1">
+            <a:schemeClr val="dk1"/>
+          </a:effectRef>
+          <a:fontRef idx="minor">
+            <a:schemeClr val="tx1"/>
+          </a:fontRef>
+        </p:style>
+      </p:cxnSp>
+      <p:sp>
+        <p:nvSpPr>
+          <p:cNvPr id="46" name="Oval 45">
+            <a:extLst>
+              <a:ext uri="{FF2B5EF4-FFF2-40B4-BE49-F238E27FC236}">
+                <a16:creationId xmlns:a16="http://schemas.microsoft.com/office/drawing/2014/main" id="{453AD447-0103-6643-BA39-78A2828EA56E}"/>
+              </a:ext>
+            </a:extLst>
+          </p:cNvPr>
+          <p:cNvSpPr/>
+          <p:nvPr/>
+        </p:nvSpPr>
+        <p:spPr>
+          <a:xfrm>
+            <a:off x="2635406" y="5670550"/>
+            <a:ext cx="139700" cy="152400"/>
+          </a:xfrm>
+          <a:prstGeom prst="ellipse">
+            <a:avLst/>
+          </a:prstGeom>
+        </p:spPr>
+        <p:style>
+          <a:lnRef idx="2">
+            <a:schemeClr val="dk1">
+              <a:shade val="15000"/>
+            </a:schemeClr>
+          </a:lnRef>
+          <a:fillRef idx="1">
+            <a:schemeClr val="dk1"/>
+          </a:fillRef>
+          <a:effectRef idx="0">
+            <a:schemeClr val="dk1"/>
+          </a:effectRef>
+          <a:fontRef idx="minor">
+            <a:schemeClr val="lt1"/>
+          </a:fontRef>
+        </p:style>
+        <p:txBody>
+          <a:bodyPr rtlCol="0" anchor="ctr"/>
+          <a:lstStyle/>
+          <a:p>
+            <a:pPr algn="ctr"/>
+            <a:endParaRPr lang="en-US"/>
+          </a:p>
+        </p:txBody>
+      </p:sp>
+      <mc:AlternateContent xmlns:mc="http://schemas.openxmlformats.org/markup-compatibility/2006">
+        <mc:Choice xmlns:a14="http://schemas.microsoft.com/office/drawing/2010/main" Requires="a14">
+          <p:sp>
+            <p:nvSpPr>
+              <p:cNvPr id="47" name="TextBox 46">
+                <a:extLst>
+                  <a:ext uri="{FF2B5EF4-FFF2-40B4-BE49-F238E27FC236}">
+                    <a16:creationId xmlns:a16="http://schemas.microsoft.com/office/drawing/2014/main" id="{AE5A6E0D-2D20-BD11-7077-82513F62936F}"/>
+                  </a:ext>
+                </a:extLst>
+              </p:cNvPr>
+              <p:cNvSpPr txBox="1"/>
+              <p:nvPr/>
+            </p:nvSpPr>
+            <p:spPr>
+              <a:xfrm>
+                <a:off x="528870" y="5601900"/>
+                <a:ext cx="174727" cy="276999"/>
+              </a:xfrm>
+              <a:prstGeom prst="rect">
+                <a:avLst/>
+              </a:prstGeom>
+              <a:noFill/>
+            </p:spPr>
+            <p:txBody>
+              <a:bodyPr wrap="none" lIns="0" tIns="0" rIns="0" bIns="0" rtlCol="0">
+                <a:spAutoFit/>
+              </a:bodyPr>
+              <a:lstStyle/>
+              <a:p>
+                <a14:m>
+                  <m:oMathPara xmlns:m="http://schemas.openxmlformats.org/officeDocument/2006/math">
+                    <m:oMathParaPr>
+                      <m:jc m:val="centerGroup"/>
+                    </m:oMathParaPr>
+                    <m:oMath xmlns:m="http://schemas.openxmlformats.org/officeDocument/2006/math">
+                      <m:r>
+                        <a:rPr lang="en-US" b="0" i="1" smtClean="0">
+                          <a:latin typeface="Cambria Math" panose="02040503050406030204" pitchFamily="18" charset="0"/>
+                        </a:rPr>
+                        <m:t>1</m:t>
+                      </m:r>
+                    </m:oMath>
+                  </m:oMathPara>
+                </a14:m>
+                <a:endParaRPr lang="en-US" dirty="0"/>
+              </a:p>
+            </p:txBody>
+          </p:sp>
+        </mc:Choice>
+        <mc:Fallback>
+          <p:sp>
+            <p:nvSpPr>
+              <p:cNvPr id="47" name="TextBox 46">
+                <a:extLst>
+                  <a:ext uri="{FF2B5EF4-FFF2-40B4-BE49-F238E27FC236}">
+                    <a16:creationId xmlns:a16="http://schemas.microsoft.com/office/drawing/2014/main" id="{AE5A6E0D-2D20-BD11-7077-82513F62936F}"/>
+                  </a:ext>
+                </a:extLst>
+              </p:cNvPr>
+              <p:cNvSpPr txBox="1">
+                <a:spLocks noRot="1" noChangeAspect="1" noMove="1" noResize="1" noEditPoints="1" noAdjustHandles="1" noChangeArrowheads="1" noChangeShapeType="1" noTextEdit="1"/>
+              </p:cNvSpPr>
+              <p:nvPr/>
+            </p:nvSpPr>
+            <p:spPr>
+              <a:xfrm>
+                <a:off x="528870" y="5601900"/>
+                <a:ext cx="174727" cy="276999"/>
+              </a:xfrm>
+              <a:prstGeom prst="rect">
+                <a:avLst/>
+              </a:prstGeom>
+              <a:blipFill>
+                <a:blip r:embed="rId8"/>
+                <a:stretch>
+                  <a:fillRect l="-35714" r="-35714" b="-6667"/>
+                </a:stretch>
+              </a:blipFill>
+            </p:spPr>
+            <p:txBody>
+              <a:bodyPr/>
+              <a:lstStyle/>
+              <a:p>
+                <a:r>
+                  <a:rPr lang="en-US">
+                    <a:noFill/>
+                  </a:rPr>
+                  <a:t> </a:t>
+                </a:r>
+              </a:p>
+            </p:txBody>
+          </p:sp>
+        </mc:Fallback>
+      </mc:AlternateContent>
+      <mc:AlternateContent xmlns:mc="http://schemas.openxmlformats.org/markup-compatibility/2006">
+        <mc:Choice xmlns:a14="http://schemas.microsoft.com/office/drawing/2010/main" Requires="a14">
+          <p:sp>
+            <p:nvSpPr>
+              <p:cNvPr id="48" name="TextBox 47">
+                <a:extLst>
+                  <a:ext uri="{FF2B5EF4-FFF2-40B4-BE49-F238E27FC236}">
+                    <a16:creationId xmlns:a16="http://schemas.microsoft.com/office/drawing/2014/main" id="{96FAE68E-E973-E357-D168-A3BB3AB6D679}"/>
+                  </a:ext>
+                </a:extLst>
+              </p:cNvPr>
+              <p:cNvSpPr txBox="1"/>
+              <p:nvPr/>
+            </p:nvSpPr>
+            <p:spPr>
+              <a:xfrm>
+                <a:off x="2840270" y="5601901"/>
+                <a:ext cx="174727" cy="276999"/>
+              </a:xfrm>
+              <a:prstGeom prst="rect">
+                <a:avLst/>
+              </a:prstGeom>
+              <a:noFill/>
+            </p:spPr>
+            <p:txBody>
+              <a:bodyPr wrap="none" lIns="0" tIns="0" rIns="0" bIns="0" rtlCol="0">
+                <a:spAutoFit/>
+              </a:bodyPr>
+              <a:lstStyle/>
+              <a:p>
+                <a14:m>
+                  <m:oMathPara xmlns:m="http://schemas.openxmlformats.org/officeDocument/2006/math">
+                    <m:oMathParaPr>
+                      <m:jc m:val="centerGroup"/>
+                    </m:oMathParaPr>
+                    <m:oMath xmlns:m="http://schemas.openxmlformats.org/officeDocument/2006/math">
+                      <m:r>
+                        <a:rPr lang="en-US" b="0" i="1" smtClean="0">
+                          <a:latin typeface="Cambria Math" panose="02040503050406030204" pitchFamily="18" charset="0"/>
+                        </a:rPr>
+                        <m:t>2</m:t>
+                      </m:r>
+                    </m:oMath>
+                  </m:oMathPara>
+                </a14:m>
+                <a:endParaRPr lang="en-US" dirty="0"/>
+              </a:p>
+            </p:txBody>
+          </p:sp>
+        </mc:Choice>
+        <mc:Fallback>
+          <p:sp>
+            <p:nvSpPr>
+              <p:cNvPr id="48" name="TextBox 47">
+                <a:extLst>
+                  <a:ext uri="{FF2B5EF4-FFF2-40B4-BE49-F238E27FC236}">
+                    <a16:creationId xmlns:a16="http://schemas.microsoft.com/office/drawing/2014/main" id="{96FAE68E-E973-E357-D168-A3BB3AB6D679}"/>
+                  </a:ext>
+                </a:extLst>
+              </p:cNvPr>
+              <p:cNvSpPr txBox="1">
+                <a:spLocks noRot="1" noChangeAspect="1" noMove="1" noResize="1" noEditPoints="1" noAdjustHandles="1" noChangeArrowheads="1" noChangeShapeType="1" noTextEdit="1"/>
+              </p:cNvSpPr>
+              <p:nvPr/>
+            </p:nvSpPr>
+            <p:spPr>
+              <a:xfrm>
+                <a:off x="2840270" y="5601901"/>
+                <a:ext cx="174727" cy="276999"/>
+              </a:xfrm>
+              <a:prstGeom prst="rect">
+                <a:avLst/>
+              </a:prstGeom>
+              <a:blipFill>
+                <a:blip r:embed="rId9"/>
+                <a:stretch>
+                  <a:fillRect l="-34483" r="-31034" b="-6667"/>
+                </a:stretch>
+              </a:blipFill>
+            </p:spPr>
+            <p:txBody>
+              <a:bodyPr/>
+              <a:lstStyle/>
+              <a:p>
+                <a:r>
+                  <a:rPr lang="en-US">
+                    <a:noFill/>
+                  </a:rPr>
+                  <a:t> </a:t>
+                </a:r>
+              </a:p>
+            </p:txBody>
+          </p:sp>
+        </mc:Fallback>
+      </mc:AlternateContent>
+      <mc:AlternateContent xmlns:mc="http://schemas.openxmlformats.org/markup-compatibility/2006">
+        <mc:Choice xmlns:a14="http://schemas.microsoft.com/office/drawing/2010/main" Requires="a14">
+          <p:sp>
+            <p:nvSpPr>
+              <p:cNvPr id="49" name="TextBox 48">
+                <a:extLst>
+                  <a:ext uri="{FF2B5EF4-FFF2-40B4-BE49-F238E27FC236}">
+                    <a16:creationId xmlns:a16="http://schemas.microsoft.com/office/drawing/2014/main" id="{8AB9576B-4AA9-0E53-4E3A-542766C3EF95}"/>
+                  </a:ext>
+                </a:extLst>
+              </p:cNvPr>
+              <p:cNvSpPr txBox="1"/>
+              <p:nvPr/>
+            </p:nvSpPr>
+            <p:spPr>
+              <a:xfrm>
+                <a:off x="1684708" y="4014212"/>
+                <a:ext cx="174727" cy="276999"/>
+              </a:xfrm>
+              <a:prstGeom prst="rect">
+                <a:avLst/>
+              </a:prstGeom>
+              <a:noFill/>
+            </p:spPr>
+            <p:txBody>
+              <a:bodyPr wrap="none" lIns="0" tIns="0" rIns="0" bIns="0" rtlCol="0">
+                <a:spAutoFit/>
+              </a:bodyPr>
+              <a:lstStyle/>
+              <a:p>
+                <a14:m>
+                  <m:oMathPara xmlns:m="http://schemas.openxmlformats.org/officeDocument/2006/math">
+                    <m:oMathParaPr>
+                      <m:jc m:val="centerGroup"/>
+                    </m:oMathParaPr>
+                    <m:oMath xmlns:m="http://schemas.openxmlformats.org/officeDocument/2006/math">
+                      <m:r>
+                        <a:rPr lang="en-US" b="0" i="1" smtClean="0">
+                          <a:latin typeface="Cambria Math" panose="02040503050406030204" pitchFamily="18" charset="0"/>
+                        </a:rPr>
+                        <m:t>3</m:t>
+                      </m:r>
+                    </m:oMath>
+                  </m:oMathPara>
+                </a14:m>
+                <a:endParaRPr lang="en-US" dirty="0"/>
+              </a:p>
+            </p:txBody>
+          </p:sp>
+        </mc:Choice>
+        <mc:Fallback>
+          <p:sp>
+            <p:nvSpPr>
+              <p:cNvPr id="49" name="TextBox 48">
+                <a:extLst>
+                  <a:ext uri="{FF2B5EF4-FFF2-40B4-BE49-F238E27FC236}">
+                    <a16:creationId xmlns:a16="http://schemas.microsoft.com/office/drawing/2014/main" id="{8AB9576B-4AA9-0E53-4E3A-542766C3EF95}"/>
+                  </a:ext>
+                </a:extLst>
+              </p:cNvPr>
+              <p:cNvSpPr txBox="1">
+                <a:spLocks noRot="1" noChangeAspect="1" noMove="1" noResize="1" noEditPoints="1" noAdjustHandles="1" noChangeArrowheads="1" noChangeShapeType="1" noTextEdit="1"/>
+              </p:cNvSpPr>
+              <p:nvPr/>
+            </p:nvSpPr>
+            <p:spPr>
+              <a:xfrm>
+                <a:off x="1684708" y="4014212"/>
+                <a:ext cx="174727" cy="276999"/>
+              </a:xfrm>
+              <a:prstGeom prst="rect">
+                <a:avLst/>
+              </a:prstGeom>
+              <a:blipFill>
+                <a:blip r:embed="rId10"/>
+                <a:stretch>
+                  <a:fillRect l="-31034" r="-34483" b="-6522"/>
+                </a:stretch>
+              </a:blipFill>
+            </p:spPr>
+            <p:txBody>
+              <a:bodyPr/>
+              <a:lstStyle/>
+              <a:p>
+                <a:r>
+                  <a:rPr lang="en-US">
+                    <a:noFill/>
+                  </a:rPr>
+                  <a:t> </a:t>
+                </a:r>
+              </a:p>
+            </p:txBody>
+          </p:sp>
+        </mc:Fallback>
+      </mc:AlternateContent>
+      <mc:AlternateContent xmlns:mc="http://schemas.openxmlformats.org/markup-compatibility/2006">
+        <mc:Choice xmlns:a14="http://schemas.microsoft.com/office/drawing/2010/main" Requires="a14">
+          <p:sp>
+            <p:nvSpPr>
+              <p:cNvPr id="50" name="TextBox 49">
+                <a:extLst>
+                  <a:ext uri="{FF2B5EF4-FFF2-40B4-BE49-F238E27FC236}">
+                    <a16:creationId xmlns:a16="http://schemas.microsoft.com/office/drawing/2014/main" id="{96304C01-B56D-A716-03FA-863CE59C7351}"/>
+                  </a:ext>
+                </a:extLst>
+              </p:cNvPr>
+              <p:cNvSpPr txBox="1"/>
+              <p:nvPr/>
+            </p:nvSpPr>
+            <p:spPr>
+              <a:xfrm>
+                <a:off x="1676556" y="5143927"/>
+                <a:ext cx="165366" cy="276999"/>
+              </a:xfrm>
+              <a:prstGeom prst="rect">
+                <a:avLst/>
+              </a:prstGeom>
+              <a:noFill/>
+            </p:spPr>
+            <p:txBody>
+              <a:bodyPr wrap="none" lIns="0" tIns="0" rIns="0" bIns="0" rtlCol="0">
+                <a:spAutoFit/>
+              </a:bodyPr>
+              <a:lstStyle/>
+              <a:p>
+                <a14:m>
+                  <m:oMathPara xmlns:m="http://schemas.openxmlformats.org/officeDocument/2006/math">
+                    <m:oMathParaPr>
+                      <m:jc m:val="centerGroup"/>
+                    </m:oMathParaPr>
+                    <m:oMath xmlns:m="http://schemas.openxmlformats.org/officeDocument/2006/math">
+                      <m:r>
+                        <a:rPr lang="en-US" b="0" i="1" smtClean="0">
+                          <a:latin typeface="Cambria Math" panose="02040503050406030204" pitchFamily="18" charset="0"/>
+                        </a:rPr>
+                        <m:t>𝑒</m:t>
+                      </m:r>
+                    </m:oMath>
+                  </m:oMathPara>
+                </a14:m>
+                <a:endParaRPr lang="en-US" dirty="0"/>
+              </a:p>
+            </p:txBody>
+          </p:sp>
+        </mc:Choice>
+        <mc:Fallback>
+          <p:sp>
+            <p:nvSpPr>
+              <p:cNvPr id="50" name="TextBox 49">
+                <a:extLst>
+                  <a:ext uri="{FF2B5EF4-FFF2-40B4-BE49-F238E27FC236}">
+                    <a16:creationId xmlns:a16="http://schemas.microsoft.com/office/drawing/2014/main" id="{96304C01-B56D-A716-03FA-863CE59C7351}"/>
+                  </a:ext>
+                </a:extLst>
+              </p:cNvPr>
+              <p:cNvSpPr txBox="1">
+                <a:spLocks noRot="1" noChangeAspect="1" noMove="1" noResize="1" noEditPoints="1" noAdjustHandles="1" noChangeArrowheads="1" noChangeShapeType="1" noTextEdit="1"/>
+              </p:cNvSpPr>
+              <p:nvPr/>
+            </p:nvSpPr>
+            <p:spPr>
+              <a:xfrm>
+                <a:off x="1676556" y="5143927"/>
+                <a:ext cx="165366" cy="276999"/>
+              </a:xfrm>
+              <a:prstGeom prst="rect">
+                <a:avLst/>
+              </a:prstGeom>
+              <a:blipFill>
+                <a:blip r:embed="rId11"/>
+                <a:stretch>
+                  <a:fillRect l="-22222" r="-22222"/>
+                </a:stretch>
+              </a:blipFill>
+            </p:spPr>
+            <p:txBody>
+              <a:bodyPr/>
+              <a:lstStyle/>
+              <a:p>
+                <a:r>
+                  <a:rPr lang="en-US">
+                    <a:noFill/>
+                  </a:rPr>
+                  <a:t> </a:t>
+                </a:r>
+              </a:p>
+            </p:txBody>
+          </p:sp>
+        </mc:Fallback>
+      </mc:AlternateContent>
+      <p:sp>
+        <p:nvSpPr>
+          <p:cNvPr id="52" name="Isosceles Triangle 51">
+            <a:extLst>
+              <a:ext uri="{FF2B5EF4-FFF2-40B4-BE49-F238E27FC236}">
+                <a16:creationId xmlns:a16="http://schemas.microsoft.com/office/drawing/2014/main" id="{945CB9A7-A9AE-5C3B-AF64-D69D20E61C54}"/>
+              </a:ext>
+            </a:extLst>
+          </p:cNvPr>
+          <p:cNvSpPr/>
+          <p:nvPr/>
+        </p:nvSpPr>
+        <p:spPr>
+          <a:xfrm>
+            <a:off x="864853" y="4329311"/>
+            <a:ext cx="1838994" cy="1400591"/>
+          </a:xfrm>
+          <a:prstGeom prst="triangle">
+            <a:avLst/>
+          </a:prstGeom>
+          <a:solidFill>
+            <a:srgbClr val="7030A0">
+              <a:alpha val="49804"/>
+            </a:srgbClr>
+          </a:solidFill>
+        </p:spPr>
+        <p:style>
+          <a:lnRef idx="2">
+            <a:schemeClr val="accent1">
+              <a:shade val="15000"/>
+            </a:schemeClr>
+          </a:lnRef>
+          <a:fillRef idx="1">
+            <a:schemeClr val="accent1"/>
+          </a:fillRef>
+          <a:effectRef idx="0">
+            <a:schemeClr val="accent1"/>
+          </a:effectRef>
+          <a:fontRef idx="minor">
+            <a:schemeClr val="lt1"/>
+          </a:fontRef>
+        </p:style>
+        <p:txBody>
+          <a:bodyPr rtlCol="0" anchor="ctr"/>
+          <a:lstStyle/>
+          <a:p>
+            <a:pPr algn="ctr"/>
+            <a:endParaRPr lang="en-US"/>
+          </a:p>
+        </p:txBody>
+      </p:sp>
+      <p:cxnSp>
+        <p:nvCxnSpPr>
+          <p:cNvPr id="56" name="Straight Arrow Connector 55">
+            <a:extLst>
+              <a:ext uri="{FF2B5EF4-FFF2-40B4-BE49-F238E27FC236}">
+                <a16:creationId xmlns:a16="http://schemas.microsoft.com/office/drawing/2014/main" id="{01293DCC-C48C-6240-9CF3-E99CD73A939A}"/>
+              </a:ext>
+            </a:extLst>
+          </p:cNvPr>
+          <p:cNvCxnSpPr/>
+          <p:nvPr/>
+        </p:nvCxnSpPr>
+        <p:spPr>
+          <a:xfrm>
+            <a:off x="990600" y="3867150"/>
+            <a:ext cx="666216" cy="424061"/>
+          </a:xfrm>
+          <a:prstGeom prst="straightConnector1">
+            <a:avLst/>
+          </a:prstGeom>
+          <a:ln>
+            <a:tailEnd type="triangle"/>
+          </a:ln>
+        </p:spPr>
+        <p:style>
+          <a:lnRef idx="2">
+            <a:schemeClr val="dk1"/>
+          </a:lnRef>
+          <a:fillRef idx="0">
+            <a:schemeClr val="dk1"/>
+          </a:fillRef>
+          <a:effectRef idx="1">
+            <a:schemeClr val="dk1"/>
+          </a:effectRef>
+          <a:fontRef idx="minor">
+            <a:schemeClr val="tx1"/>
+          </a:fontRef>
+        </p:style>
+      </p:cxnSp>
+      <p:sp>
+        <p:nvSpPr>
+          <p:cNvPr id="57" name="TextBox 56">
+            <a:extLst>
+              <a:ext uri="{FF2B5EF4-FFF2-40B4-BE49-F238E27FC236}">
+                <a16:creationId xmlns:a16="http://schemas.microsoft.com/office/drawing/2014/main" id="{75C0ED17-325B-9A56-E14E-ACDE0AFA9F71}"/>
+              </a:ext>
+            </a:extLst>
+          </p:cNvPr>
+          <p:cNvSpPr txBox="1"/>
+          <p:nvPr/>
+        </p:nvSpPr>
+        <p:spPr>
+          <a:xfrm>
+            <a:off x="312786" y="3546768"/>
+            <a:ext cx="1355628" cy="276999"/>
+          </a:xfrm>
+          <a:prstGeom prst="rect">
+            <a:avLst/>
+          </a:prstGeom>
+          <a:noFill/>
+        </p:spPr>
+        <p:txBody>
+          <a:bodyPr wrap="none" lIns="0" tIns="0" rIns="0" bIns="0" rtlCol="0">
+            <a:spAutoFit/>
+          </a:bodyPr>
+          <a:lstStyle/>
+          <a:p>
+            <a:r>
+              <a:rPr lang="en-US" dirty="0"/>
+              <a:t>Pseudo-index</a:t>
+            </a:r>
+          </a:p>
+        </p:txBody>
+      </p:sp>
+      <mc:AlternateContent xmlns:mc="http://schemas.openxmlformats.org/markup-compatibility/2006">
+        <mc:Choice xmlns:a14="http://schemas.microsoft.com/office/drawing/2010/main" Requires="a14">
+          <p:sp>
+            <p:nvSpPr>
+              <p:cNvPr id="58" name="TextBox 57">
+                <a:extLst>
+                  <a:ext uri="{FF2B5EF4-FFF2-40B4-BE49-F238E27FC236}">
+                    <a16:creationId xmlns:a16="http://schemas.microsoft.com/office/drawing/2014/main" id="{0A0558F3-C770-A3D0-4901-736C40EA15CE}"/>
+                  </a:ext>
+                </a:extLst>
+              </p:cNvPr>
+              <p:cNvSpPr txBox="1"/>
+              <p:nvPr/>
+            </p:nvSpPr>
+            <p:spPr>
+              <a:xfrm>
+                <a:off x="4633841" y="4073718"/>
+                <a:ext cx="4344779" cy="530402"/>
+              </a:xfrm>
+              <a:prstGeom prst="rect">
+                <a:avLst/>
+              </a:prstGeom>
+              <a:noFill/>
+            </p:spPr>
+            <p:txBody>
+              <a:bodyPr wrap="none" lIns="0" tIns="0" rIns="0" bIns="0" rtlCol="0">
+                <a:spAutoFit/>
+              </a:bodyPr>
+              <a:lstStyle/>
+              <a:p>
+                <a14:m>
+                  <m:oMathPara xmlns:m="http://schemas.openxmlformats.org/officeDocument/2006/math">
+                    <m:oMathParaPr>
+                      <m:jc m:val="centerGroup"/>
+                    </m:oMathParaPr>
+                    <m:oMath xmlns:m="http://schemas.openxmlformats.org/officeDocument/2006/math">
+                      <m:r>
+                        <m:rPr>
+                          <m:sty m:val="p"/>
+                        </m:rPr>
+                        <a:rPr lang="en-US" b="0" i="0" smtClean="0">
+                          <a:latin typeface="Cambria Math" panose="02040503050406030204" pitchFamily="18" charset="0"/>
+                        </a:rPr>
+                        <m:t>∇</m:t>
+                      </m:r>
+                      <m:sSubSup>
+                        <m:sSubSupPr>
+                          <m:ctrlPr>
+                            <a:rPr lang="en-US" b="0" i="1" smtClean="0">
+                              <a:latin typeface="Cambria Math" panose="02040503050406030204" pitchFamily="18" charset="0"/>
+                            </a:rPr>
+                          </m:ctrlPr>
+                        </m:sSubSupPr>
+                        <m:e>
+                          <m:r>
+                            <a:rPr lang="en-US" b="0" i="1" smtClean="0">
+                              <a:latin typeface="Cambria Math" panose="02040503050406030204" pitchFamily="18" charset="0"/>
+                            </a:rPr>
+                            <m:t>𝑁</m:t>
+                          </m:r>
+                        </m:e>
+                        <m:sub>
+                          <m:r>
+                            <a:rPr lang="en-US" b="0" i="1" smtClean="0">
+                              <a:latin typeface="Cambria Math" panose="02040503050406030204" pitchFamily="18" charset="0"/>
+                            </a:rPr>
+                            <m:t>𝑙</m:t>
+                          </m:r>
+                        </m:sub>
+                        <m:sup>
+                          <m:d>
+                            <m:dPr>
+                              <m:ctrlPr>
+                                <a:rPr lang="en-US" b="0" i="1" smtClean="0">
+                                  <a:latin typeface="Cambria Math" panose="02040503050406030204" pitchFamily="18" charset="0"/>
+                                </a:rPr>
+                              </m:ctrlPr>
+                            </m:dPr>
+                            <m:e>
+                              <m:r>
+                                <a:rPr lang="en-US" b="0" i="1" smtClean="0">
+                                  <a:latin typeface="Cambria Math" panose="02040503050406030204" pitchFamily="18" charset="0"/>
+                                </a:rPr>
+                                <m:t>𝑒</m:t>
+                              </m:r>
+                            </m:e>
+                          </m:d>
+                        </m:sup>
+                      </m:sSubSup>
+                      <m:d>
+                        <m:dPr>
+                          <m:ctrlPr>
+                            <a:rPr lang="en-US" b="0" i="1" smtClean="0">
+                              <a:latin typeface="Cambria Math" panose="02040503050406030204" pitchFamily="18" charset="0"/>
+                            </a:rPr>
+                          </m:ctrlPr>
+                        </m:dPr>
+                        <m:e>
+                          <m:r>
+                            <a:rPr lang="en-US" b="0" i="1" smtClean="0">
+                              <a:latin typeface="Cambria Math" panose="02040503050406030204" pitchFamily="18" charset="0"/>
+                            </a:rPr>
+                            <m:t>𝑥</m:t>
+                          </m:r>
+                          <m:r>
+                            <a:rPr lang="en-US" b="0" i="1" smtClean="0">
+                              <a:latin typeface="Cambria Math" panose="02040503050406030204" pitchFamily="18" charset="0"/>
+                            </a:rPr>
+                            <m:t>,</m:t>
+                          </m:r>
+                          <m:r>
+                            <a:rPr lang="en-US" b="0" i="1" smtClean="0">
+                              <a:latin typeface="Cambria Math" panose="02040503050406030204" pitchFamily="18" charset="0"/>
+                            </a:rPr>
+                            <m:t>𝑦</m:t>
+                          </m:r>
+                        </m:e>
+                      </m:d>
+                      <m:r>
+                        <a:rPr lang="en-US" b="0" i="1" smtClean="0">
+                          <a:latin typeface="Cambria Math" panose="02040503050406030204" pitchFamily="18" charset="0"/>
+                        </a:rPr>
+                        <m:t>=</m:t>
+                      </m:r>
+                      <m:f>
+                        <m:fPr>
+                          <m:ctrlPr>
+                            <a:rPr lang="en-US" i="1">
+                              <a:latin typeface="Cambria Math" panose="02040503050406030204" pitchFamily="18" charset="0"/>
+                            </a:rPr>
+                          </m:ctrlPr>
+                        </m:fPr>
+                        <m:num>
+                          <m:r>
+                            <a:rPr lang="en-US" i="1">
+                              <a:latin typeface="Cambria Math" panose="02040503050406030204" pitchFamily="18" charset="0"/>
+                            </a:rPr>
+                            <m:t>1</m:t>
+                          </m:r>
+                        </m:num>
+                        <m:den>
+                          <m:r>
+                            <a:rPr lang="en-US" i="1">
+                              <a:latin typeface="Cambria Math" panose="02040503050406030204" pitchFamily="18" charset="0"/>
+                            </a:rPr>
+                            <m:t>2</m:t>
+                          </m:r>
+                          <m:sSup>
+                            <m:sSupPr>
+                              <m:ctrlPr>
+                                <a:rPr lang="en-US" i="1">
+                                  <a:latin typeface="Cambria Math" panose="02040503050406030204" pitchFamily="18" charset="0"/>
+                                </a:rPr>
+                              </m:ctrlPr>
+                            </m:sSupPr>
+                            <m:e>
+                              <m:r>
+                                <m:rPr>
+                                  <m:sty m:val="p"/>
+                                </m:rPr>
+                                <a:rPr lang="en-US">
+                                  <a:latin typeface="Cambria Math" panose="02040503050406030204" pitchFamily="18" charset="0"/>
+                                </a:rPr>
+                                <m:t>Δ</m:t>
+                              </m:r>
+                            </m:e>
+                            <m:sup>
+                              <m:d>
+                                <m:dPr>
+                                  <m:ctrlPr>
+                                    <a:rPr lang="en-US" i="1">
+                                      <a:latin typeface="Cambria Math" panose="02040503050406030204" pitchFamily="18" charset="0"/>
+                                    </a:rPr>
+                                  </m:ctrlPr>
+                                </m:dPr>
+                                <m:e>
+                                  <m:r>
+                                    <a:rPr lang="en-US" i="1">
+                                      <a:latin typeface="Cambria Math" panose="02040503050406030204" pitchFamily="18" charset="0"/>
+                                    </a:rPr>
+                                    <m:t>𝑒</m:t>
+                                  </m:r>
+                                </m:e>
+                              </m:d>
+                            </m:sup>
+                          </m:sSup>
+                        </m:den>
+                      </m:f>
+                      <m:r>
+                        <m:rPr>
+                          <m:sty m:val="p"/>
+                        </m:rPr>
+                        <a:rPr lang="en-US" b="0" i="0" smtClean="0">
+                          <a:latin typeface="Cambria Math" panose="02040503050406030204" pitchFamily="18" charset="0"/>
+                        </a:rPr>
+                        <m:t>∇</m:t>
+                      </m:r>
+                      <m:d>
+                        <m:dPr>
+                          <m:ctrlPr>
+                            <a:rPr lang="en-US" i="1">
+                              <a:latin typeface="Cambria Math" panose="02040503050406030204" pitchFamily="18" charset="0"/>
+                            </a:rPr>
+                          </m:ctrlPr>
+                        </m:dPr>
+                        <m:e>
+                          <m:sSubSup>
+                            <m:sSubSupPr>
+                              <m:ctrlPr>
+                                <a:rPr lang="en-US" i="1">
+                                  <a:latin typeface="Cambria Math" panose="02040503050406030204" pitchFamily="18" charset="0"/>
+                                </a:rPr>
+                              </m:ctrlPr>
+                            </m:sSubSupPr>
+                            <m:e>
+                              <m:r>
+                                <a:rPr lang="en-US" i="1">
+                                  <a:latin typeface="Cambria Math" panose="02040503050406030204" pitchFamily="18" charset="0"/>
+                                </a:rPr>
+                                <m:t>𝑎</m:t>
+                              </m:r>
+                            </m:e>
+                            <m:sub>
+                              <m:r>
+                                <a:rPr lang="en-US" i="1">
+                                  <a:latin typeface="Cambria Math" panose="02040503050406030204" pitchFamily="18" charset="0"/>
+                                </a:rPr>
+                                <m:t>𝑙</m:t>
+                              </m:r>
+                            </m:sub>
+                            <m:sup>
+                              <m:d>
+                                <m:dPr>
+                                  <m:ctrlPr>
+                                    <a:rPr lang="en-US" i="1">
+                                      <a:latin typeface="Cambria Math" panose="02040503050406030204" pitchFamily="18" charset="0"/>
+                                    </a:rPr>
+                                  </m:ctrlPr>
+                                </m:dPr>
+                                <m:e>
+                                  <m:r>
+                                    <a:rPr lang="en-US" i="1">
+                                      <a:latin typeface="Cambria Math" panose="02040503050406030204" pitchFamily="18" charset="0"/>
+                                    </a:rPr>
+                                    <m:t>𝑒</m:t>
+                                  </m:r>
+                                </m:e>
+                              </m:d>
+                            </m:sup>
+                          </m:sSubSup>
+                          <m:r>
+                            <a:rPr lang="en-US" i="1">
+                              <a:latin typeface="Cambria Math" panose="02040503050406030204" pitchFamily="18" charset="0"/>
+                            </a:rPr>
+                            <m:t>+</m:t>
+                          </m:r>
+                          <m:sSubSup>
+                            <m:sSubSupPr>
+                              <m:ctrlPr>
+                                <a:rPr lang="en-US" i="1">
+                                  <a:latin typeface="Cambria Math" panose="02040503050406030204" pitchFamily="18" charset="0"/>
+                                </a:rPr>
+                              </m:ctrlPr>
+                            </m:sSubSupPr>
+                            <m:e>
+                              <m:r>
+                                <a:rPr lang="en-US" i="1">
+                                  <a:latin typeface="Cambria Math" panose="02040503050406030204" pitchFamily="18" charset="0"/>
+                                </a:rPr>
+                                <m:t>𝑏</m:t>
+                              </m:r>
+                            </m:e>
+                            <m:sub>
+                              <m:r>
+                                <a:rPr lang="en-US" i="1">
+                                  <a:latin typeface="Cambria Math" panose="02040503050406030204" pitchFamily="18" charset="0"/>
+                                </a:rPr>
+                                <m:t>𝑙</m:t>
+                              </m:r>
+                            </m:sub>
+                            <m:sup>
+                              <m:d>
+                                <m:dPr>
+                                  <m:ctrlPr>
+                                    <a:rPr lang="en-US" i="1">
+                                      <a:latin typeface="Cambria Math" panose="02040503050406030204" pitchFamily="18" charset="0"/>
+                                    </a:rPr>
+                                  </m:ctrlPr>
+                                </m:dPr>
+                                <m:e>
+                                  <m:r>
+                                    <a:rPr lang="en-US" i="1">
+                                      <a:latin typeface="Cambria Math" panose="02040503050406030204" pitchFamily="18" charset="0"/>
+                                    </a:rPr>
+                                    <m:t>𝑒</m:t>
+                                  </m:r>
+                                </m:e>
+                              </m:d>
+                            </m:sup>
+                          </m:sSubSup>
+                          <m:r>
+                            <a:rPr lang="en-US" i="1">
+                              <a:latin typeface="Cambria Math" panose="02040503050406030204" pitchFamily="18" charset="0"/>
+                            </a:rPr>
+                            <m:t>𝑥</m:t>
+                          </m:r>
+                          <m:r>
+                            <a:rPr lang="en-US" i="1">
+                              <a:latin typeface="Cambria Math" panose="02040503050406030204" pitchFamily="18" charset="0"/>
+                            </a:rPr>
+                            <m:t>+</m:t>
+                          </m:r>
+                          <m:sSubSup>
+                            <m:sSubSupPr>
+                              <m:ctrlPr>
+                                <a:rPr lang="en-US" i="1">
+                                  <a:latin typeface="Cambria Math" panose="02040503050406030204" pitchFamily="18" charset="0"/>
+                                </a:rPr>
+                              </m:ctrlPr>
+                            </m:sSubSupPr>
+                            <m:e>
+                              <m:r>
+                                <a:rPr lang="en-US" i="1">
+                                  <a:latin typeface="Cambria Math" panose="02040503050406030204" pitchFamily="18" charset="0"/>
+                                </a:rPr>
+                                <m:t>𝑐</m:t>
+                              </m:r>
+                            </m:e>
+                            <m:sub>
+                              <m:r>
+                                <a:rPr lang="en-US" i="1">
+                                  <a:latin typeface="Cambria Math" panose="02040503050406030204" pitchFamily="18" charset="0"/>
+                                </a:rPr>
+                                <m:t>𝑙</m:t>
+                              </m:r>
+                            </m:sub>
+                            <m:sup>
+                              <m:d>
+                                <m:dPr>
+                                  <m:ctrlPr>
+                                    <a:rPr lang="en-US" i="1">
+                                      <a:latin typeface="Cambria Math" panose="02040503050406030204" pitchFamily="18" charset="0"/>
+                                    </a:rPr>
+                                  </m:ctrlPr>
+                                </m:dPr>
+                                <m:e>
+                                  <m:r>
+                                    <a:rPr lang="en-US" i="1">
+                                      <a:latin typeface="Cambria Math" panose="02040503050406030204" pitchFamily="18" charset="0"/>
+                                    </a:rPr>
+                                    <m:t>𝑒</m:t>
+                                  </m:r>
+                                </m:e>
+                              </m:d>
+                            </m:sup>
+                          </m:sSubSup>
+                          <m:r>
+                            <a:rPr lang="en-US" i="1">
+                              <a:latin typeface="Cambria Math" panose="02040503050406030204" pitchFamily="18" charset="0"/>
+                            </a:rPr>
+                            <m:t>𝑦</m:t>
+                          </m:r>
+                        </m:e>
+                      </m:d>
+                    </m:oMath>
+                  </m:oMathPara>
+                </a14:m>
+                <a:endParaRPr lang="en-US" dirty="0"/>
+              </a:p>
+            </p:txBody>
+          </p:sp>
+        </mc:Choice>
+        <mc:Fallback>
+          <p:sp>
+            <p:nvSpPr>
+              <p:cNvPr id="58" name="TextBox 57">
+                <a:extLst>
+                  <a:ext uri="{FF2B5EF4-FFF2-40B4-BE49-F238E27FC236}">
+                    <a16:creationId xmlns:a16="http://schemas.microsoft.com/office/drawing/2014/main" id="{0A0558F3-C770-A3D0-4901-736C40EA15CE}"/>
+                  </a:ext>
+                </a:extLst>
+              </p:cNvPr>
+              <p:cNvSpPr txBox="1">
+                <a:spLocks noRot="1" noChangeAspect="1" noMove="1" noResize="1" noEditPoints="1" noAdjustHandles="1" noChangeArrowheads="1" noChangeShapeType="1" noTextEdit="1"/>
+              </p:cNvSpPr>
+              <p:nvPr/>
+            </p:nvSpPr>
+            <p:spPr>
+              <a:xfrm>
+                <a:off x="4633841" y="4073718"/>
+                <a:ext cx="4344779" cy="530402"/>
+              </a:xfrm>
+              <a:prstGeom prst="rect">
+                <a:avLst/>
+              </a:prstGeom>
+              <a:blipFill>
+                <a:blip r:embed="rId12"/>
+                <a:stretch>
+                  <a:fillRect/>
+                </a:stretch>
+              </a:blipFill>
+            </p:spPr>
+            <p:txBody>
+              <a:bodyPr/>
+              <a:lstStyle/>
+              <a:p>
+                <a:r>
+                  <a:rPr lang="en-US">
+                    <a:noFill/>
+                  </a:rPr>
+                  <a:t> </a:t>
+                </a:r>
+              </a:p>
+            </p:txBody>
+          </p:sp>
+        </mc:Fallback>
+      </mc:AlternateContent>
+      <mc:AlternateContent xmlns:mc="http://schemas.openxmlformats.org/markup-compatibility/2006">
+        <mc:Choice xmlns:a14="http://schemas.microsoft.com/office/drawing/2010/main" Requires="a14">
+          <p:sp>
+            <p:nvSpPr>
+              <p:cNvPr id="60" name="TextBox 59">
+                <a:extLst>
+                  <a:ext uri="{FF2B5EF4-FFF2-40B4-BE49-F238E27FC236}">
+                    <a16:creationId xmlns:a16="http://schemas.microsoft.com/office/drawing/2014/main" id="{243BC3DD-B23F-0D2D-D1B7-276EEE43E6B9}"/>
+                  </a:ext>
+                </a:extLst>
+              </p:cNvPr>
+              <p:cNvSpPr txBox="1"/>
+              <p:nvPr/>
+            </p:nvSpPr>
+            <p:spPr>
+              <a:xfrm>
+                <a:off x="4633841" y="4752024"/>
+                <a:ext cx="3512949" cy="530402"/>
+              </a:xfrm>
+              <a:prstGeom prst="rect">
+                <a:avLst/>
+              </a:prstGeom>
+              <a:noFill/>
+            </p:spPr>
+            <p:txBody>
+              <a:bodyPr wrap="none" lIns="0" tIns="0" rIns="0" bIns="0" rtlCol="0">
+                <a:spAutoFit/>
+              </a:bodyPr>
+              <a:lstStyle/>
+              <a:p>
+                <a:pPr/>
+                <a14:m>
+                  <m:oMathPara xmlns:m="http://schemas.openxmlformats.org/officeDocument/2006/math">
+                    <m:oMathParaPr>
+                      <m:jc m:val="centerGroup"/>
+                    </m:oMathParaPr>
+                    <m:oMath xmlns:m="http://schemas.openxmlformats.org/officeDocument/2006/math">
+                      <m:r>
+                        <m:rPr>
+                          <m:sty m:val="p"/>
+                        </m:rPr>
+                        <a:rPr lang="en-US" b="0" i="0" smtClean="0">
+                          <a:latin typeface="Cambria Math" panose="02040503050406030204" pitchFamily="18" charset="0"/>
+                        </a:rPr>
+                        <m:t>∇</m:t>
+                      </m:r>
+                      <m:sSubSup>
+                        <m:sSubSupPr>
+                          <m:ctrlPr>
+                            <a:rPr lang="en-US" b="0" i="1" smtClean="0">
+                              <a:latin typeface="Cambria Math" panose="02040503050406030204" pitchFamily="18" charset="0"/>
+                            </a:rPr>
+                          </m:ctrlPr>
+                        </m:sSubSupPr>
+                        <m:e>
+                          <m:r>
+                            <a:rPr lang="en-US" b="0" i="1" smtClean="0">
+                              <a:latin typeface="Cambria Math" panose="02040503050406030204" pitchFamily="18" charset="0"/>
+                            </a:rPr>
+                            <m:t>𝑁</m:t>
+                          </m:r>
+                        </m:e>
+                        <m:sub>
+                          <m:r>
+                            <a:rPr lang="en-US" b="0" i="1" smtClean="0">
+                              <a:latin typeface="Cambria Math" panose="02040503050406030204" pitchFamily="18" charset="0"/>
+                            </a:rPr>
+                            <m:t>𝑙</m:t>
+                          </m:r>
+                        </m:sub>
+                        <m:sup>
+                          <m:d>
+                            <m:dPr>
+                              <m:ctrlPr>
+                                <a:rPr lang="en-US" b="0" i="1" smtClean="0">
+                                  <a:latin typeface="Cambria Math" panose="02040503050406030204" pitchFamily="18" charset="0"/>
+                                </a:rPr>
+                              </m:ctrlPr>
+                            </m:dPr>
+                            <m:e>
+                              <m:r>
+                                <a:rPr lang="en-US" b="0" i="1" smtClean="0">
+                                  <a:latin typeface="Cambria Math" panose="02040503050406030204" pitchFamily="18" charset="0"/>
+                                </a:rPr>
+                                <m:t>𝑒</m:t>
+                              </m:r>
+                            </m:e>
+                          </m:d>
+                        </m:sup>
+                      </m:sSubSup>
+                      <m:d>
+                        <m:dPr>
+                          <m:ctrlPr>
+                            <a:rPr lang="en-US" b="0" i="1" smtClean="0">
+                              <a:latin typeface="Cambria Math" panose="02040503050406030204" pitchFamily="18" charset="0"/>
+                            </a:rPr>
+                          </m:ctrlPr>
+                        </m:dPr>
+                        <m:e>
+                          <m:r>
+                            <a:rPr lang="en-US" b="0" i="1" smtClean="0">
+                              <a:latin typeface="Cambria Math" panose="02040503050406030204" pitchFamily="18" charset="0"/>
+                            </a:rPr>
+                            <m:t>𝑥</m:t>
+                          </m:r>
+                          <m:r>
+                            <a:rPr lang="en-US" b="0" i="1" smtClean="0">
+                              <a:latin typeface="Cambria Math" panose="02040503050406030204" pitchFamily="18" charset="0"/>
+                            </a:rPr>
+                            <m:t>,</m:t>
+                          </m:r>
+                          <m:r>
+                            <a:rPr lang="en-US" b="0" i="1" smtClean="0">
+                              <a:latin typeface="Cambria Math" panose="02040503050406030204" pitchFamily="18" charset="0"/>
+                            </a:rPr>
+                            <m:t>𝑦</m:t>
+                          </m:r>
+                        </m:e>
+                      </m:d>
+                      <m:r>
+                        <a:rPr lang="en-US" b="0" i="1" smtClean="0">
+                          <a:latin typeface="Cambria Math" panose="02040503050406030204" pitchFamily="18" charset="0"/>
+                        </a:rPr>
+                        <m:t>=</m:t>
+                      </m:r>
+                      <m:f>
+                        <m:fPr>
+                          <m:ctrlPr>
+                            <a:rPr lang="en-US" i="1">
+                              <a:latin typeface="Cambria Math" panose="02040503050406030204" pitchFamily="18" charset="0"/>
+                            </a:rPr>
+                          </m:ctrlPr>
+                        </m:fPr>
+                        <m:num>
+                          <m:r>
+                            <a:rPr lang="en-US" i="1">
+                              <a:latin typeface="Cambria Math" panose="02040503050406030204" pitchFamily="18" charset="0"/>
+                            </a:rPr>
+                            <m:t>1</m:t>
+                          </m:r>
+                        </m:num>
+                        <m:den>
+                          <m:r>
+                            <a:rPr lang="en-US" i="1">
+                              <a:latin typeface="Cambria Math" panose="02040503050406030204" pitchFamily="18" charset="0"/>
+                            </a:rPr>
+                            <m:t>2</m:t>
+                          </m:r>
+                          <m:sSup>
+                            <m:sSupPr>
+                              <m:ctrlPr>
+                                <a:rPr lang="en-US" i="1">
+                                  <a:latin typeface="Cambria Math" panose="02040503050406030204" pitchFamily="18" charset="0"/>
+                                </a:rPr>
+                              </m:ctrlPr>
+                            </m:sSupPr>
+                            <m:e>
+                              <m:r>
+                                <m:rPr>
+                                  <m:sty m:val="p"/>
+                                </m:rPr>
+                                <a:rPr lang="en-US">
+                                  <a:latin typeface="Cambria Math" panose="02040503050406030204" pitchFamily="18" charset="0"/>
+                                </a:rPr>
+                                <m:t>Δ</m:t>
+                              </m:r>
+                            </m:e>
+                            <m:sup>
+                              <m:d>
+                                <m:dPr>
+                                  <m:ctrlPr>
+                                    <a:rPr lang="en-US" i="1">
+                                      <a:latin typeface="Cambria Math" panose="02040503050406030204" pitchFamily="18" charset="0"/>
+                                    </a:rPr>
+                                  </m:ctrlPr>
+                                </m:dPr>
+                                <m:e>
+                                  <m:r>
+                                    <a:rPr lang="en-US" i="1">
+                                      <a:latin typeface="Cambria Math" panose="02040503050406030204" pitchFamily="18" charset="0"/>
+                                    </a:rPr>
+                                    <m:t>𝑒</m:t>
+                                  </m:r>
+                                </m:e>
+                              </m:d>
+                            </m:sup>
+                          </m:sSup>
+                        </m:den>
+                      </m:f>
+                      <m:d>
+                        <m:dPr>
+                          <m:ctrlPr>
+                            <a:rPr lang="en-US" b="0" i="1" smtClean="0">
+                              <a:latin typeface="Cambria Math" panose="02040503050406030204" pitchFamily="18" charset="0"/>
+                            </a:rPr>
+                          </m:ctrlPr>
+                        </m:dPr>
+                        <m:e>
+                          <m:sSubSup>
+                            <m:sSubSupPr>
+                              <m:ctrlPr>
+                                <a:rPr lang="en-US" b="0" i="1" smtClean="0">
+                                  <a:latin typeface="Cambria Math" panose="02040503050406030204" pitchFamily="18" charset="0"/>
+                                </a:rPr>
+                              </m:ctrlPr>
+                            </m:sSubSupPr>
+                            <m:e>
+                              <m:r>
+                                <a:rPr lang="en-US" b="0" i="1" smtClean="0">
+                                  <a:latin typeface="Cambria Math" panose="02040503050406030204" pitchFamily="18" charset="0"/>
+                                </a:rPr>
+                                <m:t>𝑏</m:t>
+                              </m:r>
+                            </m:e>
+                            <m:sub>
+                              <m:r>
+                                <a:rPr lang="en-US" b="0" i="1" smtClean="0">
+                                  <a:latin typeface="Cambria Math" panose="02040503050406030204" pitchFamily="18" charset="0"/>
+                                </a:rPr>
+                                <m:t>𝑙</m:t>
+                              </m:r>
+                            </m:sub>
+                            <m:sup>
+                              <m:d>
+                                <m:dPr>
+                                  <m:ctrlPr>
+                                    <a:rPr lang="en-US" b="0" i="1" smtClean="0">
+                                      <a:latin typeface="Cambria Math" panose="02040503050406030204" pitchFamily="18" charset="0"/>
+                                    </a:rPr>
+                                  </m:ctrlPr>
+                                </m:dPr>
+                                <m:e>
+                                  <m:r>
+                                    <a:rPr lang="en-US" b="0" i="1" smtClean="0">
+                                      <a:latin typeface="Cambria Math" panose="02040503050406030204" pitchFamily="18" charset="0"/>
+                                    </a:rPr>
+                                    <m:t>𝑒</m:t>
+                                  </m:r>
+                                </m:e>
+                              </m:d>
+                            </m:sup>
+                          </m:sSubSup>
+                          <m:acc>
+                            <m:accPr>
+                              <m:chr m:val="̂"/>
+                              <m:ctrlPr>
+                                <a:rPr lang="en-US" b="0" i="1" smtClean="0">
+                                  <a:latin typeface="Cambria Math" panose="02040503050406030204" pitchFamily="18" charset="0"/>
+                                </a:rPr>
+                              </m:ctrlPr>
+                            </m:accPr>
+                            <m:e>
+                              <m:r>
+                                <a:rPr lang="en-US" b="0" i="1" smtClean="0">
+                                  <a:latin typeface="Cambria Math" panose="02040503050406030204" pitchFamily="18" charset="0"/>
+                                </a:rPr>
+                                <m:t>𝑥</m:t>
+                              </m:r>
+                            </m:e>
+                          </m:acc>
+                          <m:r>
+                            <a:rPr lang="en-US" b="0" i="1" smtClean="0">
+                              <a:latin typeface="Cambria Math" panose="02040503050406030204" pitchFamily="18" charset="0"/>
+                            </a:rPr>
+                            <m:t>+</m:t>
+                          </m:r>
+                          <m:sSubSup>
+                            <m:sSubSupPr>
+                              <m:ctrlPr>
+                                <a:rPr lang="en-US" b="0" i="1" smtClean="0">
+                                  <a:latin typeface="Cambria Math" panose="02040503050406030204" pitchFamily="18" charset="0"/>
+                                </a:rPr>
+                              </m:ctrlPr>
+                            </m:sSubSupPr>
+                            <m:e>
+                              <m:r>
+                                <a:rPr lang="en-US" b="0" i="1" smtClean="0">
+                                  <a:latin typeface="Cambria Math" panose="02040503050406030204" pitchFamily="18" charset="0"/>
+                                </a:rPr>
+                                <m:t>𝑐</m:t>
+                              </m:r>
+                            </m:e>
+                            <m:sub>
+                              <m:r>
+                                <a:rPr lang="en-US" b="0" i="1" smtClean="0">
+                                  <a:latin typeface="Cambria Math" panose="02040503050406030204" pitchFamily="18" charset="0"/>
+                                </a:rPr>
+                                <m:t>𝑙</m:t>
+                              </m:r>
+                            </m:sub>
+                            <m:sup>
+                              <m:d>
+                                <m:dPr>
+                                  <m:ctrlPr>
+                                    <a:rPr lang="en-US" b="0" i="1" smtClean="0">
+                                      <a:latin typeface="Cambria Math" panose="02040503050406030204" pitchFamily="18" charset="0"/>
+                                    </a:rPr>
+                                  </m:ctrlPr>
+                                </m:dPr>
+                                <m:e>
+                                  <m:r>
+                                    <a:rPr lang="en-US" b="0" i="1" smtClean="0">
+                                      <a:latin typeface="Cambria Math" panose="02040503050406030204" pitchFamily="18" charset="0"/>
+                                    </a:rPr>
+                                    <m:t>𝑒</m:t>
+                                  </m:r>
+                                </m:e>
+                              </m:d>
+                            </m:sup>
+                          </m:sSubSup>
+                          <m:acc>
+                            <m:accPr>
+                              <m:chr m:val="̂"/>
+                              <m:ctrlPr>
+                                <a:rPr lang="en-US" b="0" i="1" smtClean="0">
+                                  <a:latin typeface="Cambria Math" panose="02040503050406030204" pitchFamily="18" charset="0"/>
+                                </a:rPr>
+                              </m:ctrlPr>
+                            </m:accPr>
+                            <m:e>
+                              <m:r>
+                                <a:rPr lang="en-US" b="0" i="1" smtClean="0">
+                                  <a:latin typeface="Cambria Math" panose="02040503050406030204" pitchFamily="18" charset="0"/>
+                                </a:rPr>
+                                <m:t>𝑦</m:t>
+                              </m:r>
+                            </m:e>
+                          </m:acc>
+                        </m:e>
+                      </m:d>
+                    </m:oMath>
+                  </m:oMathPara>
+                </a14:m>
+                <a:endParaRPr lang="en-US" dirty="0"/>
+              </a:p>
+            </p:txBody>
+          </p:sp>
+        </mc:Choice>
+        <mc:Fallback>
+          <p:sp>
+            <p:nvSpPr>
+              <p:cNvPr id="60" name="TextBox 59">
+                <a:extLst>
+                  <a:ext uri="{FF2B5EF4-FFF2-40B4-BE49-F238E27FC236}">
+                    <a16:creationId xmlns:a16="http://schemas.microsoft.com/office/drawing/2014/main" id="{243BC3DD-B23F-0D2D-D1B7-276EEE43E6B9}"/>
+                  </a:ext>
+                </a:extLst>
+              </p:cNvPr>
+              <p:cNvSpPr txBox="1">
+                <a:spLocks noRot="1" noChangeAspect="1" noMove="1" noResize="1" noEditPoints="1" noAdjustHandles="1" noChangeArrowheads="1" noChangeShapeType="1" noTextEdit="1"/>
+              </p:cNvSpPr>
+              <p:nvPr/>
+            </p:nvSpPr>
+            <p:spPr>
+              <a:xfrm>
+                <a:off x="4633841" y="4752024"/>
+                <a:ext cx="3512949" cy="530402"/>
+              </a:xfrm>
+              <a:prstGeom prst="rect">
+                <a:avLst/>
+              </a:prstGeom>
+              <a:blipFill>
+                <a:blip r:embed="rId13"/>
+                <a:stretch>
+                  <a:fillRect/>
+                </a:stretch>
+              </a:blipFill>
+            </p:spPr>
+            <p:txBody>
+              <a:bodyPr/>
+              <a:lstStyle/>
+              <a:p>
+                <a:r>
+                  <a:rPr lang="en-US">
+                    <a:noFill/>
+                  </a:rPr>
+                  <a:t> </a:t>
+                </a:r>
+              </a:p>
+            </p:txBody>
+          </p:sp>
+        </mc:Fallback>
+      </mc:AlternateContent>
+      <mc:AlternateContent xmlns:mc="http://schemas.openxmlformats.org/markup-compatibility/2006">
+        <mc:Choice xmlns:a14="http://schemas.microsoft.com/office/drawing/2010/main" Requires="a14">
+          <p:sp>
+            <p:nvSpPr>
+              <p:cNvPr id="61" name="TextBox 60">
+                <a:extLst>
+                  <a:ext uri="{FF2B5EF4-FFF2-40B4-BE49-F238E27FC236}">
+                    <a16:creationId xmlns:a16="http://schemas.microsoft.com/office/drawing/2014/main" id="{071560C0-C92E-7C14-808A-B68FB281C2E8}"/>
+                  </a:ext>
+                </a:extLst>
+              </p:cNvPr>
+              <p:cNvSpPr txBox="1"/>
+              <p:nvPr/>
+            </p:nvSpPr>
+            <p:spPr>
+              <a:xfrm>
+                <a:off x="4702229" y="5393906"/>
+                <a:ext cx="4547912" cy="585225"/>
+              </a:xfrm>
+              <a:prstGeom prst="rect">
+                <a:avLst/>
+              </a:prstGeom>
+              <a:noFill/>
+            </p:spPr>
+            <p:txBody>
+              <a:bodyPr wrap="none" lIns="0" tIns="0" rIns="0" bIns="0" rtlCol="0">
+                <a:spAutoFit/>
+              </a:bodyPr>
+              <a:lstStyle/>
+              <a:p>
+                <a14:m>
+                  <m:oMathPara xmlns:m="http://schemas.openxmlformats.org/officeDocument/2006/math">
+                    <m:oMathParaPr>
+                      <m:jc m:val="centerGroup"/>
+                    </m:oMathParaPr>
+                    <m:oMath xmlns:m="http://schemas.openxmlformats.org/officeDocument/2006/math">
+                      <m:sSup>
+                        <m:sSupPr>
+                          <m:ctrlPr>
+                            <a:rPr lang="en-US" b="0" i="1" smtClean="0">
+                              <a:latin typeface="Cambria Math" panose="02040503050406030204" pitchFamily="18" charset="0"/>
+                            </a:rPr>
+                          </m:ctrlPr>
+                        </m:sSupPr>
+                        <m:e>
+                          <m:r>
+                            <a:rPr lang="en-US" b="0" i="1" smtClean="0">
+                              <a:latin typeface="Cambria Math" panose="02040503050406030204" pitchFamily="18" charset="0"/>
+                            </a:rPr>
+                            <m:t>𝜖</m:t>
+                          </m:r>
+                        </m:e>
+                        <m:sup>
+                          <m:d>
+                            <m:dPr>
+                              <m:ctrlPr>
+                                <a:rPr lang="en-US" b="0" i="1" smtClean="0">
+                                  <a:latin typeface="Cambria Math" panose="02040503050406030204" pitchFamily="18" charset="0"/>
+                                </a:rPr>
+                              </m:ctrlPr>
+                            </m:dPr>
+                            <m:e>
+                              <m:r>
+                                <a:rPr lang="en-US" b="0" i="1" smtClean="0">
+                                  <a:latin typeface="Cambria Math" panose="02040503050406030204" pitchFamily="18" charset="0"/>
+                                </a:rPr>
+                                <m:t>𝑒</m:t>
+                              </m:r>
+                            </m:e>
+                          </m:d>
+                        </m:sup>
+                      </m:sSup>
+                      <m:r>
+                        <m:rPr>
+                          <m:sty m:val="p"/>
+                        </m:rPr>
+                        <a:rPr lang="en-US" smtClean="0">
+                          <a:latin typeface="Cambria Math" panose="02040503050406030204" pitchFamily="18" charset="0"/>
+                        </a:rPr>
+                        <m:t>∇</m:t>
+                      </m:r>
+                      <m:sSubSup>
+                        <m:sSubSupPr>
+                          <m:ctrlPr>
+                            <a:rPr lang="en-US" i="1">
+                              <a:latin typeface="Cambria Math" panose="02040503050406030204" pitchFamily="18" charset="0"/>
+                            </a:rPr>
+                          </m:ctrlPr>
+                        </m:sSubSupPr>
+                        <m:e>
+                          <m:r>
+                            <a:rPr lang="en-US" i="1">
+                              <a:latin typeface="Cambria Math" panose="02040503050406030204" pitchFamily="18" charset="0"/>
+                            </a:rPr>
+                            <m:t>𝑁</m:t>
+                          </m:r>
+                        </m:e>
+                        <m:sub>
+                          <m:r>
+                            <a:rPr lang="en-US" i="1">
+                              <a:latin typeface="Cambria Math" panose="02040503050406030204" pitchFamily="18" charset="0"/>
+                            </a:rPr>
+                            <m:t>𝑙</m:t>
+                          </m:r>
+                        </m:sub>
+                        <m:sup>
+                          <m:d>
+                            <m:dPr>
+                              <m:ctrlPr>
+                                <a:rPr lang="en-US" i="1">
+                                  <a:latin typeface="Cambria Math" panose="02040503050406030204" pitchFamily="18" charset="0"/>
+                                </a:rPr>
+                              </m:ctrlPr>
+                            </m:dPr>
+                            <m:e>
+                              <m:r>
+                                <a:rPr lang="en-US" i="1">
+                                  <a:latin typeface="Cambria Math" panose="02040503050406030204" pitchFamily="18" charset="0"/>
+                                </a:rPr>
+                                <m:t>𝑒</m:t>
+                              </m:r>
+                            </m:e>
+                          </m:d>
+                        </m:sup>
+                      </m:sSubSup>
+                      <m:r>
+                        <a:rPr lang="en-US" b="0" i="1" smtClean="0">
+                          <a:latin typeface="Cambria Math" panose="02040503050406030204" pitchFamily="18" charset="0"/>
+                        </a:rPr>
+                        <m:t>⋅</m:t>
+                      </m:r>
+                      <m:r>
+                        <m:rPr>
+                          <m:sty m:val="p"/>
+                        </m:rPr>
+                        <a:rPr lang="en-US">
+                          <a:latin typeface="Cambria Math" panose="02040503050406030204" pitchFamily="18" charset="0"/>
+                        </a:rPr>
+                        <m:t>∇</m:t>
+                      </m:r>
+                      <m:sSubSup>
+                        <m:sSubSupPr>
+                          <m:ctrlPr>
+                            <a:rPr lang="en-US" i="1">
+                              <a:latin typeface="Cambria Math" panose="02040503050406030204" pitchFamily="18" charset="0"/>
+                            </a:rPr>
+                          </m:ctrlPr>
+                        </m:sSubSupPr>
+                        <m:e>
+                          <m:r>
+                            <a:rPr lang="en-US" i="1">
+                              <a:latin typeface="Cambria Math" panose="02040503050406030204" pitchFamily="18" charset="0"/>
+                            </a:rPr>
+                            <m:t>𝑁</m:t>
+                          </m:r>
+                        </m:e>
+                        <m:sub>
+                          <m:r>
+                            <a:rPr lang="en-US" b="0" i="1" smtClean="0">
+                              <a:latin typeface="Cambria Math" panose="02040503050406030204" pitchFamily="18" charset="0"/>
+                            </a:rPr>
+                            <m:t>𝑘</m:t>
+                          </m:r>
+                        </m:sub>
+                        <m:sup>
+                          <m:d>
+                            <m:dPr>
+                              <m:ctrlPr>
+                                <a:rPr lang="en-US" i="1">
+                                  <a:latin typeface="Cambria Math" panose="02040503050406030204" pitchFamily="18" charset="0"/>
+                                </a:rPr>
+                              </m:ctrlPr>
+                            </m:dPr>
+                            <m:e>
+                              <m:r>
+                                <a:rPr lang="en-US" i="1">
+                                  <a:latin typeface="Cambria Math" panose="02040503050406030204" pitchFamily="18" charset="0"/>
+                                </a:rPr>
+                                <m:t>𝑒</m:t>
+                              </m:r>
+                            </m:e>
+                          </m:d>
+                        </m:sup>
+                      </m:sSubSup>
+                      <m:r>
+                        <a:rPr lang="en-US" i="1">
+                          <a:latin typeface="Cambria Math" panose="02040503050406030204" pitchFamily="18" charset="0"/>
+                        </a:rPr>
+                        <m:t>=</m:t>
+                      </m:r>
+                      <m:f>
+                        <m:fPr>
+                          <m:ctrlPr>
+                            <a:rPr lang="en-US" i="1">
+                              <a:latin typeface="Cambria Math" panose="02040503050406030204" pitchFamily="18" charset="0"/>
+                            </a:rPr>
+                          </m:ctrlPr>
+                        </m:fPr>
+                        <m:num>
+                          <m:sSup>
+                            <m:sSupPr>
+                              <m:ctrlPr>
+                                <a:rPr lang="en-US" i="1">
+                                  <a:latin typeface="Cambria Math" panose="02040503050406030204" pitchFamily="18" charset="0"/>
+                                </a:rPr>
+                              </m:ctrlPr>
+                            </m:sSupPr>
+                            <m:e>
+                              <m:r>
+                                <a:rPr lang="en-US" i="1">
+                                  <a:latin typeface="Cambria Math" panose="02040503050406030204" pitchFamily="18" charset="0"/>
+                                </a:rPr>
+                                <m:t>𝜖</m:t>
+                              </m:r>
+                            </m:e>
+                            <m:sup>
+                              <m:d>
+                                <m:dPr>
+                                  <m:ctrlPr>
+                                    <a:rPr lang="en-US" i="1">
+                                      <a:latin typeface="Cambria Math" panose="02040503050406030204" pitchFamily="18" charset="0"/>
+                                    </a:rPr>
+                                  </m:ctrlPr>
+                                </m:dPr>
+                                <m:e>
+                                  <m:r>
+                                    <a:rPr lang="en-US" i="1">
+                                      <a:latin typeface="Cambria Math" panose="02040503050406030204" pitchFamily="18" charset="0"/>
+                                    </a:rPr>
+                                    <m:t>𝑒</m:t>
+                                  </m:r>
+                                </m:e>
+                              </m:d>
+                            </m:sup>
+                          </m:sSup>
+                        </m:num>
+                        <m:den>
+                          <m:r>
+                            <a:rPr lang="en-US" i="1">
+                              <a:latin typeface="Cambria Math" panose="02040503050406030204" pitchFamily="18" charset="0"/>
+                            </a:rPr>
+                            <m:t>2</m:t>
+                          </m:r>
+                          <m:sSup>
+                            <m:sSupPr>
+                              <m:ctrlPr>
+                                <a:rPr lang="en-US" i="1">
+                                  <a:latin typeface="Cambria Math" panose="02040503050406030204" pitchFamily="18" charset="0"/>
+                                </a:rPr>
+                              </m:ctrlPr>
+                            </m:sSupPr>
+                            <m:e>
+                              <m:r>
+                                <m:rPr>
+                                  <m:sty m:val="p"/>
+                                </m:rPr>
+                                <a:rPr lang="en-US">
+                                  <a:latin typeface="Cambria Math" panose="02040503050406030204" pitchFamily="18" charset="0"/>
+                                </a:rPr>
+                                <m:t>Δ</m:t>
+                              </m:r>
+                            </m:e>
+                            <m:sup>
+                              <m:d>
+                                <m:dPr>
+                                  <m:ctrlPr>
+                                    <a:rPr lang="en-US" i="1">
+                                      <a:latin typeface="Cambria Math" panose="02040503050406030204" pitchFamily="18" charset="0"/>
+                                    </a:rPr>
+                                  </m:ctrlPr>
+                                </m:dPr>
+                                <m:e>
+                                  <m:r>
+                                    <a:rPr lang="en-US" i="1">
+                                      <a:latin typeface="Cambria Math" panose="02040503050406030204" pitchFamily="18" charset="0"/>
+                                    </a:rPr>
+                                    <m:t>𝑒</m:t>
+                                  </m:r>
+                                </m:e>
+                              </m:d>
+                            </m:sup>
+                          </m:sSup>
+                        </m:den>
+                      </m:f>
+                      <m:d>
+                        <m:dPr>
+                          <m:ctrlPr>
+                            <a:rPr lang="en-US" i="1">
+                              <a:latin typeface="Cambria Math" panose="02040503050406030204" pitchFamily="18" charset="0"/>
+                            </a:rPr>
+                          </m:ctrlPr>
+                        </m:dPr>
+                        <m:e>
+                          <m:sSubSup>
+                            <m:sSubSupPr>
+                              <m:ctrlPr>
+                                <a:rPr lang="en-US" i="1">
+                                  <a:latin typeface="Cambria Math" panose="02040503050406030204" pitchFamily="18" charset="0"/>
+                                </a:rPr>
+                              </m:ctrlPr>
+                            </m:sSubSupPr>
+                            <m:e>
+                              <m:r>
+                                <a:rPr lang="en-US" i="1">
+                                  <a:latin typeface="Cambria Math" panose="02040503050406030204" pitchFamily="18" charset="0"/>
+                                </a:rPr>
+                                <m:t>𝑏</m:t>
+                              </m:r>
+                            </m:e>
+                            <m:sub>
+                              <m:r>
+                                <a:rPr lang="en-US" i="1">
+                                  <a:latin typeface="Cambria Math" panose="02040503050406030204" pitchFamily="18" charset="0"/>
+                                </a:rPr>
+                                <m:t>𝑙</m:t>
+                              </m:r>
+                            </m:sub>
+                            <m:sup>
+                              <m:d>
+                                <m:dPr>
+                                  <m:ctrlPr>
+                                    <a:rPr lang="en-US" i="1">
+                                      <a:latin typeface="Cambria Math" panose="02040503050406030204" pitchFamily="18" charset="0"/>
+                                    </a:rPr>
+                                  </m:ctrlPr>
+                                </m:dPr>
+                                <m:e>
+                                  <m:r>
+                                    <a:rPr lang="en-US" i="1">
+                                      <a:latin typeface="Cambria Math" panose="02040503050406030204" pitchFamily="18" charset="0"/>
+                                    </a:rPr>
+                                    <m:t>𝑒</m:t>
+                                  </m:r>
+                                </m:e>
+                              </m:d>
+                            </m:sup>
+                          </m:sSubSup>
+                          <m:sSubSup>
+                            <m:sSubSupPr>
+                              <m:ctrlPr>
+                                <a:rPr lang="en-US" i="1">
+                                  <a:latin typeface="Cambria Math" panose="02040503050406030204" pitchFamily="18" charset="0"/>
+                                </a:rPr>
+                              </m:ctrlPr>
+                            </m:sSubSupPr>
+                            <m:e>
+                              <m:r>
+                                <a:rPr lang="en-US" i="1">
+                                  <a:latin typeface="Cambria Math" panose="02040503050406030204" pitchFamily="18" charset="0"/>
+                                </a:rPr>
+                                <m:t>𝑏</m:t>
+                              </m:r>
+                            </m:e>
+                            <m:sub>
+                              <m:r>
+                                <a:rPr lang="en-US" b="0" i="1" smtClean="0">
+                                  <a:latin typeface="Cambria Math" panose="02040503050406030204" pitchFamily="18" charset="0"/>
+                                </a:rPr>
+                                <m:t>𝑘</m:t>
+                              </m:r>
+                            </m:sub>
+                            <m:sup>
+                              <m:d>
+                                <m:dPr>
+                                  <m:ctrlPr>
+                                    <a:rPr lang="en-US" i="1">
+                                      <a:latin typeface="Cambria Math" panose="02040503050406030204" pitchFamily="18" charset="0"/>
+                                    </a:rPr>
+                                  </m:ctrlPr>
+                                </m:dPr>
+                                <m:e>
+                                  <m:r>
+                                    <a:rPr lang="en-US" i="1">
+                                      <a:latin typeface="Cambria Math" panose="02040503050406030204" pitchFamily="18" charset="0"/>
+                                    </a:rPr>
+                                    <m:t>𝑒</m:t>
+                                  </m:r>
+                                </m:e>
+                              </m:d>
+                            </m:sup>
+                          </m:sSubSup>
+                          <m:r>
+                            <a:rPr lang="en-US" i="1">
+                              <a:latin typeface="Cambria Math" panose="02040503050406030204" pitchFamily="18" charset="0"/>
+                            </a:rPr>
+                            <m:t>+</m:t>
+                          </m:r>
+                          <m:sSubSup>
+                            <m:sSubSupPr>
+                              <m:ctrlPr>
+                                <a:rPr lang="en-US" i="1">
+                                  <a:latin typeface="Cambria Math" panose="02040503050406030204" pitchFamily="18" charset="0"/>
+                                </a:rPr>
+                              </m:ctrlPr>
+                            </m:sSubSupPr>
+                            <m:e>
+                              <m:r>
+                                <a:rPr lang="en-US" i="1">
+                                  <a:latin typeface="Cambria Math" panose="02040503050406030204" pitchFamily="18" charset="0"/>
+                                </a:rPr>
+                                <m:t>𝑐</m:t>
+                              </m:r>
+                            </m:e>
+                            <m:sub>
+                              <m:r>
+                                <a:rPr lang="en-US" i="1">
+                                  <a:latin typeface="Cambria Math" panose="02040503050406030204" pitchFamily="18" charset="0"/>
+                                </a:rPr>
+                                <m:t>𝑙</m:t>
+                              </m:r>
+                            </m:sub>
+                            <m:sup>
+                              <m:d>
+                                <m:dPr>
+                                  <m:ctrlPr>
+                                    <a:rPr lang="en-US" i="1">
+                                      <a:latin typeface="Cambria Math" panose="02040503050406030204" pitchFamily="18" charset="0"/>
+                                    </a:rPr>
+                                  </m:ctrlPr>
+                                </m:dPr>
+                                <m:e>
+                                  <m:r>
+                                    <a:rPr lang="en-US" i="1">
+                                      <a:latin typeface="Cambria Math" panose="02040503050406030204" pitchFamily="18" charset="0"/>
+                                    </a:rPr>
+                                    <m:t>𝑒</m:t>
+                                  </m:r>
+                                </m:e>
+                              </m:d>
+                            </m:sup>
+                          </m:sSubSup>
+                          <m:sSubSup>
+                            <m:sSubSupPr>
+                              <m:ctrlPr>
+                                <a:rPr lang="en-US" i="1">
+                                  <a:latin typeface="Cambria Math" panose="02040503050406030204" pitchFamily="18" charset="0"/>
+                                </a:rPr>
+                              </m:ctrlPr>
+                            </m:sSubSupPr>
+                            <m:e>
+                              <m:r>
+                                <a:rPr lang="en-US" i="1">
+                                  <a:latin typeface="Cambria Math" panose="02040503050406030204" pitchFamily="18" charset="0"/>
+                                </a:rPr>
+                                <m:t>𝑐</m:t>
+                              </m:r>
+                            </m:e>
+                            <m:sub>
+                              <m:r>
+                                <a:rPr lang="en-US" b="0" i="1" smtClean="0">
+                                  <a:latin typeface="Cambria Math" panose="02040503050406030204" pitchFamily="18" charset="0"/>
+                                </a:rPr>
+                                <m:t>𝑘</m:t>
+                              </m:r>
+                            </m:sub>
+                            <m:sup>
+                              <m:d>
+                                <m:dPr>
+                                  <m:ctrlPr>
+                                    <a:rPr lang="en-US" i="1">
+                                      <a:latin typeface="Cambria Math" panose="02040503050406030204" pitchFamily="18" charset="0"/>
+                                    </a:rPr>
+                                  </m:ctrlPr>
+                                </m:dPr>
+                                <m:e>
+                                  <m:r>
+                                    <a:rPr lang="en-US" i="1">
+                                      <a:latin typeface="Cambria Math" panose="02040503050406030204" pitchFamily="18" charset="0"/>
+                                    </a:rPr>
+                                    <m:t>𝑒</m:t>
+                                  </m:r>
+                                </m:e>
+                              </m:d>
+                            </m:sup>
+                          </m:sSubSup>
+                        </m:e>
+                      </m:d>
+                    </m:oMath>
+                  </m:oMathPara>
+                </a14:m>
+                <a:endParaRPr lang="en-US" dirty="0"/>
+              </a:p>
+            </p:txBody>
+          </p:sp>
+        </mc:Choice>
+        <mc:Fallback>
+          <p:sp>
+            <p:nvSpPr>
+              <p:cNvPr id="61" name="TextBox 60">
+                <a:extLst>
+                  <a:ext uri="{FF2B5EF4-FFF2-40B4-BE49-F238E27FC236}">
+                    <a16:creationId xmlns:a16="http://schemas.microsoft.com/office/drawing/2014/main" id="{071560C0-C92E-7C14-808A-B68FB281C2E8}"/>
+                  </a:ext>
+                </a:extLst>
+              </p:cNvPr>
+              <p:cNvSpPr txBox="1">
+                <a:spLocks noRot="1" noChangeAspect="1" noMove="1" noResize="1" noEditPoints="1" noAdjustHandles="1" noChangeArrowheads="1" noChangeShapeType="1" noTextEdit="1"/>
+              </p:cNvSpPr>
+              <p:nvPr/>
+            </p:nvSpPr>
+            <p:spPr>
+              <a:xfrm>
+                <a:off x="4702229" y="5393906"/>
+                <a:ext cx="4547912" cy="585225"/>
+              </a:xfrm>
+              <a:prstGeom prst="rect">
+                <a:avLst/>
+              </a:prstGeom>
+              <a:blipFill>
+                <a:blip r:embed="rId14"/>
+                <a:stretch>
+                  <a:fillRect/>
+                </a:stretch>
+              </a:blipFill>
+            </p:spPr>
+            <p:txBody>
+              <a:bodyPr/>
+              <a:lstStyle/>
+              <a:p>
+                <a:r>
+                  <a:rPr lang="en-US">
+                    <a:noFill/>
+                  </a:rPr>
+                  <a:t> </a:t>
+                </a:r>
+              </a:p>
+            </p:txBody>
+          </p:sp>
+        </mc:Fallback>
+      </mc:AlternateContent>
+      <mc:AlternateContent xmlns:mc="http://schemas.openxmlformats.org/markup-compatibility/2006">
+        <mc:Choice xmlns:a14="http://schemas.microsoft.com/office/drawing/2010/main" Requires="a14">
+          <p:sp>
+            <p:nvSpPr>
+              <p:cNvPr id="63" name="TextBox 62">
+                <a:extLst>
+                  <a:ext uri="{FF2B5EF4-FFF2-40B4-BE49-F238E27FC236}">
+                    <a16:creationId xmlns:a16="http://schemas.microsoft.com/office/drawing/2014/main" id="{5BF989AD-99B5-1FCC-45E7-509312B99049}"/>
+                  </a:ext>
+                </a:extLst>
+              </p:cNvPr>
+              <p:cNvSpPr txBox="1"/>
+              <p:nvPr/>
+            </p:nvSpPr>
+            <p:spPr>
+              <a:xfrm>
+                <a:off x="4465690" y="6072212"/>
+                <a:ext cx="5784212" cy="637482"/>
+              </a:xfrm>
+              <a:prstGeom prst="rect">
+                <a:avLst/>
+              </a:prstGeom>
+              <a:noFill/>
+            </p:spPr>
+            <p:txBody>
+              <a:bodyPr wrap="none" lIns="0" tIns="0" rIns="0" bIns="0" rtlCol="0">
+                <a:spAutoFit/>
+              </a:bodyPr>
+              <a:lstStyle/>
+              <a:p>
+                <a:pPr/>
+                <a14:m>
+                  <m:oMathPara xmlns:m="http://schemas.openxmlformats.org/officeDocument/2006/math">
+                    <m:oMathParaPr>
+                      <m:jc m:val="centerGroup"/>
+                    </m:oMathParaPr>
+                    <m:oMath xmlns:m="http://schemas.openxmlformats.org/officeDocument/2006/math">
+                      <m:nary>
+                        <m:naryPr>
+                          <m:supHide m:val="on"/>
+                          <m:ctrlPr>
+                            <a:rPr lang="en-US" b="0" i="1" smtClean="0">
+                              <a:latin typeface="Cambria Math" panose="02040503050406030204" pitchFamily="18" charset="0"/>
+                            </a:rPr>
+                          </m:ctrlPr>
+                        </m:naryPr>
+                        <m:sub>
+                          <m:sSup>
+                            <m:sSupPr>
+                              <m:ctrlPr>
+                                <a:rPr lang="en-US" b="0" i="0" smtClean="0">
+                                  <a:latin typeface="Cambria Math" panose="02040503050406030204" pitchFamily="18" charset="0"/>
+                                </a:rPr>
+                              </m:ctrlPr>
+                            </m:sSupPr>
+                            <m:e>
+                              <m:r>
+                                <m:rPr>
+                                  <m:sty m:val="p"/>
+                                </m:rPr>
+                                <a:rPr lang="en-US" b="0" i="0" smtClean="0">
+                                  <a:latin typeface="Cambria Math" panose="02040503050406030204" pitchFamily="18" charset="0"/>
+                                </a:rPr>
+                                <m:t>Ω</m:t>
+                              </m:r>
+                            </m:e>
+                            <m:sup>
+                              <m:d>
+                                <m:dPr>
+                                  <m:ctrlPr>
+                                    <a:rPr lang="en-US" b="0" i="0" smtClean="0">
+                                      <a:latin typeface="Cambria Math" panose="02040503050406030204" pitchFamily="18" charset="0"/>
+                                    </a:rPr>
+                                  </m:ctrlPr>
+                                </m:dPr>
+                                <m:e>
+                                  <m:r>
+                                    <m:rPr>
+                                      <m:sty m:val="p"/>
+                                    </m:rPr>
+                                    <a:rPr lang="en-US" b="0" i="0" smtClean="0">
+                                      <a:latin typeface="Cambria Math" panose="02040503050406030204" pitchFamily="18" charset="0"/>
+                                    </a:rPr>
+                                    <m:t>e</m:t>
+                                  </m:r>
+                                </m:e>
+                              </m:d>
+                            </m:sup>
+                          </m:sSup>
+                        </m:sub>
+                        <m:sup/>
+                        <m:e>
+                          <m:sSup>
+                            <m:sSupPr>
+                              <m:ctrlPr>
+                                <a:rPr lang="en-US" i="1">
+                                  <a:latin typeface="Cambria Math" panose="02040503050406030204" pitchFamily="18" charset="0"/>
+                                </a:rPr>
+                              </m:ctrlPr>
+                            </m:sSupPr>
+                            <m:e>
+                              <m:r>
+                                <a:rPr lang="en-US" i="1">
+                                  <a:latin typeface="Cambria Math" panose="02040503050406030204" pitchFamily="18" charset="0"/>
+                                </a:rPr>
+                                <m:t>𝜖</m:t>
+                              </m:r>
+                            </m:e>
+                            <m:sup>
+                              <m:d>
+                                <m:dPr>
+                                  <m:ctrlPr>
+                                    <a:rPr lang="en-US" i="1">
+                                      <a:latin typeface="Cambria Math" panose="02040503050406030204" pitchFamily="18" charset="0"/>
+                                    </a:rPr>
+                                  </m:ctrlPr>
+                                </m:dPr>
+                                <m:e>
+                                  <m:r>
+                                    <a:rPr lang="en-US" i="1">
+                                      <a:latin typeface="Cambria Math" panose="02040503050406030204" pitchFamily="18" charset="0"/>
+                                    </a:rPr>
+                                    <m:t>𝑒</m:t>
+                                  </m:r>
+                                </m:e>
+                              </m:d>
+                            </m:sup>
+                          </m:sSup>
+                          <m:r>
+                            <m:rPr>
+                              <m:sty m:val="p"/>
+                            </m:rPr>
+                            <a:rPr lang="en-US">
+                              <a:latin typeface="Cambria Math" panose="02040503050406030204" pitchFamily="18" charset="0"/>
+                            </a:rPr>
+                            <m:t>∇</m:t>
+                          </m:r>
+                          <m:sSubSup>
+                            <m:sSubSupPr>
+                              <m:ctrlPr>
+                                <a:rPr lang="en-US" i="1">
+                                  <a:latin typeface="Cambria Math" panose="02040503050406030204" pitchFamily="18" charset="0"/>
+                                </a:rPr>
+                              </m:ctrlPr>
+                            </m:sSubSupPr>
+                            <m:e>
+                              <m:r>
+                                <a:rPr lang="en-US" i="1">
+                                  <a:latin typeface="Cambria Math" panose="02040503050406030204" pitchFamily="18" charset="0"/>
+                                </a:rPr>
+                                <m:t>𝑁</m:t>
+                              </m:r>
+                            </m:e>
+                            <m:sub>
+                              <m:r>
+                                <a:rPr lang="en-US" i="1">
+                                  <a:latin typeface="Cambria Math" panose="02040503050406030204" pitchFamily="18" charset="0"/>
+                                </a:rPr>
+                                <m:t>𝑙</m:t>
+                              </m:r>
+                            </m:sub>
+                            <m:sup>
+                              <m:d>
+                                <m:dPr>
+                                  <m:ctrlPr>
+                                    <a:rPr lang="en-US" i="1">
+                                      <a:latin typeface="Cambria Math" panose="02040503050406030204" pitchFamily="18" charset="0"/>
+                                    </a:rPr>
+                                  </m:ctrlPr>
+                                </m:dPr>
+                                <m:e>
+                                  <m:r>
+                                    <a:rPr lang="en-US" i="1">
+                                      <a:latin typeface="Cambria Math" panose="02040503050406030204" pitchFamily="18" charset="0"/>
+                                    </a:rPr>
+                                    <m:t>𝑒</m:t>
+                                  </m:r>
+                                </m:e>
+                              </m:d>
+                            </m:sup>
+                          </m:sSubSup>
+                          <m:r>
+                            <a:rPr lang="en-US" i="1">
+                              <a:latin typeface="Cambria Math" panose="02040503050406030204" pitchFamily="18" charset="0"/>
+                            </a:rPr>
+                            <m:t>⋅</m:t>
+                          </m:r>
+                          <m:r>
+                            <m:rPr>
+                              <m:sty m:val="p"/>
+                            </m:rPr>
+                            <a:rPr lang="en-US">
+                              <a:latin typeface="Cambria Math" panose="02040503050406030204" pitchFamily="18" charset="0"/>
+                            </a:rPr>
+                            <m:t>∇</m:t>
+                          </m:r>
+                          <m:sSubSup>
+                            <m:sSubSupPr>
+                              <m:ctrlPr>
+                                <a:rPr lang="en-US" i="1">
+                                  <a:latin typeface="Cambria Math" panose="02040503050406030204" pitchFamily="18" charset="0"/>
+                                </a:rPr>
+                              </m:ctrlPr>
+                            </m:sSubSupPr>
+                            <m:e>
+                              <m:r>
+                                <a:rPr lang="en-US" i="1">
+                                  <a:latin typeface="Cambria Math" panose="02040503050406030204" pitchFamily="18" charset="0"/>
+                                </a:rPr>
+                                <m:t>𝑁</m:t>
+                              </m:r>
+                            </m:e>
+                            <m:sub>
+                              <m:r>
+                                <a:rPr lang="en-US" i="1">
+                                  <a:latin typeface="Cambria Math" panose="02040503050406030204" pitchFamily="18" charset="0"/>
+                                </a:rPr>
+                                <m:t>𝑘</m:t>
+                              </m:r>
+                            </m:sub>
+                            <m:sup>
+                              <m:d>
+                                <m:dPr>
+                                  <m:ctrlPr>
+                                    <a:rPr lang="en-US" i="1">
+                                      <a:latin typeface="Cambria Math" panose="02040503050406030204" pitchFamily="18" charset="0"/>
+                                    </a:rPr>
+                                  </m:ctrlPr>
+                                </m:dPr>
+                                <m:e>
+                                  <m:r>
+                                    <a:rPr lang="en-US" i="1">
+                                      <a:latin typeface="Cambria Math" panose="02040503050406030204" pitchFamily="18" charset="0"/>
+                                    </a:rPr>
+                                    <m:t>𝑒</m:t>
+                                  </m:r>
+                                </m:e>
+                              </m:d>
+                            </m:sup>
+                          </m:sSubSup>
+                        </m:e>
+                      </m:nary>
+                      <m:r>
+                        <a:rPr lang="en-US" i="1">
+                          <a:latin typeface="Cambria Math" panose="02040503050406030204" pitchFamily="18" charset="0"/>
+                        </a:rPr>
+                        <m:t>=</m:t>
+                      </m:r>
+                      <m:f>
+                        <m:fPr>
+                          <m:ctrlPr>
+                            <a:rPr lang="en-US" i="1">
+                              <a:latin typeface="Cambria Math" panose="02040503050406030204" pitchFamily="18" charset="0"/>
+                            </a:rPr>
+                          </m:ctrlPr>
+                        </m:fPr>
+                        <m:num>
+                          <m:sSup>
+                            <m:sSupPr>
+                              <m:ctrlPr>
+                                <a:rPr lang="en-US" i="1">
+                                  <a:latin typeface="Cambria Math" panose="02040503050406030204" pitchFamily="18" charset="0"/>
+                                </a:rPr>
+                              </m:ctrlPr>
+                            </m:sSupPr>
+                            <m:e>
+                              <m:r>
+                                <a:rPr lang="en-US" i="1">
+                                  <a:latin typeface="Cambria Math" panose="02040503050406030204" pitchFamily="18" charset="0"/>
+                                </a:rPr>
+                                <m:t>𝜖</m:t>
+                              </m:r>
+                            </m:e>
+                            <m:sup>
+                              <m:d>
+                                <m:dPr>
+                                  <m:ctrlPr>
+                                    <a:rPr lang="en-US" i="1">
+                                      <a:latin typeface="Cambria Math" panose="02040503050406030204" pitchFamily="18" charset="0"/>
+                                    </a:rPr>
+                                  </m:ctrlPr>
+                                </m:dPr>
+                                <m:e>
+                                  <m:r>
+                                    <a:rPr lang="en-US" i="1">
+                                      <a:latin typeface="Cambria Math" panose="02040503050406030204" pitchFamily="18" charset="0"/>
+                                    </a:rPr>
+                                    <m:t>𝑒</m:t>
+                                  </m:r>
+                                </m:e>
+                              </m:d>
+                            </m:sup>
+                          </m:sSup>
+                        </m:num>
+                        <m:den>
+                          <m:r>
+                            <a:rPr lang="en-US" i="1">
+                              <a:latin typeface="Cambria Math" panose="02040503050406030204" pitchFamily="18" charset="0"/>
+                            </a:rPr>
+                            <m:t>2</m:t>
+                          </m:r>
+                          <m:sSup>
+                            <m:sSupPr>
+                              <m:ctrlPr>
+                                <a:rPr lang="en-US" i="1">
+                                  <a:latin typeface="Cambria Math" panose="02040503050406030204" pitchFamily="18" charset="0"/>
+                                </a:rPr>
+                              </m:ctrlPr>
+                            </m:sSupPr>
+                            <m:e>
+                              <m:r>
+                                <m:rPr>
+                                  <m:sty m:val="p"/>
+                                </m:rPr>
+                                <a:rPr lang="en-US">
+                                  <a:latin typeface="Cambria Math" panose="02040503050406030204" pitchFamily="18" charset="0"/>
+                                </a:rPr>
+                                <m:t>Δ</m:t>
+                              </m:r>
+                            </m:e>
+                            <m:sup>
+                              <m:d>
+                                <m:dPr>
+                                  <m:ctrlPr>
+                                    <a:rPr lang="en-US" i="1">
+                                      <a:latin typeface="Cambria Math" panose="02040503050406030204" pitchFamily="18" charset="0"/>
+                                    </a:rPr>
+                                  </m:ctrlPr>
+                                </m:dPr>
+                                <m:e>
+                                  <m:r>
+                                    <a:rPr lang="en-US" i="1">
+                                      <a:latin typeface="Cambria Math" panose="02040503050406030204" pitchFamily="18" charset="0"/>
+                                    </a:rPr>
+                                    <m:t>𝑒</m:t>
+                                  </m:r>
+                                </m:e>
+                              </m:d>
+                            </m:sup>
+                          </m:sSup>
+                        </m:den>
+                      </m:f>
+                      <m:d>
+                        <m:dPr>
+                          <m:ctrlPr>
+                            <a:rPr lang="en-US" i="1">
+                              <a:latin typeface="Cambria Math" panose="02040503050406030204" pitchFamily="18" charset="0"/>
+                            </a:rPr>
+                          </m:ctrlPr>
+                        </m:dPr>
+                        <m:e>
+                          <m:sSubSup>
+                            <m:sSubSupPr>
+                              <m:ctrlPr>
+                                <a:rPr lang="en-US" i="1">
+                                  <a:latin typeface="Cambria Math" panose="02040503050406030204" pitchFamily="18" charset="0"/>
+                                </a:rPr>
+                              </m:ctrlPr>
+                            </m:sSubSupPr>
+                            <m:e>
+                              <m:r>
+                                <a:rPr lang="en-US" i="1">
+                                  <a:latin typeface="Cambria Math" panose="02040503050406030204" pitchFamily="18" charset="0"/>
+                                </a:rPr>
+                                <m:t>𝑏</m:t>
+                              </m:r>
+                            </m:e>
+                            <m:sub>
+                              <m:r>
+                                <a:rPr lang="en-US" i="1">
+                                  <a:latin typeface="Cambria Math" panose="02040503050406030204" pitchFamily="18" charset="0"/>
+                                </a:rPr>
+                                <m:t>𝑙</m:t>
+                              </m:r>
+                            </m:sub>
+                            <m:sup>
+                              <m:d>
+                                <m:dPr>
+                                  <m:ctrlPr>
+                                    <a:rPr lang="en-US" i="1">
+                                      <a:latin typeface="Cambria Math" panose="02040503050406030204" pitchFamily="18" charset="0"/>
+                                    </a:rPr>
+                                  </m:ctrlPr>
+                                </m:dPr>
+                                <m:e>
+                                  <m:r>
+                                    <a:rPr lang="en-US" i="1">
+                                      <a:latin typeface="Cambria Math" panose="02040503050406030204" pitchFamily="18" charset="0"/>
+                                    </a:rPr>
+                                    <m:t>𝑒</m:t>
+                                  </m:r>
+                                </m:e>
+                              </m:d>
+                            </m:sup>
+                          </m:sSubSup>
+                          <m:sSubSup>
+                            <m:sSubSupPr>
+                              <m:ctrlPr>
+                                <a:rPr lang="en-US" i="1">
+                                  <a:latin typeface="Cambria Math" panose="02040503050406030204" pitchFamily="18" charset="0"/>
+                                </a:rPr>
+                              </m:ctrlPr>
+                            </m:sSubSupPr>
+                            <m:e>
+                              <m:r>
+                                <a:rPr lang="en-US" i="1">
+                                  <a:latin typeface="Cambria Math" panose="02040503050406030204" pitchFamily="18" charset="0"/>
+                                </a:rPr>
+                                <m:t>𝑏</m:t>
+                              </m:r>
+                            </m:e>
+                            <m:sub>
+                              <m:r>
+                                <a:rPr lang="en-US" i="1">
+                                  <a:latin typeface="Cambria Math" panose="02040503050406030204" pitchFamily="18" charset="0"/>
+                                </a:rPr>
+                                <m:t>𝑘</m:t>
+                              </m:r>
+                            </m:sub>
+                            <m:sup>
+                              <m:d>
+                                <m:dPr>
+                                  <m:ctrlPr>
+                                    <a:rPr lang="en-US" i="1">
+                                      <a:latin typeface="Cambria Math" panose="02040503050406030204" pitchFamily="18" charset="0"/>
+                                    </a:rPr>
+                                  </m:ctrlPr>
+                                </m:dPr>
+                                <m:e>
+                                  <m:r>
+                                    <a:rPr lang="en-US" i="1">
+                                      <a:latin typeface="Cambria Math" panose="02040503050406030204" pitchFamily="18" charset="0"/>
+                                    </a:rPr>
+                                    <m:t>𝑒</m:t>
+                                  </m:r>
+                                </m:e>
+                              </m:d>
+                            </m:sup>
+                          </m:sSubSup>
+                          <m:r>
+                            <a:rPr lang="en-US" i="1">
+                              <a:latin typeface="Cambria Math" panose="02040503050406030204" pitchFamily="18" charset="0"/>
+                            </a:rPr>
+                            <m:t>+</m:t>
+                          </m:r>
+                          <m:sSubSup>
+                            <m:sSubSupPr>
+                              <m:ctrlPr>
+                                <a:rPr lang="en-US" i="1">
+                                  <a:latin typeface="Cambria Math" panose="02040503050406030204" pitchFamily="18" charset="0"/>
+                                </a:rPr>
+                              </m:ctrlPr>
+                            </m:sSubSupPr>
+                            <m:e>
+                              <m:r>
+                                <a:rPr lang="en-US" i="1">
+                                  <a:latin typeface="Cambria Math" panose="02040503050406030204" pitchFamily="18" charset="0"/>
+                                </a:rPr>
+                                <m:t>𝑐</m:t>
+                              </m:r>
+                            </m:e>
+                            <m:sub>
+                              <m:r>
+                                <a:rPr lang="en-US" i="1">
+                                  <a:latin typeface="Cambria Math" panose="02040503050406030204" pitchFamily="18" charset="0"/>
+                                </a:rPr>
+                                <m:t>𝑙</m:t>
+                              </m:r>
+                            </m:sub>
+                            <m:sup>
+                              <m:d>
+                                <m:dPr>
+                                  <m:ctrlPr>
+                                    <a:rPr lang="en-US" i="1">
+                                      <a:latin typeface="Cambria Math" panose="02040503050406030204" pitchFamily="18" charset="0"/>
+                                    </a:rPr>
+                                  </m:ctrlPr>
+                                </m:dPr>
+                                <m:e>
+                                  <m:r>
+                                    <a:rPr lang="en-US" i="1">
+                                      <a:latin typeface="Cambria Math" panose="02040503050406030204" pitchFamily="18" charset="0"/>
+                                    </a:rPr>
+                                    <m:t>𝑒</m:t>
+                                  </m:r>
+                                </m:e>
+                              </m:d>
+                            </m:sup>
+                          </m:sSubSup>
+                          <m:sSubSup>
+                            <m:sSubSupPr>
+                              <m:ctrlPr>
+                                <a:rPr lang="en-US" i="1">
+                                  <a:latin typeface="Cambria Math" panose="02040503050406030204" pitchFamily="18" charset="0"/>
+                                </a:rPr>
+                              </m:ctrlPr>
+                            </m:sSubSupPr>
+                            <m:e>
+                              <m:r>
+                                <a:rPr lang="en-US" i="1">
+                                  <a:latin typeface="Cambria Math" panose="02040503050406030204" pitchFamily="18" charset="0"/>
+                                </a:rPr>
+                                <m:t>𝑐</m:t>
+                              </m:r>
+                            </m:e>
+                            <m:sub>
+                              <m:r>
+                                <a:rPr lang="en-US" i="1">
+                                  <a:latin typeface="Cambria Math" panose="02040503050406030204" pitchFamily="18" charset="0"/>
+                                </a:rPr>
+                                <m:t>𝑘</m:t>
+                              </m:r>
+                            </m:sub>
+                            <m:sup>
+                              <m:d>
+                                <m:dPr>
+                                  <m:ctrlPr>
+                                    <a:rPr lang="en-US" i="1">
+                                      <a:latin typeface="Cambria Math" panose="02040503050406030204" pitchFamily="18" charset="0"/>
+                                    </a:rPr>
+                                  </m:ctrlPr>
+                                </m:dPr>
+                                <m:e>
+                                  <m:r>
+                                    <a:rPr lang="en-US" i="1">
+                                      <a:latin typeface="Cambria Math" panose="02040503050406030204" pitchFamily="18" charset="0"/>
+                                    </a:rPr>
+                                    <m:t>𝑒</m:t>
+                                  </m:r>
+                                </m:e>
+                              </m:d>
+                            </m:sup>
+                          </m:sSubSup>
+                        </m:e>
+                      </m:d>
+                      <m:nary>
+                        <m:naryPr>
+                          <m:supHide m:val="on"/>
+                          <m:ctrlPr>
+                            <a:rPr lang="en-US" i="1">
+                              <a:latin typeface="Cambria Math" panose="02040503050406030204" pitchFamily="18" charset="0"/>
+                            </a:rPr>
+                          </m:ctrlPr>
+                        </m:naryPr>
+                        <m:sub>
+                          <m:sSup>
+                            <m:sSupPr>
+                              <m:ctrlPr>
+                                <a:rPr lang="en-US" i="1">
+                                  <a:latin typeface="Cambria Math" panose="02040503050406030204" pitchFamily="18" charset="0"/>
+                                </a:rPr>
+                              </m:ctrlPr>
+                            </m:sSupPr>
+                            <m:e>
+                              <m:r>
+                                <m:rPr>
+                                  <m:sty m:val="p"/>
+                                </m:rPr>
+                                <a:rPr lang="en-US">
+                                  <a:latin typeface="Cambria Math" panose="02040503050406030204" pitchFamily="18" charset="0"/>
+                                </a:rPr>
+                                <m:t>Ω</m:t>
+                              </m:r>
+                            </m:e>
+                            <m:sup>
+                              <m:d>
+                                <m:dPr>
+                                  <m:ctrlPr>
+                                    <a:rPr lang="en-US" i="1">
+                                      <a:latin typeface="Cambria Math" panose="02040503050406030204" pitchFamily="18" charset="0"/>
+                                    </a:rPr>
+                                  </m:ctrlPr>
+                                </m:dPr>
+                                <m:e>
+                                  <m:r>
+                                    <m:rPr>
+                                      <m:sty m:val="p"/>
+                                    </m:rPr>
+                                    <a:rPr lang="en-US">
+                                      <a:latin typeface="Cambria Math" panose="02040503050406030204" pitchFamily="18" charset="0"/>
+                                    </a:rPr>
+                                    <m:t>e</m:t>
+                                  </m:r>
+                                </m:e>
+                              </m:d>
+                            </m:sup>
+                          </m:sSup>
+                        </m:sub>
+                        <m:sup/>
+                        <m:e>
+                          <m:r>
+                            <a:rPr lang="en-US" b="0" i="1" smtClean="0">
+                              <a:latin typeface="Cambria Math" panose="02040503050406030204" pitchFamily="18" charset="0"/>
+                            </a:rPr>
+                            <m:t>𝑑</m:t>
+                          </m:r>
+                          <m:r>
+                            <m:rPr>
+                              <m:sty m:val="p"/>
+                            </m:rPr>
+                            <a:rPr lang="en-US" b="0" i="0" smtClean="0">
+                              <a:latin typeface="Cambria Math" panose="02040503050406030204" pitchFamily="18" charset="0"/>
+                            </a:rPr>
+                            <m:t>Ω</m:t>
+                          </m:r>
+                        </m:e>
+                      </m:nary>
+                    </m:oMath>
+                  </m:oMathPara>
+                </a14:m>
+                <a:endParaRPr lang="en-US" dirty="0"/>
+              </a:p>
+            </p:txBody>
+          </p:sp>
+        </mc:Choice>
+        <mc:Fallback>
+          <p:sp>
+            <p:nvSpPr>
+              <p:cNvPr id="63" name="TextBox 62">
+                <a:extLst>
+                  <a:ext uri="{FF2B5EF4-FFF2-40B4-BE49-F238E27FC236}">
+                    <a16:creationId xmlns:a16="http://schemas.microsoft.com/office/drawing/2014/main" id="{5BF989AD-99B5-1FCC-45E7-509312B99049}"/>
+                  </a:ext>
+                </a:extLst>
+              </p:cNvPr>
+              <p:cNvSpPr txBox="1">
+                <a:spLocks noRot="1" noChangeAspect="1" noMove="1" noResize="1" noEditPoints="1" noAdjustHandles="1" noChangeArrowheads="1" noChangeShapeType="1" noTextEdit="1"/>
+              </p:cNvSpPr>
+              <p:nvPr/>
+            </p:nvSpPr>
+            <p:spPr>
+              <a:xfrm>
+                <a:off x="4465690" y="6072212"/>
+                <a:ext cx="5784212" cy="637482"/>
+              </a:xfrm>
+              <a:prstGeom prst="rect">
+                <a:avLst/>
+              </a:prstGeom>
+              <a:blipFill>
+                <a:blip r:embed="rId15"/>
+                <a:stretch>
+                  <a:fillRect/>
+                </a:stretch>
+              </a:blipFill>
+            </p:spPr>
+            <p:txBody>
+              <a:bodyPr/>
+              <a:lstStyle/>
+              <a:p>
+                <a:r>
+                  <a:rPr lang="en-US">
+                    <a:noFill/>
+                  </a:rPr>
+                  <a:t> </a:t>
+                </a:r>
+              </a:p>
+            </p:txBody>
+          </p:sp>
+        </mc:Fallback>
+      </mc:AlternateContent>
+    </p:spTree>
+    <p:extLst>
+      <p:ext uri="{BB962C8B-B14F-4D97-AF65-F5344CB8AC3E}">
+        <p14:creationId xmlns:p14="http://schemas.microsoft.com/office/powerpoint/2010/main" val="1876412469"/>
+      </p:ext>
+    </p:extLst>
+  </p:cSld>
+  <p:clrMapOvr>
+    <a:masterClrMapping/>
+  </p:clrMapOvr>
+</p:sld>
+</file>
+
+<file path=ppt/slides/slide5.xml><?xml version="1.0" encoding="utf-8"?>
+<p:sld xmlns:a="http://schemas.openxmlformats.org/drawingml/2006/main" xmlns:r="http://schemas.openxmlformats.org/officeDocument/2006/relationships" xmlns:p="http://schemas.openxmlformats.org/presentationml/2006/main">
+  <p:cSld>
+    <p:spTree>
+      <p:nvGrpSpPr>
+        <p:cNvPr id="1" name=""/>
+        <p:cNvGrpSpPr/>
+        <p:nvPr/>
+      </p:nvGrpSpPr>
+      <p:grpSpPr>
+        <a:xfrm>
+          <a:off x="0" y="0"/>
+          <a:ext cx="0" cy="0"/>
+          <a:chOff x="0" y="0"/>
+          <a:chExt cx="0" cy="0"/>
+        </a:xfrm>
+      </p:grpSpPr>
+      <mc:AlternateContent xmlns:mc="http://schemas.openxmlformats.org/markup-compatibility/2006" xmlns:a14="http://schemas.microsoft.com/office/drawing/2010/main">
+        <mc:Choice Requires="a14">
+          <p:sp>
+            <p:nvSpPr>
               <p:cNvPr id="4" name="Rectangle 3">
                 <a:extLst>
                   <a:ext uri="{FF2B5EF4-FFF2-40B4-BE49-F238E27FC236}">
@@ -3461,7 +10815,10 @@
                 <a:pPr algn="ctr"/>
                 <a14:m>
                   <m:oMathPara xmlns:m="http://schemas.openxmlformats.org/officeDocument/2006/math">
-                    <m:oMath>
+                    <m:oMathParaPr>
+                      <m:jc m:val="centerGroup"/>
+                    </m:oMathParaPr>
+                    <m:oMath xmlns:m="http://schemas.openxmlformats.org/officeDocument/2006/math">
                       <m:sSub>
                         <m:sSubPr>
                           <m:ctrlPr>
@@ -3504,7 +10861,7 @@
             </p:txBody>
           </p:sp>
         </mc:Choice>
-        <mc:Fallback>
+        <mc:Fallback xmlns="">
           <p:sp>
             <p:nvSpPr>
               <p:cNvPr id="4" name="Rectangle 3">
@@ -3549,8 +10906,8 @@
           </p:sp>
         </mc:Fallback>
       </mc:AlternateContent>
-      <mc:AlternateContent xmlns:mc="http://schemas.openxmlformats.org/markup-compatibility/2006">
-        <mc:Choice xmlns:a14="http://schemas.microsoft.com/office/drawing/2010/main" Requires="a14">
+      <mc:AlternateContent xmlns:mc="http://schemas.openxmlformats.org/markup-compatibility/2006" xmlns:a14="http://schemas.microsoft.com/office/drawing/2010/main">
+        <mc:Choice Requires="a14">
           <p:sp>
             <p:nvSpPr>
               <p:cNvPr id="6" name="Rectangle 5">
@@ -3601,7 +10958,10 @@
                 <a:pPr algn="ctr"/>
                 <a14:m>
                   <m:oMathPara xmlns:m="http://schemas.openxmlformats.org/officeDocument/2006/math">
-                    <m:oMath>
+                    <m:oMathParaPr>
+                      <m:jc m:val="centerGroup"/>
+                    </m:oMathParaPr>
+                    <m:oMath xmlns:m="http://schemas.openxmlformats.org/officeDocument/2006/math">
                       <m:r>
                         <a:rPr lang="en-US" sz="3200" b="0" i="1" smtClean="0">
                           <a:solidFill>
@@ -3619,7 +10979,7 @@
             </p:txBody>
           </p:sp>
         </mc:Choice>
-        <mc:Fallback>
+        <mc:Fallback xmlns="">
           <p:sp>
             <p:nvSpPr>
               <p:cNvPr id="6" name="Rectangle 5">
@@ -3664,8 +11024,8 @@
           </p:sp>
         </mc:Fallback>
       </mc:AlternateContent>
-      <mc:AlternateContent xmlns:mc="http://schemas.openxmlformats.org/markup-compatibility/2006">
-        <mc:Choice xmlns:a14="http://schemas.microsoft.com/office/drawing/2010/main" Requires="a14">
+      <mc:AlternateContent xmlns:mc="http://schemas.openxmlformats.org/markup-compatibility/2006" xmlns:a14="http://schemas.microsoft.com/office/drawing/2010/main">
+        <mc:Choice Requires="a14">
           <p:sp>
             <p:nvSpPr>
               <p:cNvPr id="7" name="TextBox 6">
@@ -3694,9 +11054,13 @@
               </a:bodyPr>
               <a:lstStyle/>
               <a:p>
+                <a:pPr/>
                 <a14:m>
                   <m:oMathPara xmlns:m="http://schemas.openxmlformats.org/officeDocument/2006/math">
-                    <m:oMath>
+                    <m:oMathParaPr>
+                      <m:jc m:val="centerGroup"/>
+                    </m:oMathParaPr>
+                    <m:oMath xmlns:m="http://schemas.openxmlformats.org/officeDocument/2006/math">
                       <m:r>
                         <a:rPr lang="en-US" sz="3200" b="0" i="1" smtClean="0">
                           <a:latin typeface="Cambria Math" panose="02040503050406030204" pitchFamily="18" charset="0"/>
@@ -3711,7 +11075,7 @@
             </p:txBody>
           </p:sp>
         </mc:Choice>
-        <mc:Fallback>
+        <mc:Fallback xmlns="">
           <p:sp>
             <p:nvSpPr>
               <p:cNvPr id="7" name="TextBox 6">
@@ -3756,8 +11120,8 @@
           </p:sp>
         </mc:Fallback>
       </mc:AlternateContent>
-      <mc:AlternateContent xmlns:mc="http://schemas.openxmlformats.org/markup-compatibility/2006">
-        <mc:Choice xmlns:a14="http://schemas.microsoft.com/office/drawing/2010/main" Requires="a14">
+      <mc:AlternateContent xmlns:mc="http://schemas.openxmlformats.org/markup-compatibility/2006" xmlns:a14="http://schemas.microsoft.com/office/drawing/2010/main">
+        <mc:Choice Requires="a14">
           <p:sp>
             <p:nvSpPr>
               <p:cNvPr id="9" name="Rectangle 8">
@@ -3808,7 +11172,10 @@
                 <a:pPr algn="ctr"/>
                 <a14:m>
                   <m:oMathPara xmlns:m="http://schemas.openxmlformats.org/officeDocument/2006/math">
-                    <m:oMath>
+                    <m:oMathParaPr>
+                      <m:jc m:val="centerGroup"/>
+                    </m:oMathParaPr>
+                    <m:oMath xmlns:m="http://schemas.openxmlformats.org/officeDocument/2006/math">
                       <m:r>
                         <a:rPr lang="en-US" sz="3200" b="0" i="1" smtClean="0">
                           <a:solidFill>
@@ -3826,7 +11193,7 @@
             </p:txBody>
           </p:sp>
         </mc:Choice>
-        <mc:Fallback>
+        <mc:Fallback xmlns="">
           <p:sp>
             <p:nvSpPr>
               <p:cNvPr id="9" name="Rectangle 8">
@@ -3871,8 +11238,8 @@
           </p:sp>
         </mc:Fallback>
       </mc:AlternateContent>
-      <mc:AlternateContent xmlns:mc="http://schemas.openxmlformats.org/markup-compatibility/2006">
-        <mc:Choice xmlns:a14="http://schemas.microsoft.com/office/drawing/2010/main" Requires="a14">
+      <mc:AlternateContent xmlns:mc="http://schemas.openxmlformats.org/markup-compatibility/2006" xmlns:a14="http://schemas.microsoft.com/office/drawing/2010/main">
+        <mc:Choice Requires="a14">
           <p:sp>
             <p:nvSpPr>
               <p:cNvPr id="10" name="TextBox 9">
@@ -3919,7 +11286,7 @@
             </p:txBody>
           </p:sp>
         </mc:Choice>
-        <mc:Fallback>
+        <mc:Fallback xmlns="">
           <p:sp>
             <p:nvSpPr>
               <p:cNvPr id="10" name="TextBox 9">
@@ -3977,7 +11344,7 @@
 </p:sld>
 </file>
 
-<file path=ppt/slides/slide3.xml><?xml version="1.0" encoding="utf-8"?>
+<file path=ppt/slides/slide6.xml><?xml version="1.0" encoding="utf-8"?>
 <p:sld xmlns:a="http://schemas.openxmlformats.org/drawingml/2006/main" xmlns:r="http://schemas.openxmlformats.org/officeDocument/2006/relationships" xmlns:p="http://schemas.openxmlformats.org/presentationml/2006/main">
   <p:cSld>
     <p:spTree>
@@ -4000,8 +11367,8 @@
           <a:chExt cx="0" cy="0"/>
         </a:xfrm>
       </p:grpSpPr>
-      <mc:AlternateContent xmlns:mc="http://schemas.openxmlformats.org/markup-compatibility/2006">
-        <mc:Choice xmlns:a14="http://schemas.microsoft.com/office/drawing/2010/main" Requires="a14">
+      <mc:AlternateContent xmlns:mc="http://schemas.openxmlformats.org/markup-compatibility/2006" xmlns:a14="http://schemas.microsoft.com/office/drawing/2010/main">
+        <mc:Choice Requires="a14">
           <p:sp>
             <p:nvSpPr>
               <p:cNvPr id="4" name="Rectangle 3">
@@ -4052,7 +11419,10 @@
                 <a:pPr algn="ctr"/>
                 <a14:m>
                   <m:oMathPara xmlns:m="http://schemas.openxmlformats.org/officeDocument/2006/math">
-                    <m:oMath>
+                    <m:oMathParaPr>
+                      <m:jc m:val="centerGroup"/>
+                    </m:oMathParaPr>
+                    <m:oMath xmlns:m="http://schemas.openxmlformats.org/officeDocument/2006/math">
                       <m:sSub>
                         <m:sSubPr>
                           <m:ctrlPr>
@@ -4095,7 +11465,7 @@
             </p:txBody>
           </p:sp>
         </mc:Choice>
-        <mc:Fallback>
+        <mc:Fallback xmlns="">
           <p:sp>
             <p:nvSpPr>
               <p:cNvPr id="4" name="Rectangle 3">
@@ -4140,8 +11510,8 @@
           </p:sp>
         </mc:Fallback>
       </mc:AlternateContent>
-      <mc:AlternateContent xmlns:mc="http://schemas.openxmlformats.org/markup-compatibility/2006">
-        <mc:Choice xmlns:a14="http://schemas.microsoft.com/office/drawing/2010/main" Requires="a14">
+      <mc:AlternateContent xmlns:mc="http://schemas.openxmlformats.org/markup-compatibility/2006" xmlns:a14="http://schemas.microsoft.com/office/drawing/2010/main">
+        <mc:Choice Requires="a14">
           <p:sp>
             <p:nvSpPr>
               <p:cNvPr id="6" name="Rectangle 5">
@@ -4192,7 +11562,10 @@
                 <a:pPr algn="ctr"/>
                 <a14:m>
                   <m:oMathPara xmlns:m="http://schemas.openxmlformats.org/officeDocument/2006/math">
-                    <m:oMath>
+                    <m:oMathParaPr>
+                      <m:jc m:val="centerGroup"/>
+                    </m:oMathParaPr>
+                    <m:oMath xmlns:m="http://schemas.openxmlformats.org/officeDocument/2006/math">
                       <m:r>
                         <a:rPr lang="en-US" b="0" i="1" smtClean="0">
                           <a:solidFill>
@@ -4210,7 +11583,7 @@
             </p:txBody>
           </p:sp>
         </mc:Choice>
-        <mc:Fallback>
+        <mc:Fallback xmlns="">
           <p:sp>
             <p:nvSpPr>
               <p:cNvPr id="6" name="Rectangle 5">
@@ -4255,8 +11628,8 @@
           </p:sp>
         </mc:Fallback>
       </mc:AlternateContent>
-      <mc:AlternateContent xmlns:mc="http://schemas.openxmlformats.org/markup-compatibility/2006">
-        <mc:Choice xmlns:a14="http://schemas.microsoft.com/office/drawing/2010/main" Requires="a14">
+      <mc:AlternateContent xmlns:mc="http://schemas.openxmlformats.org/markup-compatibility/2006" xmlns:a14="http://schemas.microsoft.com/office/drawing/2010/main">
+        <mc:Choice Requires="a14">
           <p:sp>
             <p:nvSpPr>
               <p:cNvPr id="7" name="TextBox 6">
@@ -4285,9 +11658,13 @@
               </a:bodyPr>
               <a:lstStyle/>
               <a:p>
+                <a:pPr/>
                 <a14:m>
                   <m:oMathPara xmlns:m="http://schemas.openxmlformats.org/officeDocument/2006/math">
-                    <m:oMath>
+                    <m:oMathParaPr>
+                      <m:jc m:val="centerGroup"/>
+                    </m:oMathParaPr>
+                    <m:oMath xmlns:m="http://schemas.openxmlformats.org/officeDocument/2006/math">
                       <m:r>
                         <a:rPr lang="en-US" sz="3200" b="0" i="1" smtClean="0">
                           <a:latin typeface="Cambria Math" panose="02040503050406030204" pitchFamily="18" charset="0"/>
@@ -4302,7 +11679,7 @@
             </p:txBody>
           </p:sp>
         </mc:Choice>
-        <mc:Fallback>
+        <mc:Fallback xmlns="">
           <p:sp>
             <p:nvSpPr>
               <p:cNvPr id="7" name="TextBox 6">
@@ -4347,8 +11724,8 @@
           </p:sp>
         </mc:Fallback>
       </mc:AlternateContent>
-      <mc:AlternateContent xmlns:mc="http://schemas.openxmlformats.org/markup-compatibility/2006">
-        <mc:Choice xmlns:a14="http://schemas.microsoft.com/office/drawing/2010/main" Requires="a14">
+      <mc:AlternateContent xmlns:mc="http://schemas.openxmlformats.org/markup-compatibility/2006" xmlns:a14="http://schemas.microsoft.com/office/drawing/2010/main">
+        <mc:Choice Requires="a14">
           <p:sp>
             <p:nvSpPr>
               <p:cNvPr id="9" name="Rectangle 8">
@@ -4399,7 +11776,10 @@
                 <a:pPr algn="ctr"/>
                 <a14:m>
                   <m:oMathPara xmlns:m="http://schemas.openxmlformats.org/officeDocument/2006/math">
-                    <m:oMath>
+                    <m:oMathParaPr>
+                      <m:jc m:val="centerGroup"/>
+                    </m:oMathParaPr>
+                    <m:oMath xmlns:m="http://schemas.openxmlformats.org/officeDocument/2006/math">
                       <m:r>
                         <a:rPr lang="en-US" b="0" i="1" smtClean="0">
                           <a:solidFill>
@@ -4417,7 +11797,7 @@
             </p:txBody>
           </p:sp>
         </mc:Choice>
-        <mc:Fallback>
+        <mc:Fallback xmlns="">
           <p:sp>
             <p:nvSpPr>
               <p:cNvPr id="9" name="Rectangle 8">
@@ -4795,8 +12175,8 @@
           </a:p>
         </p:txBody>
       </p:sp>
-      <mc:AlternateContent xmlns:mc="http://schemas.openxmlformats.org/markup-compatibility/2006">
-        <mc:Choice xmlns:a14="http://schemas.microsoft.com/office/drawing/2010/main" Requires="a14">
+      <mc:AlternateContent xmlns:mc="http://schemas.openxmlformats.org/markup-compatibility/2006" xmlns:a14="http://schemas.microsoft.com/office/drawing/2010/main">
+        <mc:Choice Requires="a14">
           <p:sp>
             <p:nvSpPr>
               <p:cNvPr id="18" name="TextBox 17">
@@ -4825,9 +12205,13 @@
               </a:bodyPr>
               <a:lstStyle/>
               <a:p>
+                <a:pPr/>
                 <a14:m>
                   <m:oMathPara xmlns:m="http://schemas.openxmlformats.org/officeDocument/2006/math">
-                    <m:oMath>
+                    <m:oMathParaPr>
+                      <m:jc m:val="centerGroup"/>
+                    </m:oMathParaPr>
+                    <m:oMath xmlns:m="http://schemas.openxmlformats.org/officeDocument/2006/math">
                       <m:r>
                         <a:rPr lang="en-US" b="0" i="1" smtClean="0">
                           <a:latin typeface="Cambria Math" panose="02040503050406030204" pitchFamily="18" charset="0"/>
@@ -4842,7 +12226,7 @@
             </p:txBody>
           </p:sp>
         </mc:Choice>
-        <mc:Fallback>
+        <mc:Fallback xmlns="">
           <p:sp>
             <p:nvSpPr>
               <p:cNvPr id="18" name="TextBox 17">
@@ -4967,8 +12351,8 @@
           </a:fontRef>
         </p:style>
       </p:cxnSp>
-      <mc:AlternateContent xmlns:mc="http://schemas.openxmlformats.org/markup-compatibility/2006">
-        <mc:Choice xmlns:a14="http://schemas.microsoft.com/office/drawing/2010/main" Requires="a14">
+      <mc:AlternateContent xmlns:mc="http://schemas.openxmlformats.org/markup-compatibility/2006" xmlns:a14="http://schemas.microsoft.com/office/drawing/2010/main">
+        <mc:Choice Requires="a14">
           <p:sp>
             <p:nvSpPr>
               <p:cNvPr id="22" name="TextBox 21">
@@ -5000,7 +12384,10 @@
                 <a:pPr/>
                 <a14:m>
                   <m:oMathPara xmlns:m="http://schemas.openxmlformats.org/officeDocument/2006/math">
-                    <m:oMath>
+                    <m:oMathParaPr>
+                      <m:jc m:val="centerGroup"/>
+                    </m:oMathParaPr>
+                    <m:oMath xmlns:m="http://schemas.openxmlformats.org/officeDocument/2006/math">
                       <m:r>
                         <a:rPr lang="en-US" b="0" i="1" smtClean="0">
                           <a:latin typeface="Cambria Math" panose="02040503050406030204" pitchFamily="18" charset="0"/>
@@ -5015,7 +12402,7 @@
             </p:txBody>
           </p:sp>
         </mc:Choice>
-        <mc:Fallback>
+        <mc:Fallback xmlns="">
           <p:sp>
             <p:nvSpPr>
               <p:cNvPr id="22" name="TextBox 21">
@@ -6311,8 +13698,8 @@
           </p:txBody>
         </p:sp>
       </p:grpSp>
-      <mc:AlternateContent xmlns:mc="http://schemas.openxmlformats.org/markup-compatibility/2006">
-        <mc:Choice xmlns:a14="http://schemas.microsoft.com/office/drawing/2010/main" Requires="a14">
+      <mc:AlternateContent xmlns:mc="http://schemas.openxmlformats.org/markup-compatibility/2006" xmlns:a14="http://schemas.microsoft.com/office/drawing/2010/main">
+        <mc:Choice Requires="a14">
           <p:sp>
             <p:nvSpPr>
               <p:cNvPr id="54" name="TextBox 53">
@@ -6344,7 +13731,10 @@
                 <a:pPr/>
                 <a14:m>
                   <m:oMathPara xmlns:m="http://schemas.openxmlformats.org/officeDocument/2006/math">
-                    <m:oMath>
+                    <m:oMathParaPr>
+                      <m:jc m:val="centerGroup"/>
+                    </m:oMathParaPr>
+                    <m:oMath xmlns:m="http://schemas.openxmlformats.org/officeDocument/2006/math">
                       <m:r>
                         <a:rPr lang="en-US" sz="3200" b="0" i="1" smtClean="0">
                           <a:latin typeface="Cambria Math" panose="02040503050406030204" pitchFamily="18" charset="0"/>
@@ -6359,7 +13749,7 @@
             </p:txBody>
           </p:sp>
         </mc:Choice>
-        <mc:Fallback>
+        <mc:Fallback xmlns="">
           <p:sp>
             <p:nvSpPr>
               <p:cNvPr id="54" name="TextBox 53">
@@ -6518,8 +13908,8 @@
           </a:p>
         </p:txBody>
       </p:sp>
-      <mc:AlternateContent xmlns:mc="http://schemas.openxmlformats.org/markup-compatibility/2006">
-        <mc:Choice xmlns:a14="http://schemas.microsoft.com/office/drawing/2010/main" Requires="a14">
+      <mc:AlternateContent xmlns:mc="http://schemas.openxmlformats.org/markup-compatibility/2006" xmlns:a14="http://schemas.microsoft.com/office/drawing/2010/main">
+        <mc:Choice Requires="a14">
           <p:sp>
             <p:nvSpPr>
               <p:cNvPr id="60" name="Rectangle 59">
@@ -6575,7 +13965,10 @@
                 <a:pPr algn="ctr"/>
                 <a14:m>
                   <m:oMathPara xmlns:m="http://schemas.openxmlformats.org/officeDocument/2006/math">
-                    <m:oMath>
+                    <m:oMathParaPr>
+                      <m:jc m:val="centerGroup"/>
+                    </m:oMathParaPr>
+                    <m:oMath xmlns:m="http://schemas.openxmlformats.org/officeDocument/2006/math">
                       <m:sSub>
                         <m:sSubPr>
                           <m:ctrlPr>
@@ -6618,7 +14011,7 @@
             </p:txBody>
           </p:sp>
         </mc:Choice>
-        <mc:Fallback>
+        <mc:Fallback xmlns="">
           <p:sp>
             <p:nvSpPr>
               <p:cNvPr id="60" name="Rectangle 59">
@@ -6807,8 +14200,8 @@
           </a:fontRef>
         </p:style>
       </p:cxnSp>
-      <mc:AlternateContent xmlns:mc="http://schemas.openxmlformats.org/markup-compatibility/2006">
-        <mc:Choice xmlns:a14="http://schemas.microsoft.com/office/drawing/2010/main" Requires="a14">
+      <mc:AlternateContent xmlns:mc="http://schemas.openxmlformats.org/markup-compatibility/2006" xmlns:a14="http://schemas.microsoft.com/office/drawing/2010/main">
+        <mc:Choice Requires="a14">
           <p:sp>
             <p:nvSpPr>
               <p:cNvPr id="67" name="TextBox 66">
@@ -6840,7 +14233,10 @@
                 <a:pPr/>
                 <a14:m>
                   <m:oMathPara xmlns:m="http://schemas.openxmlformats.org/officeDocument/2006/math">
-                    <m:oMath>
+                    <m:oMathParaPr>
+                      <m:jc m:val="centerGroup"/>
+                    </m:oMathParaPr>
+                    <m:oMath xmlns:m="http://schemas.openxmlformats.org/officeDocument/2006/math">
                       <m:sSub>
                         <m:sSubPr>
                           <m:ctrlPr>
@@ -6874,7 +14270,7 @@
             </p:txBody>
           </p:sp>
         </mc:Choice>
-        <mc:Fallback>
+        <mc:Fallback xmlns="">
           <p:sp>
             <p:nvSpPr>
               <p:cNvPr id="67" name="TextBox 66">
@@ -6960,8 +14356,8 @@
           </a:fontRef>
         </p:style>
       </p:cxnSp>
-      <mc:AlternateContent xmlns:mc="http://schemas.openxmlformats.org/markup-compatibility/2006">
-        <mc:Choice xmlns:a14="http://schemas.microsoft.com/office/drawing/2010/main" Requires="a14">
+      <mc:AlternateContent xmlns:mc="http://schemas.openxmlformats.org/markup-compatibility/2006" xmlns:a14="http://schemas.microsoft.com/office/drawing/2010/main">
+        <mc:Choice Requires="a14">
           <p:sp>
             <p:nvSpPr>
               <p:cNvPr id="73" name="TextBox 72">
@@ -6993,7 +14389,10 @@
                 <a:pPr/>
                 <a14:m>
                   <m:oMathPara xmlns:m="http://schemas.openxmlformats.org/officeDocument/2006/math">
-                    <m:oMath>
+                    <m:oMathParaPr>
+                      <m:jc m:val="centerGroup"/>
+                    </m:oMathParaPr>
+                    <m:oMath xmlns:m="http://schemas.openxmlformats.org/officeDocument/2006/math">
                       <m:sSub>
                         <m:sSubPr>
                           <m:ctrlPr>
@@ -7033,7 +14432,7 @@
             </p:txBody>
           </p:sp>
         </mc:Choice>
-        <mc:Fallback>
+        <mc:Fallback xmlns="">
           <p:sp>
             <p:nvSpPr>
               <p:cNvPr id="73" name="TextBox 72">
@@ -7119,8 +14518,8 @@
           </a:fontRef>
         </p:style>
       </p:cxnSp>
-      <mc:AlternateContent xmlns:mc="http://schemas.openxmlformats.org/markup-compatibility/2006">
-        <mc:Choice xmlns:a14="http://schemas.microsoft.com/office/drawing/2010/main" Requires="a14">
+      <mc:AlternateContent xmlns:mc="http://schemas.openxmlformats.org/markup-compatibility/2006" xmlns:a14="http://schemas.microsoft.com/office/drawing/2010/main">
+        <mc:Choice Requires="a14">
           <p:sp>
             <p:nvSpPr>
               <p:cNvPr id="77" name="TextBox 76">
@@ -7187,7 +14586,7 @@
             </p:txBody>
           </p:sp>
         </mc:Choice>
-        <mc:Fallback>
+        <mc:Fallback xmlns="">
           <p:sp>
             <p:nvSpPr>
               <p:cNvPr id="77" name="TextBox 76">
@@ -7236,6 +14635,1167 @@
     <p:extLst>
       <p:ext uri="{BB962C8B-B14F-4D97-AF65-F5344CB8AC3E}">
         <p14:creationId xmlns:p14="http://schemas.microsoft.com/office/powerpoint/2010/main" val="1578907209"/>
+      </p:ext>
+    </p:extLst>
+  </p:cSld>
+  <p:clrMapOvr>
+    <a:masterClrMapping/>
+  </p:clrMapOvr>
+</p:sld>
+</file>
+
+<file path=ppt/slides/slide7.xml><?xml version="1.0" encoding="utf-8"?>
+<p:sld xmlns:a="http://schemas.openxmlformats.org/drawingml/2006/main" xmlns:r="http://schemas.openxmlformats.org/officeDocument/2006/relationships" xmlns:p="http://schemas.openxmlformats.org/presentationml/2006/main">
+  <p:cSld>
+    <p:spTree>
+      <p:nvGrpSpPr>
+        <p:cNvPr id="1" name=""/>
+        <p:cNvGrpSpPr/>
+        <p:nvPr/>
+      </p:nvGrpSpPr>
+      <p:grpSpPr>
+        <a:xfrm>
+          <a:off x="0" y="0"/>
+          <a:ext cx="0" cy="0"/>
+          <a:chOff x="0" y="0"/>
+          <a:chExt cx="0" cy="0"/>
+        </a:xfrm>
+      </p:grpSpPr>
+      <mc:AlternateContent xmlns:mc="http://schemas.openxmlformats.org/markup-compatibility/2006">
+        <mc:Choice xmlns:a14="http://schemas.microsoft.com/office/drawing/2010/main" Requires="a14">
+          <p:sp>
+            <p:nvSpPr>
+              <p:cNvPr id="4" name="TextBox 3">
+                <a:extLst>
+                  <a:ext uri="{FF2B5EF4-FFF2-40B4-BE49-F238E27FC236}">
+                    <a16:creationId xmlns:a16="http://schemas.microsoft.com/office/drawing/2014/main" id="{E2F581BA-CA52-0EF9-5910-8F79CA719441}"/>
+                  </a:ext>
+                </a:extLst>
+              </p:cNvPr>
+              <p:cNvSpPr txBox="1"/>
+              <p:nvPr/>
+            </p:nvSpPr>
+            <p:spPr>
+              <a:xfrm>
+                <a:off x="508000" y="285750"/>
+                <a:ext cx="3661259" cy="574003"/>
+              </a:xfrm>
+              <a:prstGeom prst="rect">
+                <a:avLst/>
+              </a:prstGeom>
+              <a:noFill/>
+            </p:spPr>
+            <p:txBody>
+              <a:bodyPr wrap="none" lIns="0" tIns="0" rIns="0" bIns="0" rtlCol="0">
+                <a:spAutoFit/>
+              </a:bodyPr>
+              <a:lstStyle/>
+              <a:p>
+                <a14:m>
+                  <m:oMathPara xmlns:m="http://schemas.openxmlformats.org/officeDocument/2006/math">
+                    <m:oMathParaPr>
+                      <m:jc m:val="centerGroup"/>
+                    </m:oMathParaPr>
+                    <m:oMath xmlns:m="http://schemas.openxmlformats.org/officeDocument/2006/math">
+                      <m:f>
+                        <m:fPr>
+                          <m:ctrlPr>
+                            <a:rPr lang="en-US" b="0" i="1" smtClean="0">
+                              <a:latin typeface="Cambria Math" panose="02040503050406030204" pitchFamily="18" charset="0"/>
+                            </a:rPr>
+                          </m:ctrlPr>
+                        </m:fPr>
+                        <m:num>
+                          <m:r>
+                            <a:rPr lang="en-US" b="0" i="1" smtClean="0">
+                              <a:latin typeface="Cambria Math" panose="02040503050406030204" pitchFamily="18" charset="0"/>
+                            </a:rPr>
+                            <m:t>𝜕</m:t>
+                          </m:r>
+                        </m:num>
+                        <m:den>
+                          <m:r>
+                            <a:rPr lang="en-US" b="0" i="1" smtClean="0">
+                              <a:latin typeface="Cambria Math" panose="02040503050406030204" pitchFamily="18" charset="0"/>
+                            </a:rPr>
+                            <m:t>𝜕</m:t>
+                          </m:r>
+                          <m:r>
+                            <a:rPr lang="en-US" b="0" i="1" smtClean="0">
+                              <a:latin typeface="Cambria Math" panose="02040503050406030204" pitchFamily="18" charset="0"/>
+                            </a:rPr>
+                            <m:t>𝑧</m:t>
+                          </m:r>
+                        </m:den>
+                      </m:f>
+                      <m:f>
+                        <m:fPr>
+                          <m:ctrlPr>
+                            <a:rPr lang="en-US" b="0" i="1" smtClean="0">
+                              <a:latin typeface="Cambria Math" panose="02040503050406030204" pitchFamily="18" charset="0"/>
+                            </a:rPr>
+                          </m:ctrlPr>
+                        </m:fPr>
+                        <m:num>
+                          <m:r>
+                            <a:rPr lang="en-US" b="0" i="1" smtClean="0">
+                              <a:latin typeface="Cambria Math" panose="02040503050406030204" pitchFamily="18" charset="0"/>
+                            </a:rPr>
+                            <m:t>1</m:t>
+                          </m:r>
+                        </m:num>
+                        <m:den>
+                          <m:sSub>
+                            <m:sSubPr>
+                              <m:ctrlPr>
+                                <a:rPr lang="en-US" b="0" i="1" smtClean="0">
+                                  <a:latin typeface="Cambria Math" panose="02040503050406030204" pitchFamily="18" charset="0"/>
+                                </a:rPr>
+                              </m:ctrlPr>
+                            </m:sSubPr>
+                            <m:e>
+                              <m:r>
+                                <a:rPr lang="en-US" b="0" i="1" smtClean="0">
+                                  <a:latin typeface="Cambria Math" panose="02040503050406030204" pitchFamily="18" charset="0"/>
+                                </a:rPr>
+                                <m:t>𝜖</m:t>
+                              </m:r>
+                            </m:e>
+                            <m:sub>
+                              <m:r>
+                                <a:rPr lang="en-US" b="0" i="1" smtClean="0">
+                                  <a:latin typeface="Cambria Math" panose="02040503050406030204" pitchFamily="18" charset="0"/>
+                                </a:rPr>
+                                <m:t>𝑟</m:t>
+                              </m:r>
+                            </m:sub>
+                          </m:sSub>
+                        </m:den>
+                      </m:f>
+                      <m:f>
+                        <m:fPr>
+                          <m:ctrlPr>
+                            <a:rPr lang="en-US" b="0" i="1" smtClean="0">
+                              <a:latin typeface="Cambria Math" panose="02040503050406030204" pitchFamily="18" charset="0"/>
+                            </a:rPr>
+                          </m:ctrlPr>
+                        </m:fPr>
+                        <m:num>
+                          <m:r>
+                            <a:rPr lang="en-US" b="0" i="1" smtClean="0">
+                              <a:latin typeface="Cambria Math" panose="02040503050406030204" pitchFamily="18" charset="0"/>
+                            </a:rPr>
+                            <m:t>𝜕</m:t>
+                          </m:r>
+                          <m:sSub>
+                            <m:sSubPr>
+                              <m:ctrlPr>
+                                <a:rPr lang="en-US" b="0" i="1" smtClean="0">
+                                  <a:latin typeface="Cambria Math" panose="02040503050406030204" pitchFamily="18" charset="0"/>
+                                </a:rPr>
+                              </m:ctrlPr>
+                            </m:sSubPr>
+                            <m:e>
+                              <m:r>
+                                <a:rPr lang="en-US" b="0" i="1" smtClean="0">
+                                  <a:latin typeface="Cambria Math" panose="02040503050406030204" pitchFamily="18" charset="0"/>
+                                </a:rPr>
+                                <m:t>𝐻</m:t>
+                              </m:r>
+                            </m:e>
+                            <m:sub>
+                              <m:r>
+                                <a:rPr lang="en-US" b="0" i="1" smtClean="0">
+                                  <a:latin typeface="Cambria Math" panose="02040503050406030204" pitchFamily="18" charset="0"/>
+                                </a:rPr>
+                                <m:t>𝑥</m:t>
+                              </m:r>
+                            </m:sub>
+                          </m:sSub>
+                        </m:num>
+                        <m:den>
+                          <m:r>
+                            <a:rPr lang="en-US" b="0" i="1" smtClean="0">
+                              <a:latin typeface="Cambria Math" panose="02040503050406030204" pitchFamily="18" charset="0"/>
+                            </a:rPr>
+                            <m:t>𝜕</m:t>
+                          </m:r>
+                          <m:r>
+                            <a:rPr lang="en-US" b="0" i="1" smtClean="0">
+                              <a:latin typeface="Cambria Math" panose="02040503050406030204" pitchFamily="18" charset="0"/>
+                            </a:rPr>
+                            <m:t>𝑧</m:t>
+                          </m:r>
+                        </m:den>
+                      </m:f>
+                      <m:r>
+                        <a:rPr lang="en-US" b="0" i="1" smtClean="0">
+                          <a:latin typeface="Cambria Math" panose="02040503050406030204" pitchFamily="18" charset="0"/>
+                        </a:rPr>
+                        <m:t>+</m:t>
+                      </m:r>
+                      <m:f>
+                        <m:fPr>
+                          <m:ctrlPr>
+                            <a:rPr lang="en-US" b="0" i="1" smtClean="0">
+                              <a:latin typeface="Cambria Math" panose="02040503050406030204" pitchFamily="18" charset="0"/>
+                            </a:rPr>
+                          </m:ctrlPr>
+                        </m:fPr>
+                        <m:num>
+                          <m:r>
+                            <a:rPr lang="en-US" b="0" i="1" smtClean="0">
+                              <a:latin typeface="Cambria Math" panose="02040503050406030204" pitchFamily="18" charset="0"/>
+                            </a:rPr>
+                            <m:t>𝜕</m:t>
+                          </m:r>
+                        </m:num>
+                        <m:den>
+                          <m:r>
+                            <a:rPr lang="en-US" b="0" i="1" smtClean="0">
+                              <a:latin typeface="Cambria Math" panose="02040503050406030204" pitchFamily="18" charset="0"/>
+                            </a:rPr>
+                            <m:t>𝜕</m:t>
+                          </m:r>
+                          <m:r>
+                            <a:rPr lang="en-US" b="0" i="1" smtClean="0">
+                              <a:latin typeface="Cambria Math" panose="02040503050406030204" pitchFamily="18" charset="0"/>
+                            </a:rPr>
+                            <m:t>𝑦</m:t>
+                          </m:r>
+                        </m:den>
+                      </m:f>
+                      <m:f>
+                        <m:fPr>
+                          <m:ctrlPr>
+                            <a:rPr lang="en-US" b="0" i="1" smtClean="0">
+                              <a:latin typeface="Cambria Math" panose="02040503050406030204" pitchFamily="18" charset="0"/>
+                            </a:rPr>
+                          </m:ctrlPr>
+                        </m:fPr>
+                        <m:num>
+                          <m:r>
+                            <a:rPr lang="en-US" b="0" i="1" smtClean="0">
+                              <a:latin typeface="Cambria Math" panose="02040503050406030204" pitchFamily="18" charset="0"/>
+                            </a:rPr>
+                            <m:t>1</m:t>
+                          </m:r>
+                        </m:num>
+                        <m:den>
+                          <m:sSub>
+                            <m:sSubPr>
+                              <m:ctrlPr>
+                                <a:rPr lang="en-US" b="0" i="1" smtClean="0">
+                                  <a:latin typeface="Cambria Math" panose="02040503050406030204" pitchFamily="18" charset="0"/>
+                                </a:rPr>
+                              </m:ctrlPr>
+                            </m:sSubPr>
+                            <m:e>
+                              <m:r>
+                                <a:rPr lang="en-US" b="0" i="1" smtClean="0">
+                                  <a:latin typeface="Cambria Math" panose="02040503050406030204" pitchFamily="18" charset="0"/>
+                                </a:rPr>
+                                <m:t>𝜖</m:t>
+                              </m:r>
+                            </m:e>
+                            <m:sub>
+                              <m:r>
+                                <a:rPr lang="en-US" b="0" i="1" smtClean="0">
+                                  <a:latin typeface="Cambria Math" panose="02040503050406030204" pitchFamily="18" charset="0"/>
+                                </a:rPr>
+                                <m:t>𝑟</m:t>
+                              </m:r>
+                            </m:sub>
+                          </m:sSub>
+                        </m:den>
+                      </m:f>
+                      <m:f>
+                        <m:fPr>
+                          <m:ctrlPr>
+                            <a:rPr lang="en-US" b="0" i="1" smtClean="0">
+                              <a:latin typeface="Cambria Math" panose="02040503050406030204" pitchFamily="18" charset="0"/>
+                            </a:rPr>
+                          </m:ctrlPr>
+                        </m:fPr>
+                        <m:num>
+                          <m:r>
+                            <a:rPr lang="en-US" b="0" i="1" smtClean="0">
+                              <a:latin typeface="Cambria Math" panose="02040503050406030204" pitchFamily="18" charset="0"/>
+                            </a:rPr>
+                            <m:t>𝜕</m:t>
+                          </m:r>
+                          <m:sSub>
+                            <m:sSubPr>
+                              <m:ctrlPr>
+                                <a:rPr lang="en-US" b="0" i="1" smtClean="0">
+                                  <a:latin typeface="Cambria Math" panose="02040503050406030204" pitchFamily="18" charset="0"/>
+                                </a:rPr>
+                              </m:ctrlPr>
+                            </m:sSubPr>
+                            <m:e>
+                              <m:r>
+                                <a:rPr lang="en-US" b="0" i="1" smtClean="0">
+                                  <a:latin typeface="Cambria Math" panose="02040503050406030204" pitchFamily="18" charset="0"/>
+                                </a:rPr>
+                                <m:t>𝐻</m:t>
+                              </m:r>
+                            </m:e>
+                            <m:sub>
+                              <m:r>
+                                <a:rPr lang="en-US" b="0" i="1" smtClean="0">
+                                  <a:latin typeface="Cambria Math" panose="02040503050406030204" pitchFamily="18" charset="0"/>
+                                </a:rPr>
+                                <m:t>𝑥</m:t>
+                              </m:r>
+                            </m:sub>
+                          </m:sSub>
+                        </m:num>
+                        <m:den>
+                          <m:r>
+                            <a:rPr lang="en-US" b="0" i="1" smtClean="0">
+                              <a:latin typeface="Cambria Math" panose="02040503050406030204" pitchFamily="18" charset="0"/>
+                            </a:rPr>
+                            <m:t>𝜕</m:t>
+                          </m:r>
+                          <m:r>
+                            <a:rPr lang="en-US" b="0" i="1" smtClean="0">
+                              <a:latin typeface="Cambria Math" panose="02040503050406030204" pitchFamily="18" charset="0"/>
+                            </a:rPr>
+                            <m:t>𝑦</m:t>
+                          </m:r>
+                        </m:den>
+                      </m:f>
+                      <m:r>
+                        <a:rPr lang="en-US" b="0" i="1" smtClean="0">
+                          <a:latin typeface="Cambria Math" panose="02040503050406030204" pitchFamily="18" charset="0"/>
+                        </a:rPr>
+                        <m:t>+</m:t>
+                      </m:r>
+                      <m:sSubSup>
+                        <m:sSubSupPr>
+                          <m:ctrlPr>
+                            <a:rPr lang="en-US" b="0" i="1" smtClean="0">
+                              <a:latin typeface="Cambria Math" panose="02040503050406030204" pitchFamily="18" charset="0"/>
+                            </a:rPr>
+                          </m:ctrlPr>
+                        </m:sSubSupPr>
+                        <m:e>
+                          <m:r>
+                            <a:rPr lang="en-US" b="0" i="1" smtClean="0">
+                              <a:latin typeface="Cambria Math" panose="02040503050406030204" pitchFamily="18" charset="0"/>
+                            </a:rPr>
+                            <m:t>𝑘</m:t>
+                          </m:r>
+                        </m:e>
+                        <m:sub>
+                          <m:r>
+                            <a:rPr lang="en-US" b="0" i="1" smtClean="0">
+                              <a:latin typeface="Cambria Math" panose="02040503050406030204" pitchFamily="18" charset="0"/>
+                            </a:rPr>
+                            <m:t>0</m:t>
+                          </m:r>
+                        </m:sub>
+                        <m:sup>
+                          <m:r>
+                            <a:rPr lang="en-US" b="0" i="1" smtClean="0">
+                              <a:latin typeface="Cambria Math" panose="02040503050406030204" pitchFamily="18" charset="0"/>
+                            </a:rPr>
+                            <m:t>2</m:t>
+                          </m:r>
+                        </m:sup>
+                      </m:sSubSup>
+                      <m:sSub>
+                        <m:sSubPr>
+                          <m:ctrlPr>
+                            <a:rPr lang="en-US" b="0" i="1" smtClean="0">
+                              <a:latin typeface="Cambria Math" panose="02040503050406030204" pitchFamily="18" charset="0"/>
+                            </a:rPr>
+                          </m:ctrlPr>
+                        </m:sSubPr>
+                        <m:e>
+                          <m:r>
+                            <a:rPr lang="en-US" b="0" i="1" smtClean="0">
+                              <a:latin typeface="Cambria Math" panose="02040503050406030204" pitchFamily="18" charset="0"/>
+                            </a:rPr>
+                            <m:t>𝜇</m:t>
+                          </m:r>
+                        </m:e>
+                        <m:sub>
+                          <m:r>
+                            <a:rPr lang="en-US" b="0" i="1" smtClean="0">
+                              <a:latin typeface="Cambria Math" panose="02040503050406030204" pitchFamily="18" charset="0"/>
+                            </a:rPr>
+                            <m:t>𝑟</m:t>
+                          </m:r>
+                        </m:sub>
+                      </m:sSub>
+                      <m:sSub>
+                        <m:sSubPr>
+                          <m:ctrlPr>
+                            <a:rPr lang="en-US" b="0" i="1" smtClean="0">
+                              <a:latin typeface="Cambria Math" panose="02040503050406030204" pitchFamily="18" charset="0"/>
+                            </a:rPr>
+                          </m:ctrlPr>
+                        </m:sSubPr>
+                        <m:e>
+                          <m:r>
+                            <a:rPr lang="en-US" b="0" i="1" smtClean="0">
+                              <a:latin typeface="Cambria Math" panose="02040503050406030204" pitchFamily="18" charset="0"/>
+                            </a:rPr>
+                            <m:t>𝐻</m:t>
+                          </m:r>
+                        </m:e>
+                        <m:sub>
+                          <m:r>
+                            <a:rPr lang="en-US" b="0" i="1" smtClean="0">
+                              <a:latin typeface="Cambria Math" panose="02040503050406030204" pitchFamily="18" charset="0"/>
+                            </a:rPr>
+                            <m:t>𝑥</m:t>
+                          </m:r>
+                        </m:sub>
+                      </m:sSub>
+                      <m:r>
+                        <a:rPr lang="en-US" b="0" i="1" smtClean="0">
+                          <a:latin typeface="Cambria Math" panose="02040503050406030204" pitchFamily="18" charset="0"/>
+                        </a:rPr>
+                        <m:t>=0</m:t>
+                      </m:r>
+                    </m:oMath>
+                  </m:oMathPara>
+                </a14:m>
+                <a:endParaRPr lang="en-US" dirty="0"/>
+              </a:p>
+            </p:txBody>
+          </p:sp>
+        </mc:Choice>
+        <mc:Fallback>
+          <p:sp>
+            <p:nvSpPr>
+              <p:cNvPr id="4" name="TextBox 3">
+                <a:extLst>
+                  <a:ext uri="{FF2B5EF4-FFF2-40B4-BE49-F238E27FC236}">
+                    <a16:creationId xmlns:a16="http://schemas.microsoft.com/office/drawing/2014/main" id="{E2F581BA-CA52-0EF9-5910-8F79CA719441}"/>
+                  </a:ext>
+                </a:extLst>
+              </p:cNvPr>
+              <p:cNvSpPr txBox="1">
+                <a:spLocks noRot="1" noChangeAspect="1" noMove="1" noResize="1" noEditPoints="1" noAdjustHandles="1" noChangeArrowheads="1" noChangeShapeType="1" noTextEdit="1"/>
+              </p:cNvSpPr>
+              <p:nvPr/>
+            </p:nvSpPr>
+            <p:spPr>
+              <a:xfrm>
+                <a:off x="508000" y="285750"/>
+                <a:ext cx="3661259" cy="574003"/>
+              </a:xfrm>
+              <a:prstGeom prst="rect">
+                <a:avLst/>
+              </a:prstGeom>
+              <a:blipFill>
+                <a:blip r:embed="rId2"/>
+                <a:stretch>
+                  <a:fillRect/>
+                </a:stretch>
+              </a:blipFill>
+            </p:spPr>
+            <p:txBody>
+              <a:bodyPr/>
+              <a:lstStyle/>
+              <a:p>
+                <a:r>
+                  <a:rPr lang="en-US">
+                    <a:noFill/>
+                  </a:rPr>
+                  <a:t> </a:t>
+                </a:r>
+              </a:p>
+            </p:txBody>
+          </p:sp>
+        </mc:Fallback>
+      </mc:AlternateContent>
+      <p:pic>
+        <p:nvPicPr>
+          <p:cNvPr id="6" name="Picture 5">
+            <a:extLst>
+              <a:ext uri="{FF2B5EF4-FFF2-40B4-BE49-F238E27FC236}">
+                <a16:creationId xmlns:a16="http://schemas.microsoft.com/office/drawing/2014/main" id="{8EAE5F82-51C6-6CDA-5018-5980B60355E7}"/>
+              </a:ext>
+            </a:extLst>
+          </p:cNvPr>
+          <p:cNvPicPr>
+            <a:picLocks noChangeAspect="1"/>
+          </p:cNvPicPr>
+          <p:nvPr/>
+        </p:nvPicPr>
+        <p:blipFill>
+          <a:blip r:embed="rId3"/>
+          <a:stretch>
+            <a:fillRect/>
+          </a:stretch>
+        </p:blipFill>
+        <p:spPr>
+          <a:xfrm>
+            <a:off x="5365750" y="0"/>
+            <a:ext cx="6826250" cy="3737108"/>
+          </a:xfrm>
+          <a:prstGeom prst="rect">
+            <a:avLst/>
+          </a:prstGeom>
+        </p:spPr>
+      </p:pic>
+      <p:pic>
+        <p:nvPicPr>
+          <p:cNvPr id="8" name="Picture 7">
+            <a:extLst>
+              <a:ext uri="{FF2B5EF4-FFF2-40B4-BE49-F238E27FC236}">
+                <a16:creationId xmlns:a16="http://schemas.microsoft.com/office/drawing/2014/main" id="{8C0FA766-0D7D-A97B-C1A3-558D09D277E7}"/>
+              </a:ext>
+            </a:extLst>
+          </p:cNvPr>
+          <p:cNvPicPr>
+            <a:picLocks noChangeAspect="1"/>
+          </p:cNvPicPr>
+          <p:nvPr/>
+        </p:nvPicPr>
+        <p:blipFill>
+          <a:blip r:embed="rId4"/>
+          <a:stretch>
+            <a:fillRect/>
+          </a:stretch>
+        </p:blipFill>
+        <p:spPr>
+          <a:xfrm>
+            <a:off x="5232400" y="3828082"/>
+            <a:ext cx="6959600" cy="1133617"/>
+          </a:xfrm>
+          <a:prstGeom prst="rect">
+            <a:avLst/>
+          </a:prstGeom>
+        </p:spPr>
+      </p:pic>
+      <mc:AlternateContent xmlns:mc="http://schemas.openxmlformats.org/markup-compatibility/2006">
+        <mc:Choice xmlns:a14="http://schemas.microsoft.com/office/drawing/2010/main" Requires="a14">
+          <p:sp>
+            <p:nvSpPr>
+              <p:cNvPr id="9" name="TextBox 8">
+                <a:extLst>
+                  <a:ext uri="{FF2B5EF4-FFF2-40B4-BE49-F238E27FC236}">
+                    <a16:creationId xmlns:a16="http://schemas.microsoft.com/office/drawing/2014/main" id="{DC06ABD3-A159-C7A2-CC2A-4AB642DB0C21}"/>
+                  </a:ext>
+                </a:extLst>
+              </p:cNvPr>
+              <p:cNvSpPr txBox="1"/>
+              <p:nvPr/>
+            </p:nvSpPr>
+            <p:spPr>
+              <a:xfrm>
+                <a:off x="952500" y="1868554"/>
+                <a:ext cx="704744" cy="565732"/>
+              </a:xfrm>
+              <a:prstGeom prst="rect">
+                <a:avLst/>
+              </a:prstGeom>
+              <a:noFill/>
+            </p:spPr>
+            <p:txBody>
+              <a:bodyPr wrap="none" lIns="0" tIns="0" rIns="0" bIns="0" rtlCol="0">
+                <a:spAutoFit/>
+              </a:bodyPr>
+              <a:lstStyle/>
+              <a:p>
+                <a14:m>
+                  <m:oMathPara xmlns:m="http://schemas.openxmlformats.org/officeDocument/2006/math">
+                    <m:oMathParaPr>
+                      <m:jc m:val="centerGroup"/>
+                    </m:oMathParaPr>
+                    <m:oMath xmlns:m="http://schemas.openxmlformats.org/officeDocument/2006/math">
+                      <m:r>
+                        <a:rPr lang="en-US" b="0" i="1" smtClean="0">
+                          <a:latin typeface="Cambria Math" panose="02040503050406030204" pitchFamily="18" charset="0"/>
+                        </a:rPr>
+                        <m:t>𝛼</m:t>
+                      </m:r>
+                      <m:r>
+                        <a:rPr lang="en-US" b="0" i="1" smtClean="0">
+                          <a:latin typeface="Cambria Math" panose="02040503050406030204" pitchFamily="18" charset="0"/>
+                        </a:rPr>
+                        <m:t>=</m:t>
+                      </m:r>
+                      <m:f>
+                        <m:fPr>
+                          <m:ctrlPr>
+                            <a:rPr lang="en-US" b="0" i="1" smtClean="0">
+                              <a:latin typeface="Cambria Math" panose="02040503050406030204" pitchFamily="18" charset="0"/>
+                            </a:rPr>
+                          </m:ctrlPr>
+                        </m:fPr>
+                        <m:num>
+                          <m:r>
+                            <a:rPr lang="en-US" b="0" i="1" smtClean="0">
+                              <a:latin typeface="Cambria Math" panose="02040503050406030204" pitchFamily="18" charset="0"/>
+                            </a:rPr>
+                            <m:t>1</m:t>
+                          </m:r>
+                        </m:num>
+                        <m:den>
+                          <m:sSub>
+                            <m:sSubPr>
+                              <m:ctrlPr>
+                                <a:rPr lang="en-US" b="0" i="1" smtClean="0">
+                                  <a:latin typeface="Cambria Math" panose="02040503050406030204" pitchFamily="18" charset="0"/>
+                                </a:rPr>
+                              </m:ctrlPr>
+                            </m:sSubPr>
+                            <m:e>
+                              <m:r>
+                                <a:rPr lang="en-US" b="0" i="1" smtClean="0">
+                                  <a:latin typeface="Cambria Math" panose="02040503050406030204" pitchFamily="18" charset="0"/>
+                                </a:rPr>
+                                <m:t>𝜖</m:t>
+                              </m:r>
+                            </m:e>
+                            <m:sub>
+                              <m:r>
+                                <a:rPr lang="en-US" b="0" i="1" smtClean="0">
+                                  <a:latin typeface="Cambria Math" panose="02040503050406030204" pitchFamily="18" charset="0"/>
+                                </a:rPr>
+                                <m:t>𝑟</m:t>
+                              </m:r>
+                            </m:sub>
+                          </m:sSub>
+                        </m:den>
+                      </m:f>
+                    </m:oMath>
+                  </m:oMathPara>
+                </a14:m>
+                <a:endParaRPr lang="en-US" dirty="0"/>
+              </a:p>
+            </p:txBody>
+          </p:sp>
+        </mc:Choice>
+        <mc:Fallback>
+          <p:sp>
+            <p:nvSpPr>
+              <p:cNvPr id="9" name="TextBox 8">
+                <a:extLst>
+                  <a:ext uri="{FF2B5EF4-FFF2-40B4-BE49-F238E27FC236}">
+                    <a16:creationId xmlns:a16="http://schemas.microsoft.com/office/drawing/2014/main" id="{DC06ABD3-A159-C7A2-CC2A-4AB642DB0C21}"/>
+                  </a:ext>
+                </a:extLst>
+              </p:cNvPr>
+              <p:cNvSpPr txBox="1">
+                <a:spLocks noRot="1" noChangeAspect="1" noMove="1" noResize="1" noEditPoints="1" noAdjustHandles="1" noChangeArrowheads="1" noChangeShapeType="1" noTextEdit="1"/>
+              </p:cNvSpPr>
+              <p:nvPr/>
+            </p:nvSpPr>
+            <p:spPr>
+              <a:xfrm>
+                <a:off x="952500" y="1868554"/>
+                <a:ext cx="704744" cy="565732"/>
+              </a:xfrm>
+              <a:prstGeom prst="rect">
+                <a:avLst/>
+              </a:prstGeom>
+              <a:blipFill>
+                <a:blip r:embed="rId5"/>
+                <a:stretch>
+                  <a:fillRect/>
+                </a:stretch>
+              </a:blipFill>
+            </p:spPr>
+            <p:txBody>
+              <a:bodyPr/>
+              <a:lstStyle/>
+              <a:p>
+                <a:r>
+                  <a:rPr lang="en-US">
+                    <a:noFill/>
+                  </a:rPr>
+                  <a:t> </a:t>
+                </a:r>
+              </a:p>
+            </p:txBody>
+          </p:sp>
+        </mc:Fallback>
+      </mc:AlternateContent>
+      <mc:AlternateContent xmlns:mc="http://schemas.openxmlformats.org/markup-compatibility/2006">
+        <mc:Choice xmlns:a14="http://schemas.microsoft.com/office/drawing/2010/main" Requires="a14">
+          <p:sp>
+            <p:nvSpPr>
+              <p:cNvPr id="10" name="TextBox 9">
+                <a:extLst>
+                  <a:ext uri="{FF2B5EF4-FFF2-40B4-BE49-F238E27FC236}">
+                    <a16:creationId xmlns:a16="http://schemas.microsoft.com/office/drawing/2014/main" id="{903C2213-1909-DE58-AF44-0B84FE9C17E6}"/>
+                  </a:ext>
+                </a:extLst>
+              </p:cNvPr>
+              <p:cNvSpPr txBox="1"/>
+              <p:nvPr/>
+            </p:nvSpPr>
+            <p:spPr>
+              <a:xfrm>
+                <a:off x="2075637" y="2012920"/>
+                <a:ext cx="778098" cy="276999"/>
+              </a:xfrm>
+              <a:prstGeom prst="rect">
+                <a:avLst/>
+              </a:prstGeom>
+              <a:noFill/>
+            </p:spPr>
+            <p:txBody>
+              <a:bodyPr wrap="none" lIns="0" tIns="0" rIns="0" bIns="0" rtlCol="0">
+                <a:spAutoFit/>
+              </a:bodyPr>
+              <a:lstStyle/>
+              <a:p>
+                <a14:m>
+                  <m:oMathPara xmlns:m="http://schemas.openxmlformats.org/officeDocument/2006/math">
+                    <m:oMathParaPr>
+                      <m:jc m:val="centerGroup"/>
+                    </m:oMathParaPr>
+                    <m:oMath xmlns:m="http://schemas.openxmlformats.org/officeDocument/2006/math">
+                      <m:r>
+                        <a:rPr lang="en-US" b="0" i="1" smtClean="0">
+                          <a:latin typeface="Cambria Math" panose="02040503050406030204" pitchFamily="18" charset="0"/>
+                        </a:rPr>
+                        <m:t>𝜙</m:t>
+                      </m:r>
+                      <m:r>
+                        <a:rPr lang="en-US" b="0" i="1" smtClean="0">
+                          <a:latin typeface="Cambria Math" panose="02040503050406030204" pitchFamily="18" charset="0"/>
+                        </a:rPr>
+                        <m:t>=</m:t>
+                      </m:r>
+                      <m:sSub>
+                        <m:sSubPr>
+                          <m:ctrlPr>
+                            <a:rPr lang="en-US" b="0" i="1" smtClean="0">
+                              <a:latin typeface="Cambria Math" panose="02040503050406030204" pitchFamily="18" charset="0"/>
+                            </a:rPr>
+                          </m:ctrlPr>
+                        </m:sSubPr>
+                        <m:e>
+                          <m:r>
+                            <a:rPr lang="en-US" b="0" i="1" smtClean="0">
+                              <a:latin typeface="Cambria Math" panose="02040503050406030204" pitchFamily="18" charset="0"/>
+                            </a:rPr>
+                            <m:t>𝐻</m:t>
+                          </m:r>
+                        </m:e>
+                        <m:sub>
+                          <m:r>
+                            <a:rPr lang="en-US" b="0" i="1" smtClean="0">
+                              <a:latin typeface="Cambria Math" panose="02040503050406030204" pitchFamily="18" charset="0"/>
+                            </a:rPr>
+                            <m:t>𝑥</m:t>
+                          </m:r>
+                        </m:sub>
+                      </m:sSub>
+                    </m:oMath>
+                  </m:oMathPara>
+                </a14:m>
+                <a:endParaRPr lang="en-US" dirty="0"/>
+              </a:p>
+            </p:txBody>
+          </p:sp>
+        </mc:Choice>
+        <mc:Fallback>
+          <p:sp>
+            <p:nvSpPr>
+              <p:cNvPr id="10" name="TextBox 9">
+                <a:extLst>
+                  <a:ext uri="{FF2B5EF4-FFF2-40B4-BE49-F238E27FC236}">
+                    <a16:creationId xmlns:a16="http://schemas.microsoft.com/office/drawing/2014/main" id="{903C2213-1909-DE58-AF44-0B84FE9C17E6}"/>
+                  </a:ext>
+                </a:extLst>
+              </p:cNvPr>
+              <p:cNvSpPr txBox="1">
+                <a:spLocks noRot="1" noChangeAspect="1" noMove="1" noResize="1" noEditPoints="1" noAdjustHandles="1" noChangeArrowheads="1" noChangeShapeType="1" noTextEdit="1"/>
+              </p:cNvSpPr>
+              <p:nvPr/>
+            </p:nvSpPr>
+            <p:spPr>
+              <a:xfrm>
+                <a:off x="2075637" y="2012920"/>
+                <a:ext cx="778098" cy="276999"/>
+              </a:xfrm>
+              <a:prstGeom prst="rect">
+                <a:avLst/>
+              </a:prstGeom>
+              <a:blipFill>
+                <a:blip r:embed="rId6"/>
+                <a:stretch>
+                  <a:fillRect l="-10156" r="-781" b="-32609"/>
+                </a:stretch>
+              </a:blipFill>
+            </p:spPr>
+            <p:txBody>
+              <a:bodyPr/>
+              <a:lstStyle/>
+              <a:p>
+                <a:r>
+                  <a:rPr lang="en-US">
+                    <a:noFill/>
+                  </a:rPr>
+                  <a:t> </a:t>
+                </a:r>
+              </a:p>
+            </p:txBody>
+          </p:sp>
+        </mc:Fallback>
+      </mc:AlternateContent>
+      <mc:AlternateContent xmlns:mc="http://schemas.openxmlformats.org/markup-compatibility/2006">
+        <mc:Choice xmlns:a14="http://schemas.microsoft.com/office/drawing/2010/main" Requires="a14">
+          <p:sp>
+            <p:nvSpPr>
+              <p:cNvPr id="11" name="TextBox 10">
+                <a:extLst>
+                  <a:ext uri="{FF2B5EF4-FFF2-40B4-BE49-F238E27FC236}">
+                    <a16:creationId xmlns:a16="http://schemas.microsoft.com/office/drawing/2014/main" id="{61FAE47B-C5F9-1ACB-77F8-BC0D81326186}"/>
+                  </a:ext>
+                </a:extLst>
+              </p:cNvPr>
+              <p:cNvSpPr txBox="1"/>
+              <p:nvPr/>
+            </p:nvSpPr>
+            <p:spPr>
+              <a:xfrm>
+                <a:off x="3198480" y="2007469"/>
+                <a:ext cx="970779" cy="282450"/>
+              </a:xfrm>
+              <a:prstGeom prst="rect">
+                <a:avLst/>
+              </a:prstGeom>
+              <a:noFill/>
+            </p:spPr>
+            <p:txBody>
+              <a:bodyPr wrap="none" lIns="0" tIns="0" rIns="0" bIns="0" rtlCol="0">
+                <a:spAutoFit/>
+              </a:bodyPr>
+              <a:lstStyle/>
+              <a:p>
+                <a14:m>
+                  <m:oMathPara xmlns:m="http://schemas.openxmlformats.org/officeDocument/2006/math">
+                    <m:oMathParaPr>
+                      <m:jc m:val="centerGroup"/>
+                    </m:oMathParaPr>
+                    <m:oMath xmlns:m="http://schemas.openxmlformats.org/officeDocument/2006/math">
+                      <m:r>
+                        <a:rPr lang="en-US" b="0" i="1" smtClean="0">
+                          <a:latin typeface="Cambria Math" panose="02040503050406030204" pitchFamily="18" charset="0"/>
+                        </a:rPr>
+                        <m:t>𝛽</m:t>
+                      </m:r>
+                      <m:r>
+                        <a:rPr lang="en-US" b="0" i="1" smtClean="0">
+                          <a:latin typeface="Cambria Math" panose="02040503050406030204" pitchFamily="18" charset="0"/>
+                        </a:rPr>
+                        <m:t>=</m:t>
+                      </m:r>
+                      <m:sSubSup>
+                        <m:sSubSupPr>
+                          <m:ctrlPr>
+                            <a:rPr lang="en-US" b="0" i="1" smtClean="0">
+                              <a:latin typeface="Cambria Math" panose="02040503050406030204" pitchFamily="18" charset="0"/>
+                            </a:rPr>
+                          </m:ctrlPr>
+                        </m:sSubSupPr>
+                        <m:e>
+                          <m:r>
+                            <a:rPr lang="en-US" b="0" i="1" smtClean="0">
+                              <a:latin typeface="Cambria Math" panose="02040503050406030204" pitchFamily="18" charset="0"/>
+                            </a:rPr>
+                            <m:t>𝑘</m:t>
+                          </m:r>
+                        </m:e>
+                        <m:sub>
+                          <m:r>
+                            <a:rPr lang="en-US" b="0" i="1" smtClean="0">
+                              <a:latin typeface="Cambria Math" panose="02040503050406030204" pitchFamily="18" charset="0"/>
+                            </a:rPr>
+                            <m:t>0</m:t>
+                          </m:r>
+                        </m:sub>
+                        <m:sup>
+                          <m:r>
+                            <a:rPr lang="en-US" b="0" i="1" smtClean="0">
+                              <a:latin typeface="Cambria Math" panose="02040503050406030204" pitchFamily="18" charset="0"/>
+                            </a:rPr>
+                            <m:t>2</m:t>
+                          </m:r>
+                        </m:sup>
+                      </m:sSubSup>
+                      <m:sSub>
+                        <m:sSubPr>
+                          <m:ctrlPr>
+                            <a:rPr lang="en-US" b="0" i="1" smtClean="0">
+                              <a:latin typeface="Cambria Math" panose="02040503050406030204" pitchFamily="18" charset="0"/>
+                            </a:rPr>
+                          </m:ctrlPr>
+                        </m:sSubPr>
+                        <m:e>
+                          <m:r>
+                            <a:rPr lang="en-US" b="0" i="1" smtClean="0">
+                              <a:latin typeface="Cambria Math" panose="02040503050406030204" pitchFamily="18" charset="0"/>
+                            </a:rPr>
+                            <m:t>𝜇</m:t>
+                          </m:r>
+                        </m:e>
+                        <m:sub>
+                          <m:r>
+                            <a:rPr lang="en-US" b="0" i="1" smtClean="0">
+                              <a:latin typeface="Cambria Math" panose="02040503050406030204" pitchFamily="18" charset="0"/>
+                            </a:rPr>
+                            <m:t>𝑟</m:t>
+                          </m:r>
+                        </m:sub>
+                      </m:sSub>
+                    </m:oMath>
+                  </m:oMathPara>
+                </a14:m>
+                <a:endParaRPr lang="en-US" dirty="0"/>
+              </a:p>
+            </p:txBody>
+          </p:sp>
+        </mc:Choice>
+        <mc:Fallback>
+          <p:sp>
+            <p:nvSpPr>
+              <p:cNvPr id="11" name="TextBox 10">
+                <a:extLst>
+                  <a:ext uri="{FF2B5EF4-FFF2-40B4-BE49-F238E27FC236}">
+                    <a16:creationId xmlns:a16="http://schemas.microsoft.com/office/drawing/2014/main" id="{61FAE47B-C5F9-1ACB-77F8-BC0D81326186}"/>
+                  </a:ext>
+                </a:extLst>
+              </p:cNvPr>
+              <p:cNvSpPr txBox="1">
+                <a:spLocks noRot="1" noChangeAspect="1" noMove="1" noResize="1" noEditPoints="1" noAdjustHandles="1" noChangeArrowheads="1" noChangeShapeType="1" noTextEdit="1"/>
+              </p:cNvSpPr>
+              <p:nvPr/>
+            </p:nvSpPr>
+            <p:spPr>
+              <a:xfrm>
+                <a:off x="3198480" y="2007469"/>
+                <a:ext cx="970779" cy="282450"/>
+              </a:xfrm>
+              <a:prstGeom prst="rect">
+                <a:avLst/>
+              </a:prstGeom>
+              <a:blipFill>
+                <a:blip r:embed="rId7"/>
+                <a:stretch>
+                  <a:fillRect l="-8805" r="-629" b="-31915"/>
+                </a:stretch>
+              </a:blipFill>
+            </p:spPr>
+            <p:txBody>
+              <a:bodyPr/>
+              <a:lstStyle/>
+              <a:p>
+                <a:r>
+                  <a:rPr lang="en-US">
+                    <a:noFill/>
+                  </a:rPr>
+                  <a:t> </a:t>
+                </a:r>
+              </a:p>
+            </p:txBody>
+          </p:sp>
+        </mc:Fallback>
+      </mc:AlternateContent>
+      <mc:AlternateContent xmlns:mc="http://schemas.openxmlformats.org/markup-compatibility/2006">
+        <mc:Choice xmlns:a14="http://schemas.microsoft.com/office/drawing/2010/main" Requires="a14">
+          <p:sp>
+            <p:nvSpPr>
+              <p:cNvPr id="12" name="TextBox 11">
+                <a:extLst>
+                  <a:ext uri="{FF2B5EF4-FFF2-40B4-BE49-F238E27FC236}">
+                    <a16:creationId xmlns:a16="http://schemas.microsoft.com/office/drawing/2014/main" id="{17EE84D0-AF37-0837-87DB-17B8FA6C83A4}"/>
+                  </a:ext>
+                </a:extLst>
+              </p:cNvPr>
+              <p:cNvSpPr txBox="1"/>
+              <p:nvPr/>
+            </p:nvSpPr>
+            <p:spPr>
+              <a:xfrm>
+                <a:off x="3117850" y="2434286"/>
+                <a:ext cx="1353897" cy="278025"/>
+              </a:xfrm>
+              <a:prstGeom prst="rect">
+                <a:avLst/>
+              </a:prstGeom>
+              <a:noFill/>
+            </p:spPr>
+            <p:txBody>
+              <a:bodyPr wrap="none" lIns="0" tIns="0" rIns="0" bIns="0" rtlCol="0">
+                <a:spAutoFit/>
+              </a:bodyPr>
+              <a:lstStyle/>
+              <a:p>
+                <a14:m>
+                  <m:oMathPara xmlns:m="http://schemas.openxmlformats.org/officeDocument/2006/math">
+                    <m:oMathParaPr>
+                      <m:jc m:val="centerGroup"/>
+                    </m:oMathParaPr>
+                    <m:oMath xmlns:m="http://schemas.openxmlformats.org/officeDocument/2006/math">
+                      <m:sSub>
+                        <m:sSubPr>
+                          <m:ctrlPr>
+                            <a:rPr lang="en-US" b="0" i="1" smtClean="0">
+                              <a:latin typeface="Cambria Math" panose="02040503050406030204" pitchFamily="18" charset="0"/>
+                            </a:rPr>
+                          </m:ctrlPr>
+                        </m:sSubPr>
+                        <m:e>
+                          <m:r>
+                            <a:rPr lang="en-US" b="0" i="1" smtClean="0">
+                              <a:latin typeface="Cambria Math" panose="02040503050406030204" pitchFamily="18" charset="0"/>
+                            </a:rPr>
+                            <m:t>𝑘</m:t>
+                          </m:r>
+                        </m:e>
+                        <m:sub>
+                          <m:r>
+                            <a:rPr lang="en-US" b="0" i="1" smtClean="0">
+                              <a:latin typeface="Cambria Math" panose="02040503050406030204" pitchFamily="18" charset="0"/>
+                            </a:rPr>
+                            <m:t>0</m:t>
+                          </m:r>
+                        </m:sub>
+                      </m:sSub>
+                      <m:r>
+                        <a:rPr lang="en-US" b="0" i="1" smtClean="0">
+                          <a:latin typeface="Cambria Math" panose="02040503050406030204" pitchFamily="18" charset="0"/>
+                        </a:rPr>
+                        <m:t>=</m:t>
+                      </m:r>
+                      <m:r>
+                        <a:rPr lang="en-US" b="0" i="1" smtClean="0">
+                          <a:latin typeface="Cambria Math" panose="02040503050406030204" pitchFamily="18" charset="0"/>
+                        </a:rPr>
+                        <m:t>𝜔</m:t>
+                      </m:r>
+                      <m:rad>
+                        <m:radPr>
+                          <m:degHide m:val="on"/>
+                          <m:ctrlPr>
+                            <a:rPr lang="en-US" b="0" i="1" smtClean="0">
+                              <a:latin typeface="Cambria Math" panose="02040503050406030204" pitchFamily="18" charset="0"/>
+                            </a:rPr>
+                          </m:ctrlPr>
+                        </m:radPr>
+                        <m:deg/>
+                        <m:e>
+                          <m:sSub>
+                            <m:sSubPr>
+                              <m:ctrlPr>
+                                <a:rPr lang="en-US" b="0" i="1" smtClean="0">
+                                  <a:latin typeface="Cambria Math" panose="02040503050406030204" pitchFamily="18" charset="0"/>
+                                </a:rPr>
+                              </m:ctrlPr>
+                            </m:sSubPr>
+                            <m:e>
+                              <m:r>
+                                <a:rPr lang="en-US" b="0" i="1" smtClean="0">
+                                  <a:latin typeface="Cambria Math" panose="02040503050406030204" pitchFamily="18" charset="0"/>
+                                </a:rPr>
+                                <m:t>𝜖</m:t>
+                              </m:r>
+                            </m:e>
+                            <m:sub>
+                              <m:r>
+                                <a:rPr lang="en-US" b="0" i="1" smtClean="0">
+                                  <a:latin typeface="Cambria Math" panose="02040503050406030204" pitchFamily="18" charset="0"/>
+                                </a:rPr>
+                                <m:t>0</m:t>
+                              </m:r>
+                            </m:sub>
+                          </m:sSub>
+                          <m:sSub>
+                            <m:sSubPr>
+                              <m:ctrlPr>
+                                <a:rPr lang="en-US" b="0" i="1" smtClean="0">
+                                  <a:latin typeface="Cambria Math" panose="02040503050406030204" pitchFamily="18" charset="0"/>
+                                </a:rPr>
+                              </m:ctrlPr>
+                            </m:sSubPr>
+                            <m:e>
+                              <m:r>
+                                <a:rPr lang="en-US" b="0" i="1" smtClean="0">
+                                  <a:latin typeface="Cambria Math" panose="02040503050406030204" pitchFamily="18" charset="0"/>
+                                </a:rPr>
+                                <m:t>𝜇</m:t>
+                              </m:r>
+                            </m:e>
+                            <m:sub>
+                              <m:r>
+                                <a:rPr lang="en-US" b="0" i="1" smtClean="0">
+                                  <a:latin typeface="Cambria Math" panose="02040503050406030204" pitchFamily="18" charset="0"/>
+                                </a:rPr>
+                                <m:t>0</m:t>
+                              </m:r>
+                            </m:sub>
+                          </m:sSub>
+                        </m:e>
+                      </m:rad>
+                    </m:oMath>
+                  </m:oMathPara>
+                </a14:m>
+                <a:endParaRPr lang="en-US" dirty="0"/>
+              </a:p>
+            </p:txBody>
+          </p:sp>
+        </mc:Choice>
+        <mc:Fallback>
+          <p:sp>
+            <p:nvSpPr>
+              <p:cNvPr id="12" name="TextBox 11">
+                <a:extLst>
+                  <a:ext uri="{FF2B5EF4-FFF2-40B4-BE49-F238E27FC236}">
+                    <a16:creationId xmlns:a16="http://schemas.microsoft.com/office/drawing/2014/main" id="{17EE84D0-AF37-0837-87DB-17B8FA6C83A4}"/>
+                  </a:ext>
+                </a:extLst>
+              </p:cNvPr>
+              <p:cNvSpPr txBox="1">
+                <a:spLocks noRot="1" noChangeAspect="1" noMove="1" noResize="1" noEditPoints="1" noAdjustHandles="1" noChangeArrowheads="1" noChangeShapeType="1" noTextEdit="1"/>
+              </p:cNvSpPr>
+              <p:nvPr/>
+            </p:nvSpPr>
+            <p:spPr>
+              <a:xfrm>
+                <a:off x="3117850" y="2434286"/>
+                <a:ext cx="1353897" cy="278025"/>
+              </a:xfrm>
+              <a:prstGeom prst="rect">
+                <a:avLst/>
+              </a:prstGeom>
+              <a:blipFill>
+                <a:blip r:embed="rId8"/>
+                <a:stretch>
+                  <a:fillRect l="-4036" r="-1345" b="-21739"/>
+                </a:stretch>
+              </a:blipFill>
+            </p:spPr>
+            <p:txBody>
+              <a:bodyPr/>
+              <a:lstStyle/>
+              <a:p>
+                <a:r>
+                  <a:rPr lang="en-US">
+                    <a:noFill/>
+                  </a:rPr>
+                  <a:t> </a:t>
+                </a:r>
+              </a:p>
+            </p:txBody>
+          </p:sp>
+        </mc:Fallback>
+      </mc:AlternateContent>
+    </p:spTree>
+    <p:extLst>
+      <p:ext uri="{BB962C8B-B14F-4D97-AF65-F5344CB8AC3E}">
+        <p14:creationId xmlns:p14="http://schemas.microsoft.com/office/powerpoint/2010/main" val="2174119048"/>
       </p:ext>
     </p:extLst>
   </p:cSld>
